--- a/output/Bookly_Decagon_SE_Take_Home.pptx
+++ b/output/Bookly_Decagon_SE_Take_Home.pptx
@@ -2,17 +2,17 @@
 <file path=ppt/presentation.xml><?xml version="1.0" encoding="utf-8"?>
 <p:presentation xmlns:p="http://schemas.openxmlformats.org/presentationml/2006/main">
   <p:sldMasterIdLst>
-    <p:sldMasterId xmlns:r="http://schemas.openxmlformats.org/officeDocument/2006/relationships" id="2147483648" r:id="R5818d6de11b2496f"/>
+    <p:sldMasterId xmlns:r="http://schemas.openxmlformats.org/officeDocument/2006/relationships" id="2147483648" r:id="Rcd27316836904eab"/>
   </p:sldMasterIdLst>
   <p:notesMasterIdLst>
-    <p:notesMasterId xmlns:r="http://schemas.openxmlformats.org/officeDocument/2006/relationships" r:id="Re721dd4036d94abf"/>
+    <p:notesMasterId xmlns:r="http://schemas.openxmlformats.org/officeDocument/2006/relationships" r:id="R3930c2a882ee4d28"/>
   </p:notesMasterIdLst>
   <p:sldIdLst>
-    <p:sldId xmlns:r="http://schemas.openxmlformats.org/officeDocument/2006/relationships" id="256" r:id="R986096df8e044793"/>
-    <p:sldId xmlns:r="http://schemas.openxmlformats.org/officeDocument/2006/relationships" id="257" r:id="R5323b303892740a3"/>
-    <p:sldId xmlns:r="http://schemas.openxmlformats.org/officeDocument/2006/relationships" id="258" r:id="Rc61655e50c6f4bed"/>
-    <p:sldId xmlns:r="http://schemas.openxmlformats.org/officeDocument/2006/relationships" id="259" r:id="Ra1ea33ee86ce4aa4"/>
-    <p:sldId xmlns:r="http://schemas.openxmlformats.org/officeDocument/2006/relationships" id="260" r:id="R773fd183574d4e43"/>
+    <p:sldId xmlns:r="http://schemas.openxmlformats.org/officeDocument/2006/relationships" id="256" r:id="R3ed48669e55b4162"/>
+    <p:sldId xmlns:r="http://schemas.openxmlformats.org/officeDocument/2006/relationships" id="257" r:id="Rb182146e164c4bea"/>
+    <p:sldId xmlns:r="http://schemas.openxmlformats.org/officeDocument/2006/relationships" id="258" r:id="Rf6f70d4ffe754200"/>
+    <p:sldId xmlns:r="http://schemas.openxmlformats.org/officeDocument/2006/relationships" id="259" r:id="Red339f252bb94eca"/>
+    <p:sldId xmlns:r="http://schemas.openxmlformats.org/officeDocument/2006/relationships" id="260" r:id="Re07154d6994c4f40"/>
   </p:sldIdLst>
   <p:sldSz cx="12192000" cy="6858000"/>
   <p:notesSz cx="6858000" cy="9144000"/>
@@ -446,17 +446,17 @@
           <a:lstStyle xmlns:a="http://schemas.openxmlformats.org/drawingml/2006/main"/>
           <a:p xmlns:a="http://schemas.openxmlformats.org/drawingml/2006/main">
             <a:r>
-              <a:t>Open with the point of view: language is probabilistic; business commitments are not.</a:t>
-            </a:r>
-          </a:p>
-          <a:p xmlns:a="http://schemas.openxmlformats.org/drawingml/2006/main">
-            <a:r>
-              <a:t>Bookly demonstrates two operational workflows and one read-only knowledge workflow.</a:t>
-            </a:r>
-          </a:p>
-          <a:p xmlns:a="http://schemas.openxmlformats.org/drawingml/2006/main">
-            <a:r>
-              <a:t>The model owns interpretation and grounded FAQ prose. Typed code owns facts, policy, confirmation, and writes.</a:t>
+              <a:t>My core belief is that a customer should be able to speak naturally, while the business keeps deterministic control over facts and actions.</a:t>
+            </a:r>
+          </a:p>
+          <a:p xmlns:a="http://schemas.openxmlformats.org/drawingml/2006/main">
+            <a:r>
+              <a:t>Bookly reflects that split directly: the model interprets language and writes grounded FAQ prose; TypeScript workflows own identity, policy, confirmation, tool calls, and writes.</a:t>
+            </a:r>
+          </a:p>
+          <a:p xmlns:a="http://schemas.openxmlformats.org/drawingml/2006/main">
+            <a:r>
+              <a:t>I kept the scope intentionally narrow so those boundaries are visible in a live review rather than hidden inside an agent framework.</a:t>
             </a:r>
           </a:p>
           <a:p xmlns:a="http://schemas.openxmlformats.org/drawingml/2006/main">
@@ -471,12 +471,17 @@
           </a:p>
           <a:p xmlns:a="http://schemas.openxmlformats.org/drawingml/2006/main">
             <a:r>
-              <a:t>- Assignment brief: SE Take-Home (1).pdf</a:t>
+              <a:t>- Assignment brief supplied by the user</a:t>
             </a:r>
           </a:p>
           <a:p xmlns:a="http://schemas.openxmlformats.org/drawingml/2006/main">
             <a:r>
               <a:t>- README.md</a:t>
+            </a:r>
+          </a:p>
+          <a:p xmlns:a="http://schemas.openxmlformats.org/drawingml/2006/main">
+            <a:r>
+              <a:t>- docs/DECISIONS.md</a:t>
             </a:r>
           </a:p>
         </p:txBody>
@@ -546,22 +551,32 @@
           <a:lstStyle xmlns:a="http://schemas.openxmlformats.org/drawingml/2006/main"/>
           <a:p xmlns:a="http://schemas.openxmlformats.org/drawingml/2006/main">
             <a:r>
-              <a:t>Walk the top row first: customer input is interpreted through one narrow prompt, then the orchestrator owns state and dispatch.</a:t>
-            </a:r>
-          </a:p>
-          <a:p xmlns:a="http://schemas.openxmlformats.org/drawingml/2006/main">
-            <a:r>
-              <a:t>The lower-left path is the only customer-facing generation: retrieval, passage-constrained answer, and an explicit citation gate.</a:t>
-            </a:r>
-          </a:p>
-          <a:p xmlns:a="http://schemas.openxmlformats.org/drawingml/2006/main">
-            <a:r>
-              <a:t>The lower-right path owns operational work. A write cannot happen until the workflow and createReturn both accept explicit confirmation.</a:t>
-            </a:r>
-          </a:p>
-          <a:p xmlns:a="http://schemas.openxmlformats.org/drawingml/2006/main">
-            <a:r>
-              <a:t>Everything is a direct API call or typed TypeScript function; there is no all-in-one agent platform.</a:t>
+              <a:t>The API validates a small request contract and hands the message to BooklyAgent.</a:t>
+            </a:r>
+          </a:p>
+          <a:p xmlns:a="http://schemas.openxmlformats.org/drawingml/2006/main">
+            <a:r>
+              <a:t>The intent prompt is a direct Responses API call with Structured Output. It proposes intent, literal slots, and a contextAction; it never receives tools.</a:t>
+            </a:r>
+          </a:p>
+          <a:p xmlns:a="http://schemas.openxmlformats.org/drawingml/2006/main">
+            <a:r>
+              <a:t>BooklyAgent validates those proposed slots against the message, owns structured session memory, and dispatches one explicit workflow.</a:t>
+            </a:r>
+          </a:p>
+          <a:p xmlns:a="http://schemas.openxmlformats.org/drawingml/2006/main">
+            <a:r>
+              <a:t>The FAQ path uses a second prompt only after deterministic retrieval. The application accepts the answer only when every cited passage ID was actually retrieved.</a:t>
+            </a:r>
+          </a:p>
+          <a:p xmlns:a="http://schemas.openxmlformats.org/drawingml/2006/main">
+            <a:r>
+              <a:t>The action path is entirely typed code. Reads establish identity and eligibility; a deterministic confirmation policy stages permission; createReturn independently rechecks the write conditions and idempotency.</a:t>
+            </a:r>
+          </a:p>
+          <a:p xmlns:a="http://schemas.openxmlformats.org/drawingml/2006/main">
+            <a:r>
+              <a:t>The trace shows allowlisted routing, memory, tool, and guardrail metadata without prompts, customer text, or private reasoning.</a:t>
             </a:r>
           </a:p>
           <a:p xmlns:a="http://schemas.openxmlformats.org/drawingml/2006/main">
@@ -576,6 +591,11 @@
           </a:p>
           <a:p xmlns:a="http://schemas.openxmlformats.org/drawingml/2006/main">
             <a:r>
+              <a:t>- src/server.ts</a:t>
+            </a:r>
+          </a:p>
+          <a:p xmlns:a="http://schemas.openxmlformats.org/drawingml/2006/main">
+            <a:r>
               <a:t>- src/agent/bookly-agent.ts</a:t>
             </a:r>
           </a:p>
@@ -586,12 +606,17 @@
           </a:p>
           <a:p xmlns:a="http://schemas.openxmlformats.org/drawingml/2006/main">
             <a:r>
-              <a:t>- src/providers/openai-knowledge-answerer.ts</a:t>
-            </a:r>
-          </a:p>
-          <a:p xmlns:a="http://schemas.openxmlformats.org/drawingml/2006/main">
-            <a:r>
               <a:t>- src/agent/session-memory.ts</a:t>
+            </a:r>
+          </a:p>
+          <a:p xmlns:a="http://schemas.openxmlformats.org/drawingml/2006/main">
+            <a:r>
+              <a:t>- src/workflows/faq-workflow.ts</a:t>
+            </a:r>
+          </a:p>
+          <a:p xmlns:a="http://schemas.openxmlformats.org/drawingml/2006/main">
+            <a:r>
+              <a:t>- src/workflows/return-workflow.ts</a:t>
             </a:r>
           </a:p>
           <a:p xmlns:a="http://schemas.openxmlformats.org/drawingml/2006/main">
@@ -666,17 +691,22 @@
           <a:lstStyle xmlns:a="http://schemas.openxmlformats.org/drawingml/2006/main"/>
           <a:p xmlns:a="http://schemas.openxmlformats.org/drawingml/2006/main">
             <a:r>
-              <a:t>Answer the obvious interviewer question directly: a pure decision tree cannot generalize phrasing or synthesize a grounded FAQ answer.</a:t>
-            </a:r>
-          </a:p>
-          <a:p xmlns:a="http://schemas.openxmlformats.org/drawingml/2006/main">
-            <a:r>
-              <a:t>The workflows are deliberately deterministic where Bookly makes a commitment, but they are reusable primitives rather than one hardcoded tree per utterance.</a:t>
-            </a:r>
-          </a:p>
-          <a:p xmlns:a="http://schemas.openxmlformats.org/drawingml/2006/main">
-            <a:r>
-              <a:t>At twenty intents, read-only knowledge intents share retrieval and grounding; read intents share identity plus typed reads; write intents add policy, confirmation, and idempotency.</a:t>
+              <a:t>Decision one is the architectural thesis in code: the model interprets language, but BooklyAgent validates context and owns dispatch.</a:t>
+            </a:r>
+          </a:p>
+          <a:p xmlns:a="http://schemas.openxmlformats.org/drawingml/2006/main">
+            <a:r>
+              <a:t>Decision two is the hallucination boundary. Retrieval is deterministic, the answer prompt gets only approved passages, and citation membership is checked before any generated prose is shown.</a:t>
+            </a:r>
+          </a:p>
+          <a:p xmlns:a="http://schemas.openxmlformats.org/drawingml/2006/main">
+            <a:r>
+              <a:t>Decision three is the write boundary. Natural confirmation is supported, but the parser and createReturn both live in code and the tool independently enforces confirmation, identity, policy, and idempotency.</a:t>
+            </a:r>
+          </a:p>
+          <a:p xmlns:a="http://schemas.openxmlformats.org/drawingml/2006/main">
+            <a:r>
+              <a:t>The tradeoff is intentional: there is more explicit TypeScript than in a general agent loop, but the risky behavior is readable and testable in a live review.</a:t>
             </a:r>
           </a:p>
           <a:p xmlns:a="http://schemas.openxmlformats.org/drawingml/2006/main">
@@ -696,12 +726,27 @@
           </a:p>
           <a:p xmlns:a="http://schemas.openxmlformats.org/drawingml/2006/main">
             <a:r>
+              <a:t>- src/agent/bookly-agent.ts</a:t>
+            </a:r>
+          </a:p>
+          <a:p xmlns:a="http://schemas.openxmlformats.org/drawingml/2006/main">
+            <a:r>
+              <a:t>- src/providers/openai-intent-router.ts</a:t>
+            </a:r>
+          </a:p>
+          <a:p xmlns:a="http://schemas.openxmlformats.org/drawingml/2006/main">
+            <a:r>
               <a:t>- src/workflows/faq-workflow.ts</a:t>
             </a:r>
           </a:p>
           <a:p xmlns:a="http://schemas.openxmlformats.org/drawingml/2006/main">
             <a:r>
-              <a:t>- src/workflows/return-workflow.ts</a:t>
+              <a:t>- src/agent/confirmation-policy.ts</a:t>
+            </a:r>
+          </a:p>
+          <a:p xmlns:a="http://schemas.openxmlformats.org/drawingml/2006/main">
+            <a:r>
+              <a:t>- src/tools/mock-bookly-tools.ts</a:t>
             </a:r>
           </a:p>
         </p:txBody>
@@ -771,17 +816,22 @@
           <a:lstStyle xmlns:a="http://schemas.openxmlformats.org/drawingml/2006/main"/>
           <a:p xmlns:a="http://schemas.openxmlformats.org/drawingml/2006/main">
             <a:r>
-              <a:t>Use this slide to show production thinking beyond the happy path.</a:t>
-            </a:r>
-          </a:p>
-          <a:p xmlns:a="http://schemas.openxmlformats.org/drawingml/2006/main">
-            <a:r>
-              <a:t>Do not claim measured production values. These are acceptance metrics and operating signals for a real rollout.</a:t>
-            </a:r>
-          </a:p>
-          <a:p xmlns:a="http://schemas.openxmlformats.org/drawingml/2006/main">
-            <a:r>
-              <a:t>The live trace already exposes safe categories for routing, retrieval, tools, memory, and guardrails.</a:t>
+              <a:t>These are customer-experience decisions as much as safety decisions. The agent should not make the customer repeat verified information, but it must not carry context across a different order or customer.</a:t>
+            </a:r>
+          </a:p>
+          <a:p xmlns:a="http://schemas.openxmlformats.org/drawingml/2006/main">
+            <a:r>
+              <a:t>A pending return is a staged write. Any changed identity or reason invalidates the prior confirmation and forces the workflow to validate the new facts.</a:t>
+            </a:r>
+          </a:p>
+          <a:p xmlns:a="http://schemas.openxmlformats.org/drawingml/2006/main">
+            <a:r>
+              <a:t>After a return is created, label or refund problems are a separate existing-return route. That path can offer the specialist handoff but can never replay createReturn.</a:t>
+            </a:r>
+          </a:p>
+          <a:p xmlns:a="http://schemas.openxmlformats.org/drawingml/2006/main">
+            <a:r>
+              <a:t>The final suite has 196 tests covering both routers, multi-turn memory, grounding, write safety, tool failures, HTTP behavior, reset, duplicate protection, and aftercare.</a:t>
             </a:r>
           </a:p>
           <a:p xmlns:a="http://schemas.openxmlformats.org/drawingml/2006/main">
@@ -796,22 +846,22 @@
           </a:p>
           <a:p xmlns:a="http://schemas.openxmlformats.org/drawingml/2006/main">
             <a:r>
-              <a:t>- docs/DECISIONS.md</a:t>
+              <a:t>- tests/</a:t>
+            </a:r>
+          </a:p>
+          <a:p xmlns:a="http://schemas.openxmlformats.org/drawingml/2006/main">
+            <a:r>
+              <a:t>- src/agent/bookly-agent.ts</a:t>
+            </a:r>
+          </a:p>
+          <a:p xmlns:a="http://schemas.openxmlformats.org/drawingml/2006/main">
+            <a:r>
+              <a:t>- src/agent/handoff-policy.ts</a:t>
             </a:r>
           </a:p>
           <a:p xmlns:a="http://schemas.openxmlformats.org/drawingml/2006/main">
             <a:r>
               <a:t>- src/workflows/tool-failure.ts</a:t>
-            </a:r>
-          </a:p>
-          <a:p xmlns:a="http://schemas.openxmlformats.org/drawingml/2006/main">
-            <a:r>
-              <a:t>- src/workflows/faq-workflow.ts</a:t>
-            </a:r>
-          </a:p>
-          <a:p xmlns:a="http://schemas.openxmlformats.org/drawingml/2006/main">
-            <a:r>
-              <a:t>- src/tools/mock-bookly-tools.ts</a:t>
             </a:r>
           </a:p>
         </p:txBody>
@@ -881,17 +931,22 @@
           <a:lstStyle xmlns:a="http://schemas.openxmlformats.org/drawingml/2006/main"/>
           <a:p xmlns:a="http://schemas.openxmlformats.org/drawingml/2006/main">
             <a:r>
-              <a:t>Run the live demo from this slide: order status, contextual return, natural-language approval, grounded Canada shipping FAQ, then an unsupported question that hands off.</a:t>
-            </a:r>
-          </a:p>
-          <a:p xmlns:a="http://schemas.openxmlformats.org/drawingml/2006/main">
-            <a:r>
-              <a:t>The test count is the full current Vitest suite after confirmation, reset, FAQ, and router-conformance work.</a:t>
-            </a:r>
-          </a:p>
-          <a:p xmlns:a="http://schemas.openxmlformats.org/drawingml/2006/main">
-            <a:r>
-              <a:t>Close with the first production move: authenticated identity and durable audited state before broader write capability.</a:t>
+              <a:t>The first production change is not another intent. It is moving identity and workflow state out of the conversational demo boundary.</a:t>
+            </a:r>
+          </a:p>
+          <a:p xmlns:a="http://schemas.openxmlformats.org/drawingml/2006/main">
+            <a:r>
+              <a:t>Authenticated identity prevents cross-account access. Durable pending actions and audit history make retries resumable, idempotent, and attributable to a customer and policy version.</a:t>
+            </a:r>
+          </a:p>
+          <a:p xmlns:a="http://schemas.openxmlformats.org/drawingml/2006/main">
+            <a:r>
+              <a:t>Only after that boundary is in place would I connect real order, carrier, returns, and help-desk systems or broaden the action set.</a:t>
+            </a:r>
+          </a:p>
+          <a:p xmlns:a="http://schemas.openxmlformats.org/drawingml/2006/main">
+            <a:r>
+              <a:t>The existing 196-test suite is useful prototype evidence, but production would add offline conversation evals, policy versioning, latency and failure dashboards, and staged rollout gates.</a:t>
             </a:r>
           </a:p>
           <a:p xmlns:a="http://schemas.openxmlformats.org/drawingml/2006/main">
@@ -906,17 +961,22 @@
           </a:p>
           <a:p xmlns:a="http://schemas.openxmlformats.org/drawingml/2006/main">
             <a:r>
+              <a:t>- docs/DECISIONS.md</a:t>
+            </a:r>
+          </a:p>
+          <a:p xmlns:a="http://schemas.openxmlformats.org/drawingml/2006/main">
+            <a:r>
+              <a:t>- README.md</a:t>
+            </a:r>
+          </a:p>
+          <a:p xmlns:a="http://schemas.openxmlformats.org/drawingml/2006/main">
+            <a:r>
               <a:t>- tests/</a:t>
             </a:r>
           </a:p>
           <a:p xmlns:a="http://schemas.openxmlformats.org/drawingml/2006/main">
             <a:r>
-              <a:t>- docs/DEMO_SCRIPT.md</a:t>
-            </a:r>
-          </a:p>
-          <a:p xmlns:a="http://schemas.openxmlformats.org/drawingml/2006/main">
-            <a:r>
-              <a:t>- docs/DECISIONS.md</a:t>
+              <a:t>- src/tools/mock-bookly-tools.ts</a:t>
             </a:r>
           </a:p>
         </p:txBody>
@@ -984,7 +1044,7 @@
   </p:cSld>
   <p:clrMap bg1="lt1" tx1="dk1" bg2="lt2" tx2="dk2" accent1="accent1" accent2="accent2" accent3="accent3" accent4="accent4" accent5="accent5" accent6="accent6" hlink="hlink" folHlink="folHlink"/>
   <p:sldLayoutIdLst>
-    <p:sldLayoutId xmlns:r="http://schemas.openxmlformats.org/officeDocument/2006/relationships" id="2147483649" r:id="Re3e20a56e0544c43"/>
+    <p:sldLayoutId xmlns:r="http://schemas.openxmlformats.org/officeDocument/2006/relationships" id="2147483649" r:id="R93a671479f76440b"/>
   </p:sldLayoutIdLst>
   <p:txStyles>
     <p:titleStyle>
@@ -1564,14 +1624,14 @@
           <a:p xmlns:a="http://schemas.openxmlformats.org/drawingml/2006/main">
             <a:pPr algn="l">
               <a:buNone/>
-              <a:defRPr sz="1800" b="1">
+              <a:defRPr sz="1350" b="1">
                 <a:solidFill>
                   <a:srgbClr val="1F714B"/>
                 </a:solidFill>
               </a:defRPr>
             </a:pPr>
             <a:r>
-              <a:rPr sz="1800" b="1">
+              <a:rPr sz="1350" b="1">
                 <a:solidFill>
                   <a:srgbClr val="1F714B"/>
                 </a:solidFill>
@@ -1615,14 +1675,14 @@
           <a:p xmlns:a="http://schemas.openxmlformats.org/drawingml/2006/main">
             <a:pPr algn="r">
               <a:buNone/>
-              <a:defRPr sz="1800" b="1">
+              <a:defRPr sz="1350" b="1">
                 <a:solidFill>
                   <a:srgbClr val="000000"/>
                 </a:solidFill>
               </a:defRPr>
             </a:pPr>
             <a:r>
-              <a:rPr sz="1800" b="1">
+              <a:rPr sz="1350" b="1">
                 <a:solidFill>
                   <a:srgbClr val="000000"/>
                 </a:solidFill>
@@ -1655,7 +1715,7 @@
             <a:avLst/>
           </a:prstGeom>
           <a:solidFill xmlns:a="http://schemas.openxmlformats.org/drawingml/2006/main">
-            <a:srgbClr val="D7FA82"/>
+            <a:srgbClr val="1F714B"/>
           </a:solidFill>
           <a:ln xmlns:a="http://schemas.openxmlformats.org/drawingml/2006/main" w="0">
             <a:noFill/>
@@ -1680,7 +1740,7 @@
         <p:spPr>
           <a:xfrm xmlns:a="http://schemas.openxmlformats.org/drawingml/2006/main">
             <a:off x="390525" y="2381250"/>
-            <a:ext cx="10096500" cy="3333750"/>
+            <a:ext cx="10668000" cy="3238500"/>
           </a:xfrm>
           <a:prstGeom xmlns:a="http://schemas.openxmlformats.org/drawingml/2006/main" prst="rect">
             <a:avLst/>
@@ -1697,37 +1757,19 @@
           <a:p xmlns:a="http://schemas.openxmlformats.org/drawingml/2006/main">
             <a:pPr algn="l">
               <a:buNone/>
-              <a:defRPr sz="5850" b="1">
+              <a:defRPr sz="4350" b="1">
                 <a:solidFill>
                   <a:srgbClr val="000000"/>
                 </a:solidFill>
               </a:defRPr>
             </a:pPr>
             <a:r>
-              <a:rPr sz="5850" b="1">
+              <a:rPr sz="4350" b="1">
                 <a:solidFill>
                   <a:srgbClr val="000000"/>
                 </a:solidFill>
               </a:rPr>
-              <a:t>Use AI for ambiguity.</a:t>
-            </a:r>
-          </a:p>
-          <a:p xmlns:a="http://schemas.openxmlformats.org/drawingml/2006/main">
-            <a:pPr algn="l">
-              <a:buNone/>
-              <a:defRPr sz="5850" b="1">
-                <a:solidFill>
-                  <a:srgbClr val="000000"/>
-                </a:solidFill>
-              </a:defRPr>
-            </a:pPr>
-            <a:r>
-              <a:rPr sz="5850" b="1">
-                <a:solidFill>
-                  <a:srgbClr val="000000"/>
-                </a:solidFill>
-              </a:rPr>
-              <a:t>Use code for commitments.</a:t>
+              <a:t>A great CX agent understands natural language without letting the model control business actions.</a:t>
             </a:r>
           </a:p>
         </p:txBody>
@@ -1748,8 +1790,8 @@
         </p:nvSpPr>
         <p:spPr>
           <a:xfrm xmlns:a="http://schemas.openxmlformats.org/drawingml/2006/main">
-            <a:off x="390525" y="5962650"/>
-            <a:ext cx="8096250" cy="381000"/>
+            <a:off x="390525" y="5829300"/>
+            <a:ext cx="10668000" cy="590550"/>
           </a:xfrm>
           <a:prstGeom xmlns:a="http://schemas.openxmlformats.org/drawingml/2006/main" prst="rect">
             <a:avLst/>
@@ -1778,7 +1820,7 @@
                   <a:srgbClr val="555B57"/>
                 </a:solidFill>
               </a:rPr>
-              <a:t>2 action workflows + grounded FAQs · built for a live technical review</a:t>
+              <a:t>Bookly uses OpenAI for intent and grounded FAQ prose; typed workflows verify identity, policy, confirmation, and writes.</a:t>
             </a:r>
           </a:p>
         </p:txBody>
@@ -1858,7 +1900,7 @@
                   <a:srgbClr val="000000"/>
                 </a:solidFill>
               </a:rPr>
-              <a:t>One inquiry. Two trust boundaries.</a:t>
+              <a:t>How a customer message moves through Bookly</a:t>
             </a:r>
           </a:p>
         </p:txBody>
@@ -1880,7 +1922,7 @@
         <p:spPr>
           <a:xfrm xmlns:a="http://schemas.openxmlformats.org/drawingml/2006/main">
             <a:off x="390525" y="1190625"/>
-            <a:ext cx="6858000" cy="381000"/>
+            <a:ext cx="11401425" cy="419100"/>
           </a:xfrm>
           <a:prstGeom xmlns:a="http://schemas.openxmlformats.org/drawingml/2006/main" prst="rect">
             <a:avLst/>
@@ -1909,7 +1951,7 @@
                   <a:srgbClr val="555B57"/>
                 </a:solidFill>
               </a:rPr>
-              <a:t>Direct orchestration keeps prompts, memory, tools, and every write visible.</a:t>
+              <a:t>The model proposes intent and context. The orchestrator validates state and chooses a typed workflow.</a:t>
             </a:r>
           </a:p>
         </p:txBody>
@@ -1948,16 +1990,16 @@
           <a:p xmlns:a="http://schemas.openxmlformats.org/drawingml/2006/main">
             <a:pPr algn="r">
               <a:buNone/>
-              <a:defRPr sz="975" b="0">
-                <a:solidFill>
-                  <a:srgbClr val="000000"/>
-                </a:solidFill>
-              </a:defRPr>
-            </a:pPr>
-            <a:r>
-              <a:rPr sz="975" b="0">
-                <a:solidFill>
-                  <a:srgbClr val="000000"/>
+              <a:defRPr sz="1350" b="0">
+                <a:solidFill>
+                  <a:srgbClr val="555B57"/>
+                </a:solidFill>
+              </a:defRPr>
+            </a:pPr>
+            <a:r>
+              <a:rPr sz="1350" b="0">
+                <a:solidFill>
+                  <a:srgbClr val="555B57"/>
                 </a:solidFill>
               </a:rPr>
               <a:t>2</a:t>
@@ -1967,30 +2009,123 @@
       </p:sp>
       <p:sp>
         <p:nvSpPr>
-          <p:cNvPr id="18" name="arch-customer-card">
-            <a:extLst xmlns:a="http://schemas.openxmlformats.org/drawingml/2006/main">
-              <a:ext uri="{FF2B5EF4-FFF2-40B4-BE49-F238E27FC236}">
-                <a16:creationId xmlns:a16="http://schemas.microsoft.com/office/drawing/2014/main" id="{465BDD5C-62D0-4720-96C2-4A69536C7015}"/>
-              </a:ext>
-            </a:extLst>
-          </p:cNvPr>
-          <p:cNvSpPr>
-            <a:spLocks xmlns:a="http://schemas.openxmlformats.org/drawingml/2006/main" noGrp="1"/>
-          </p:cNvSpPr>
-          <p:nvPr/>
-        </p:nvSpPr>
-        <p:spPr>
-          <a:xfrm xmlns:a="http://schemas.openxmlformats.org/drawingml/2006/main">
-            <a:off x="428625" y="1809750"/>
-            <a:ext cx="1714500" cy="857250"/>
+          <p:cNvPr id="18" name="arch-arrow-1">
+            <a:extLst xmlns:a="http://schemas.openxmlformats.org/drawingml/2006/main">
+              <a:ext uri="{FF2B5EF4-FFF2-40B4-BE49-F238E27FC236}">
+                <a16:creationId xmlns:a16="http://schemas.microsoft.com/office/drawing/2014/main" id="{A5C4A632-1E14-4CF1-B9EF-1AC2FFAE7B3B}"/>
+              </a:ext>
+            </a:extLst>
+          </p:cNvPr>
+          <p:cNvSpPr>
+            <a:spLocks xmlns:a="http://schemas.openxmlformats.org/drawingml/2006/main" noGrp="1"/>
+          </p:cNvSpPr>
+          <p:nvPr/>
+        </p:nvSpPr>
+        <p:spPr>
+          <a:xfrm xmlns:a="http://schemas.openxmlformats.org/drawingml/2006/main">
+            <a:off x="2552700" y="2247900"/>
+            <a:ext cx="228600" cy="171450"/>
+          </a:xfrm>
+          <a:prstGeom xmlns:a="http://schemas.openxmlformats.org/drawingml/2006/main" prst="rightArrow">
+            <a:avLst/>
+          </a:prstGeom>
+          <a:solidFill xmlns:a="http://schemas.openxmlformats.org/drawingml/2006/main">
+            <a:srgbClr val="1F714B"/>
+          </a:solidFill>
+          <a:ln xmlns:a="http://schemas.openxmlformats.org/drawingml/2006/main" w="0">
+            <a:noFill/>
+            <a:prstDash val="solid"/>
+          </a:ln>
+        </p:spPr>
+      </p:sp>
+      <p:sp>
+        <p:nvSpPr>
+          <p:cNvPr id="19" name="arch-arrow-2">
+            <a:extLst xmlns:a="http://schemas.openxmlformats.org/drawingml/2006/main">
+              <a:ext uri="{FF2B5EF4-FFF2-40B4-BE49-F238E27FC236}">
+                <a16:creationId xmlns:a16="http://schemas.microsoft.com/office/drawing/2014/main" id="{A2D18B76-3D43-4D9B-900D-729B055310DD}"/>
+              </a:ext>
+            </a:extLst>
+          </p:cNvPr>
+          <p:cNvSpPr>
+            <a:spLocks xmlns:a="http://schemas.openxmlformats.org/drawingml/2006/main" noGrp="1"/>
+          </p:cNvSpPr>
+          <p:nvPr/>
+        </p:nvSpPr>
+        <p:spPr>
+          <a:xfrm xmlns:a="http://schemas.openxmlformats.org/drawingml/2006/main">
+            <a:off x="5448300" y="2247900"/>
+            <a:ext cx="228600" cy="171450"/>
+          </a:xfrm>
+          <a:prstGeom xmlns:a="http://schemas.openxmlformats.org/drawingml/2006/main" prst="rightArrow">
+            <a:avLst/>
+          </a:prstGeom>
+          <a:solidFill xmlns:a="http://schemas.openxmlformats.org/drawingml/2006/main">
+            <a:srgbClr val="1F714B"/>
+          </a:solidFill>
+          <a:ln xmlns:a="http://schemas.openxmlformats.org/drawingml/2006/main" w="0">
+            <a:noFill/>
+            <a:prstDash val="solid"/>
+          </a:ln>
+        </p:spPr>
+      </p:sp>
+      <p:sp>
+        <p:nvSpPr>
+          <p:cNvPr id="20" name="arch-arrow-3">
+            <a:extLst xmlns:a="http://schemas.openxmlformats.org/drawingml/2006/main">
+              <a:ext uri="{FF2B5EF4-FFF2-40B4-BE49-F238E27FC236}">
+                <a16:creationId xmlns:a16="http://schemas.microsoft.com/office/drawing/2014/main" id="{0104B905-4078-4AEB-B426-91128279EAF0}"/>
+              </a:ext>
+            </a:extLst>
+          </p:cNvPr>
+          <p:cNvSpPr>
+            <a:spLocks xmlns:a="http://schemas.openxmlformats.org/drawingml/2006/main" noGrp="1"/>
+          </p:cNvSpPr>
+          <p:nvPr/>
+        </p:nvSpPr>
+        <p:spPr>
+          <a:xfrm xmlns:a="http://schemas.openxmlformats.org/drawingml/2006/main">
+            <a:off x="8963025" y="2247900"/>
+            <a:ext cx="228600" cy="171450"/>
+          </a:xfrm>
+          <a:prstGeom xmlns:a="http://schemas.openxmlformats.org/drawingml/2006/main" prst="rightArrow">
+            <a:avLst/>
+          </a:prstGeom>
+          <a:solidFill xmlns:a="http://schemas.openxmlformats.org/drawingml/2006/main">
+            <a:srgbClr val="1F714B"/>
+          </a:solidFill>
+          <a:ln xmlns:a="http://schemas.openxmlformats.org/drawingml/2006/main" w="0">
+            <a:noFill/>
+            <a:prstDash val="solid"/>
+          </a:ln>
+        </p:spPr>
+      </p:sp>
+      <p:sp>
+        <p:nvSpPr>
+          <p:cNvPr id="21" name="arch-customer-card">
+            <a:extLst xmlns:a="http://schemas.openxmlformats.org/drawingml/2006/main">
+              <a:ext uri="{FF2B5EF4-FFF2-40B4-BE49-F238E27FC236}">
+                <a16:creationId xmlns:a16="http://schemas.microsoft.com/office/drawing/2014/main" id="{C1BA52C6-E102-42ED-AC00-BBE4D99ED12C}"/>
+              </a:ext>
+            </a:extLst>
+          </p:cNvPr>
+          <p:cNvSpPr>
+            <a:spLocks xmlns:a="http://schemas.openxmlformats.org/drawingml/2006/main" noGrp="1"/>
+          </p:cNvSpPr>
+          <p:nvPr/>
+        </p:nvSpPr>
+        <p:spPr>
+          <a:xfrm xmlns:a="http://schemas.openxmlformats.org/drawingml/2006/main">
+            <a:off x="390525" y="1905000"/>
+            <a:ext cx="2000250" cy="895350"/>
           </a:xfrm>
           <a:prstGeom xmlns:a="http://schemas.openxmlformats.org/drawingml/2006/main" prst="roundRect">
             <a:avLst>
-              <a:gd name="adj" fmla="val 6667"/>
+              <a:gd name="adj" fmla="val 6383"/>
             </a:avLst>
           </a:prstGeom>
           <a:solidFill xmlns:a="http://schemas.openxmlformats.org/drawingml/2006/main">
-            <a:srgbClr val="EEF7F1"/>
+            <a:srgbClr val="FFFFFF"/>
           </a:solidFill>
           <a:ln xmlns:a="http://schemas.openxmlformats.org/drawingml/2006/main" w="9525">
             <a:solidFill>
@@ -2002,22 +2137,22 @@
       </p:sp>
       <p:sp>
         <p:nvSpPr>
-          <p:cNvPr id="19" name="arch-customer-title">
-            <a:extLst xmlns:a="http://schemas.openxmlformats.org/drawingml/2006/main">
-              <a:ext uri="{FF2B5EF4-FFF2-40B4-BE49-F238E27FC236}">
-                <a16:creationId xmlns:a16="http://schemas.microsoft.com/office/drawing/2014/main" id="{5F351830-A858-4485-9CEA-35295677591F}"/>
-              </a:ext>
-            </a:extLst>
-          </p:cNvPr>
-          <p:cNvSpPr>
-            <a:spLocks xmlns:a="http://schemas.openxmlformats.org/drawingml/2006/main" noGrp="1"/>
-          </p:cNvSpPr>
-          <p:nvPr/>
-        </p:nvSpPr>
-        <p:spPr>
-          <a:xfrm xmlns:a="http://schemas.openxmlformats.org/drawingml/2006/main">
-            <a:off x="561975" y="1924050"/>
-            <a:ext cx="1447800" cy="266700"/>
+          <p:cNvPr id="22" name="arch-customer-title">
+            <a:extLst xmlns:a="http://schemas.openxmlformats.org/drawingml/2006/main">
+              <a:ext uri="{FF2B5EF4-FFF2-40B4-BE49-F238E27FC236}">
+                <a16:creationId xmlns:a16="http://schemas.microsoft.com/office/drawing/2014/main" id="{633B6355-50C9-446A-87BC-DCD41605229F}"/>
+              </a:ext>
+            </a:extLst>
+          </p:cNvPr>
+          <p:cNvSpPr>
+            <a:spLocks xmlns:a="http://schemas.openxmlformats.org/drawingml/2006/main" noGrp="1"/>
+          </p:cNvSpPr>
+          <p:nvPr/>
+        </p:nvSpPr>
+        <p:spPr>
+          <a:xfrm xmlns:a="http://schemas.openxmlformats.org/drawingml/2006/main">
+            <a:off x="523875" y="2019300"/>
+            <a:ext cx="1733550" cy="266700"/>
           </a:xfrm>
           <a:prstGeom xmlns:a="http://schemas.openxmlformats.org/drawingml/2006/main" prst="rect">
             <a:avLst/>
@@ -2033,14 +2168,15 @@
           <a:lstStyle xmlns:a="http://schemas.openxmlformats.org/drawingml/2006/main"/>
           <a:p xmlns:a="http://schemas.openxmlformats.org/drawingml/2006/main">
             <a:pPr algn="l">
-              <a:defRPr sz="1200" b="1">
+              <a:buNone/>
+              <a:defRPr sz="1500" b="1">
                 <a:solidFill>
                   <a:srgbClr val="000000"/>
                 </a:solidFill>
               </a:defRPr>
             </a:pPr>
             <a:r>
-              <a:rPr sz="1200" b="1">
+              <a:rPr sz="1500" b="1">
                 <a:solidFill>
                   <a:srgbClr val="000000"/>
                 </a:solidFill>
@@ -2052,22 +2188,22 @@
       </p:sp>
       <p:sp>
         <p:nvSpPr>
-          <p:cNvPr id="20" name="arch-customer-body">
-            <a:extLst xmlns:a="http://schemas.openxmlformats.org/drawingml/2006/main">
-              <a:ext uri="{FF2B5EF4-FFF2-40B4-BE49-F238E27FC236}">
-                <a16:creationId xmlns:a16="http://schemas.microsoft.com/office/drawing/2014/main" id="{83AEC01F-5367-4559-AC3B-08977E7D0D2F}"/>
-              </a:ext>
-            </a:extLst>
-          </p:cNvPr>
-          <p:cNvSpPr>
-            <a:spLocks xmlns:a="http://schemas.openxmlformats.org/drawingml/2006/main" noGrp="1"/>
-          </p:cNvSpPr>
-          <p:nvPr/>
-        </p:nvSpPr>
-        <p:spPr>
-          <a:xfrm xmlns:a="http://schemas.openxmlformats.org/drawingml/2006/main">
-            <a:off x="561975" y="2228850"/>
-            <a:ext cx="1447800" cy="361950"/>
+          <p:cNvPr id="23" name="arch-customer-body">
+            <a:extLst xmlns:a="http://schemas.openxmlformats.org/drawingml/2006/main">
+              <a:ext uri="{FF2B5EF4-FFF2-40B4-BE49-F238E27FC236}">
+                <a16:creationId xmlns:a16="http://schemas.microsoft.com/office/drawing/2014/main" id="{391AA69D-DFC8-4D3F-A659-672E279FF5CC}"/>
+              </a:ext>
+            </a:extLst>
+          </p:cNvPr>
+          <p:cNvSpPr>
+            <a:spLocks xmlns:a="http://schemas.openxmlformats.org/drawingml/2006/main" noGrp="1"/>
+          </p:cNvSpPr>
+          <p:nvPr/>
+        </p:nvSpPr>
+        <p:spPr>
+          <a:xfrm xmlns:a="http://schemas.openxmlformats.org/drawingml/2006/main">
+            <a:off x="523875" y="2324100"/>
+            <a:ext cx="1733550" cy="400050"/>
           </a:xfrm>
           <a:prstGeom xmlns:a="http://schemas.openxmlformats.org/drawingml/2006/main" prst="rect">
             <a:avLst/>
@@ -2083,49 +2219,50 @@
           <a:lstStyle xmlns:a="http://schemas.openxmlformats.org/drawingml/2006/main"/>
           <a:p xmlns:a="http://schemas.openxmlformats.org/drawingml/2006/main">
             <a:pPr algn="l">
-              <a:defRPr sz="900" b="0">
-                <a:solidFill>
-                  <a:srgbClr val="555B57"/>
-                </a:solidFill>
-              </a:defRPr>
-            </a:pPr>
-            <a:r>
-              <a:rPr sz="900" b="0">
-                <a:solidFill>
-                  <a:srgbClr val="555B57"/>
-                </a:solidFill>
-              </a:rPr>
-              <a:t>One Express endpoint.</a:t>
-            </a:r>
-          </a:p>
-        </p:txBody>
-      </p:sp>
-      <p:sp>
-        <p:nvSpPr>
-          <p:cNvPr id="21" name="arch-router-card">
-            <a:extLst xmlns:a="http://schemas.openxmlformats.org/drawingml/2006/main">
-              <a:ext uri="{FF2B5EF4-FFF2-40B4-BE49-F238E27FC236}">
-                <a16:creationId xmlns:a16="http://schemas.microsoft.com/office/drawing/2014/main" id="{C489A13F-812A-4032-8475-3D66C5506198}"/>
-              </a:ext>
-            </a:extLst>
-          </p:cNvPr>
-          <p:cNvSpPr>
-            <a:spLocks xmlns:a="http://schemas.openxmlformats.org/drawingml/2006/main" noGrp="1"/>
-          </p:cNvSpPr>
-          <p:nvPr/>
-        </p:nvSpPr>
-        <p:spPr>
-          <a:xfrm xmlns:a="http://schemas.openxmlformats.org/drawingml/2006/main">
-            <a:off x="2571750" y="1809750"/>
-            <a:ext cx="1952625" cy="857250"/>
+              <a:buNone/>
+              <a:defRPr sz="1350" b="0">
+                <a:solidFill>
+                  <a:srgbClr val="555B57"/>
+                </a:solidFill>
+              </a:defRPr>
+            </a:pPr>
+            <a:r>
+              <a:rPr sz="1350" b="0">
+                <a:solidFill>
+                  <a:srgbClr val="555B57"/>
+                </a:solidFill>
+              </a:rPr>
+              <a:t>Validated request</a:t>
+            </a:r>
+          </a:p>
+        </p:txBody>
+      </p:sp>
+      <p:sp>
+        <p:nvSpPr>
+          <p:cNvPr id="24" name="arch-router-card">
+            <a:extLst xmlns:a="http://schemas.openxmlformats.org/drawingml/2006/main">
+              <a:ext uri="{FF2B5EF4-FFF2-40B4-BE49-F238E27FC236}">
+                <a16:creationId xmlns:a16="http://schemas.microsoft.com/office/drawing/2014/main" id="{FC336C62-FE01-4027-A89C-93FB8B2A22EB}"/>
+              </a:ext>
+            </a:extLst>
+          </p:cNvPr>
+          <p:cNvSpPr>
+            <a:spLocks xmlns:a="http://schemas.openxmlformats.org/drawingml/2006/main" noGrp="1"/>
+          </p:cNvSpPr>
+          <p:nvPr/>
+        </p:nvSpPr>
+        <p:spPr>
+          <a:xfrm xmlns:a="http://schemas.openxmlformats.org/drawingml/2006/main">
+            <a:off x="2952750" y="1905000"/>
+            <a:ext cx="2286000" cy="895350"/>
           </a:xfrm>
           <a:prstGeom xmlns:a="http://schemas.openxmlformats.org/drawingml/2006/main" prst="roundRect">
             <a:avLst>
-              <a:gd name="adj" fmla="val 6667"/>
+              <a:gd name="adj" fmla="val 6383"/>
             </a:avLst>
           </a:prstGeom>
           <a:solidFill xmlns:a="http://schemas.openxmlformats.org/drawingml/2006/main">
-            <a:srgbClr val="EEF7F1"/>
+            <a:srgbClr val="FFFFFF"/>
           </a:solidFill>
           <a:ln xmlns:a="http://schemas.openxmlformats.org/drawingml/2006/main" w="9525">
             <a:solidFill>
@@ -2137,22 +2274,22 @@
       </p:sp>
       <p:sp>
         <p:nvSpPr>
-          <p:cNvPr id="22" name="arch-router-title">
-            <a:extLst xmlns:a="http://schemas.openxmlformats.org/drawingml/2006/main">
-              <a:ext uri="{FF2B5EF4-FFF2-40B4-BE49-F238E27FC236}">
-                <a16:creationId xmlns:a16="http://schemas.microsoft.com/office/drawing/2014/main" id="{BA827427-218B-418E-BA26-E5D9E4811917}"/>
-              </a:ext>
-            </a:extLst>
-          </p:cNvPr>
-          <p:cNvSpPr>
-            <a:spLocks xmlns:a="http://schemas.openxmlformats.org/drawingml/2006/main" noGrp="1"/>
-          </p:cNvSpPr>
-          <p:nvPr/>
-        </p:nvSpPr>
-        <p:spPr>
-          <a:xfrm xmlns:a="http://schemas.openxmlformats.org/drawingml/2006/main">
-            <a:off x="2705100" y="1924050"/>
-            <a:ext cx="1685925" cy="266700"/>
+          <p:cNvPr id="25" name="arch-router-title">
+            <a:extLst xmlns:a="http://schemas.openxmlformats.org/drawingml/2006/main">
+              <a:ext uri="{FF2B5EF4-FFF2-40B4-BE49-F238E27FC236}">
+                <a16:creationId xmlns:a16="http://schemas.microsoft.com/office/drawing/2014/main" id="{786994FD-8E31-4E98-AAFA-0872D9749302}"/>
+              </a:ext>
+            </a:extLst>
+          </p:cNvPr>
+          <p:cNvSpPr>
+            <a:spLocks xmlns:a="http://schemas.openxmlformats.org/drawingml/2006/main" noGrp="1"/>
+          </p:cNvSpPr>
+          <p:nvPr/>
+        </p:nvSpPr>
+        <p:spPr>
+          <a:xfrm xmlns:a="http://schemas.openxmlformats.org/drawingml/2006/main">
+            <a:off x="3086100" y="2019300"/>
+            <a:ext cx="2019300" cy="266700"/>
           </a:xfrm>
           <a:prstGeom xmlns:a="http://schemas.openxmlformats.org/drawingml/2006/main" prst="rect">
             <a:avLst/>
@@ -2168,41 +2305,42 @@
           <a:lstStyle xmlns:a="http://schemas.openxmlformats.org/drawingml/2006/main"/>
           <a:p xmlns:a="http://schemas.openxmlformats.org/drawingml/2006/main">
             <a:pPr algn="l">
-              <a:defRPr sz="1200" b="1">
+              <a:buNone/>
+              <a:defRPr sz="1500" b="1">
                 <a:solidFill>
                   <a:srgbClr val="000000"/>
                 </a:solidFill>
               </a:defRPr>
             </a:pPr>
             <a:r>
-              <a:rPr sz="1200" b="1">
+              <a:rPr sz="1500" b="1">
                 <a:solidFill>
                   <a:srgbClr val="000000"/>
                 </a:solidFill>
               </a:rPr>
-              <a:t>Router + prompt</a:t>
-            </a:r>
-          </a:p>
-        </p:txBody>
-      </p:sp>
-      <p:sp>
-        <p:nvSpPr>
-          <p:cNvPr id="23" name="arch-router-body">
-            <a:extLst xmlns:a="http://schemas.openxmlformats.org/drawingml/2006/main">
-              <a:ext uri="{FF2B5EF4-FFF2-40B4-BE49-F238E27FC236}">
-                <a16:creationId xmlns:a16="http://schemas.microsoft.com/office/drawing/2014/main" id="{1CE5DF93-6186-4F5A-A9EF-FFDEC21EC134}"/>
-              </a:ext>
-            </a:extLst>
-          </p:cNvPr>
-          <p:cNvSpPr>
-            <a:spLocks xmlns:a="http://schemas.openxmlformats.org/drawingml/2006/main" noGrp="1"/>
-          </p:cNvSpPr>
-          <p:nvPr/>
-        </p:nvSpPr>
-        <p:spPr>
-          <a:xfrm xmlns:a="http://schemas.openxmlformats.org/drawingml/2006/main">
-            <a:off x="2705100" y="2228850"/>
-            <a:ext cx="1685925" cy="361950"/>
+              <a:t>Intent prompt</a:t>
+            </a:r>
+          </a:p>
+        </p:txBody>
+      </p:sp>
+      <p:sp>
+        <p:nvSpPr>
+          <p:cNvPr id="26" name="arch-router-body">
+            <a:extLst xmlns:a="http://schemas.openxmlformats.org/drawingml/2006/main">
+              <a:ext uri="{FF2B5EF4-FFF2-40B4-BE49-F238E27FC236}">
+                <a16:creationId xmlns:a16="http://schemas.microsoft.com/office/drawing/2014/main" id="{F87117BD-5551-44C3-8FCB-0F3574F23077}"/>
+              </a:ext>
+            </a:extLst>
+          </p:cNvPr>
+          <p:cNvSpPr>
+            <a:spLocks xmlns:a="http://schemas.openxmlformats.org/drawingml/2006/main" noGrp="1"/>
+          </p:cNvSpPr>
+          <p:nvPr/>
+        </p:nvSpPr>
+        <p:spPr>
+          <a:xfrm xmlns:a="http://schemas.openxmlformats.org/drawingml/2006/main">
+            <a:off x="3086100" y="2324100"/>
+            <a:ext cx="2019300" cy="400050"/>
           </a:xfrm>
           <a:prstGeom xmlns:a="http://schemas.openxmlformats.org/drawingml/2006/main" prst="rect">
             <a:avLst/>
@@ -2218,62 +2356,46 @@
           <a:lstStyle xmlns:a="http://schemas.openxmlformats.org/drawingml/2006/main"/>
           <a:p xmlns:a="http://schemas.openxmlformats.org/drawingml/2006/main">
             <a:pPr algn="l">
-              <a:defRPr sz="900" b="0">
-                <a:solidFill>
-                  <a:srgbClr val="555B57"/>
-                </a:solidFill>
-              </a:defRPr>
-            </a:pPr>
-            <a:r>
-              <a:rPr sz="900" b="0">
-                <a:solidFill>
-                  <a:srgbClr val="555B57"/>
-                </a:solidFill>
-              </a:rPr>
-              <a:t>intent + slots</a:t>
-            </a:r>
-          </a:p>
-          <a:p xmlns:a="http://schemas.openxmlformats.org/drawingml/2006/main">
-            <a:pPr algn="l">
-              <a:defRPr sz="900" b="0">
-                <a:solidFill>
-                  <a:srgbClr val="555B57"/>
-                </a:solidFill>
-              </a:defRPr>
-            </a:pPr>
-            <a:r>
-              <a:rPr sz="900" b="0">
-                <a:solidFill>
-                  <a:srgbClr val="555B57"/>
-                </a:solidFill>
-              </a:rPr>
-              <a:t>+ contextAction.</a:t>
-            </a:r>
-          </a:p>
-        </p:txBody>
-      </p:sp>
-      <p:sp>
-        <p:nvSpPr>
-          <p:cNvPr id="24" name="arch-orchestrator-card">
-            <a:extLst xmlns:a="http://schemas.openxmlformats.org/drawingml/2006/main">
-              <a:ext uri="{FF2B5EF4-FFF2-40B4-BE49-F238E27FC236}">
-                <a16:creationId xmlns:a16="http://schemas.microsoft.com/office/drawing/2014/main" id="{31C297D3-9644-4A9D-AAFF-D83079254CAA}"/>
-              </a:ext>
-            </a:extLst>
-          </p:cNvPr>
-          <p:cNvSpPr>
-            <a:spLocks xmlns:a="http://schemas.openxmlformats.org/drawingml/2006/main" noGrp="1"/>
-          </p:cNvSpPr>
-          <p:nvPr/>
-        </p:nvSpPr>
-        <p:spPr>
-          <a:xfrm xmlns:a="http://schemas.openxmlformats.org/drawingml/2006/main">
-            <a:off x="4953000" y="1809750"/>
-            <a:ext cx="2000250" cy="857250"/>
+              <a:buNone/>
+              <a:defRPr sz="1350" b="0">
+                <a:solidFill>
+                  <a:srgbClr val="555B57"/>
+                </a:solidFill>
+              </a:defRPr>
+            </a:pPr>
+            <a:r>
+              <a:rPr sz="1350" b="0">
+                <a:solidFill>
+                  <a:srgbClr val="555B57"/>
+                </a:solidFill>
+              </a:rPr>
+              <a:t>intent · slots · contextAction</a:t>
+            </a:r>
+          </a:p>
+        </p:txBody>
+      </p:sp>
+      <p:sp>
+        <p:nvSpPr>
+          <p:cNvPr id="27" name="arch-orchestrator-card">
+            <a:extLst xmlns:a="http://schemas.openxmlformats.org/drawingml/2006/main">
+              <a:ext uri="{FF2B5EF4-FFF2-40B4-BE49-F238E27FC236}">
+                <a16:creationId xmlns:a16="http://schemas.microsoft.com/office/drawing/2014/main" id="{221B241C-C9A1-4FBC-8F2B-D4A7893E3617}"/>
+              </a:ext>
+            </a:extLst>
+          </p:cNvPr>
+          <p:cNvSpPr>
+            <a:spLocks xmlns:a="http://schemas.openxmlformats.org/drawingml/2006/main" noGrp="1"/>
+          </p:cNvSpPr>
+          <p:nvPr/>
+        </p:nvSpPr>
+        <p:spPr>
+          <a:xfrm xmlns:a="http://schemas.openxmlformats.org/drawingml/2006/main">
+            <a:off x="5895975" y="1905000"/>
+            <a:ext cx="2857500" cy="895350"/>
           </a:xfrm>
           <a:prstGeom xmlns:a="http://schemas.openxmlformats.org/drawingml/2006/main" prst="roundRect">
             <a:avLst>
-              <a:gd name="adj" fmla="val 6667"/>
+              <a:gd name="adj" fmla="val 6383"/>
             </a:avLst>
           </a:prstGeom>
           <a:solidFill xmlns:a="http://schemas.openxmlformats.org/drawingml/2006/main">
@@ -2289,22 +2411,22 @@
       </p:sp>
       <p:sp>
         <p:nvSpPr>
-          <p:cNvPr id="25" name="arch-orchestrator-title">
-            <a:extLst xmlns:a="http://schemas.openxmlformats.org/drawingml/2006/main">
-              <a:ext uri="{FF2B5EF4-FFF2-40B4-BE49-F238E27FC236}">
-                <a16:creationId xmlns:a16="http://schemas.microsoft.com/office/drawing/2014/main" id="{5AE08E00-F255-45E3-AB6E-FEDB9F6E08CE}"/>
-              </a:ext>
-            </a:extLst>
-          </p:cNvPr>
-          <p:cNvSpPr>
-            <a:spLocks xmlns:a="http://schemas.openxmlformats.org/drawingml/2006/main" noGrp="1"/>
-          </p:cNvSpPr>
-          <p:nvPr/>
-        </p:nvSpPr>
-        <p:spPr>
-          <a:xfrm xmlns:a="http://schemas.openxmlformats.org/drawingml/2006/main">
-            <a:off x="5086350" y="1924050"/>
-            <a:ext cx="1733550" cy="266700"/>
+          <p:cNvPr id="28" name="arch-orchestrator-title">
+            <a:extLst xmlns:a="http://schemas.openxmlformats.org/drawingml/2006/main">
+              <a:ext uri="{FF2B5EF4-FFF2-40B4-BE49-F238E27FC236}">
+                <a16:creationId xmlns:a16="http://schemas.microsoft.com/office/drawing/2014/main" id="{CCA3ADEE-58F2-49C6-851B-DF6554408EA9}"/>
+              </a:ext>
+            </a:extLst>
+          </p:cNvPr>
+          <p:cNvSpPr>
+            <a:spLocks xmlns:a="http://schemas.openxmlformats.org/drawingml/2006/main" noGrp="1"/>
+          </p:cNvSpPr>
+          <p:nvPr/>
+        </p:nvSpPr>
+        <p:spPr>
+          <a:xfrm xmlns:a="http://schemas.openxmlformats.org/drawingml/2006/main">
+            <a:off x="6029325" y="2019300"/>
+            <a:ext cx="2590800" cy="266700"/>
           </a:xfrm>
           <a:prstGeom xmlns:a="http://schemas.openxmlformats.org/drawingml/2006/main" prst="rect">
             <a:avLst/>
@@ -2320,14 +2442,15 @@
           <a:lstStyle xmlns:a="http://schemas.openxmlformats.org/drawingml/2006/main"/>
           <a:p xmlns:a="http://schemas.openxmlformats.org/drawingml/2006/main">
             <a:pPr algn="l">
-              <a:defRPr sz="1200" b="1">
+              <a:buNone/>
+              <a:defRPr sz="1500" b="1">
                 <a:solidFill>
                   <a:srgbClr val="FFFFFF"/>
                 </a:solidFill>
               </a:defRPr>
             </a:pPr>
             <a:r>
-              <a:rPr sz="1200" b="1">
+              <a:rPr sz="1500" b="1">
                 <a:solidFill>
                   <a:srgbClr val="FFFFFF"/>
                 </a:solidFill>
@@ -2339,22 +2462,22 @@
       </p:sp>
       <p:sp>
         <p:nvSpPr>
-          <p:cNvPr id="26" name="arch-orchestrator-body">
-            <a:extLst xmlns:a="http://schemas.openxmlformats.org/drawingml/2006/main">
-              <a:ext uri="{FF2B5EF4-FFF2-40B4-BE49-F238E27FC236}">
-                <a16:creationId xmlns:a16="http://schemas.microsoft.com/office/drawing/2014/main" id="{AC08FFF9-2D35-4419-AB47-EF21B5CC1FB2}"/>
-              </a:ext>
-            </a:extLst>
-          </p:cNvPr>
-          <p:cNvSpPr>
-            <a:spLocks xmlns:a="http://schemas.openxmlformats.org/drawingml/2006/main" noGrp="1"/>
-          </p:cNvSpPr>
-          <p:nvPr/>
-        </p:nvSpPr>
-        <p:spPr>
-          <a:xfrm xmlns:a="http://schemas.openxmlformats.org/drawingml/2006/main">
-            <a:off x="5086350" y="2228850"/>
-            <a:ext cx="1733550" cy="361950"/>
+          <p:cNvPr id="29" name="arch-orchestrator-body">
+            <a:extLst xmlns:a="http://schemas.openxmlformats.org/drawingml/2006/main">
+              <a:ext uri="{FF2B5EF4-FFF2-40B4-BE49-F238E27FC236}">
+                <a16:creationId xmlns:a16="http://schemas.microsoft.com/office/drawing/2014/main" id="{A808F34A-B942-4383-8A4C-DE8732EFDB92}"/>
+              </a:ext>
+            </a:extLst>
+          </p:cNvPr>
+          <p:cNvSpPr>
+            <a:spLocks xmlns:a="http://schemas.openxmlformats.org/drawingml/2006/main" noGrp="1"/>
+          </p:cNvSpPr>
+          <p:nvPr/>
+        </p:nvSpPr>
+        <p:spPr>
+          <a:xfrm xmlns:a="http://schemas.openxmlformats.org/drawingml/2006/main">
+            <a:off x="6029325" y="2324100"/>
+            <a:ext cx="2590800" cy="400050"/>
           </a:xfrm>
           <a:prstGeom xmlns:a="http://schemas.openxmlformats.org/drawingml/2006/main" prst="rect">
             <a:avLst/>
@@ -2370,66 +2493,50 @@
           <a:lstStyle xmlns:a="http://schemas.openxmlformats.org/drawingml/2006/main"/>
           <a:p xmlns:a="http://schemas.openxmlformats.org/drawingml/2006/main">
             <a:pPr algn="l">
-              <a:defRPr sz="900" b="0">
+              <a:buNone/>
+              <a:defRPr sz="1350" b="0">
                 <a:solidFill>
                   <a:srgbClr val="FFFFFF"/>
                 </a:solidFill>
               </a:defRPr>
             </a:pPr>
             <a:r>
-              <a:rPr sz="900" b="0">
+              <a:rPr sz="1350" b="0">
                 <a:solidFill>
                   <a:srgbClr val="FFFFFF"/>
                 </a:solidFill>
               </a:rPr>
-              <a:t>State + dispatch.</a:t>
-            </a:r>
-          </a:p>
-          <a:p xmlns:a="http://schemas.openxmlformats.org/drawingml/2006/main">
-            <a:pPr algn="l">
-              <a:defRPr sz="900" b="0">
-                <a:solidFill>
-                  <a:srgbClr val="FFFFFF"/>
-                </a:solidFill>
-              </a:defRPr>
-            </a:pPr>
-            <a:r>
-              <a:rPr sz="900" b="0">
-                <a:solidFill>
-                  <a:srgbClr val="FFFFFF"/>
-                </a:solidFill>
-              </a:rPr>
-              <a:t>No autonomous loop.</a:t>
-            </a:r>
-          </a:p>
-        </p:txBody>
-      </p:sp>
-      <p:sp>
-        <p:nvSpPr>
-          <p:cNvPr id="27" name="arch-memory-card">
-            <a:extLst xmlns:a="http://schemas.openxmlformats.org/drawingml/2006/main">
-              <a:ext uri="{FF2B5EF4-FFF2-40B4-BE49-F238E27FC236}">
-                <a16:creationId xmlns:a16="http://schemas.microsoft.com/office/drawing/2014/main" id="{C802A10E-1574-4739-BB05-0E21996FE1D9}"/>
-              </a:ext>
-            </a:extLst>
-          </p:cNvPr>
-          <p:cNvSpPr>
-            <a:spLocks xmlns:a="http://schemas.openxmlformats.org/drawingml/2006/main" noGrp="1"/>
-          </p:cNvSpPr>
-          <p:nvPr/>
-        </p:nvSpPr>
-        <p:spPr>
-          <a:xfrm xmlns:a="http://schemas.openxmlformats.org/drawingml/2006/main">
-            <a:off x="7381875" y="1809750"/>
-            <a:ext cx="1809750" cy="857250"/>
+              <a:t>Orchestration + structured memory</a:t>
+            </a:r>
+          </a:p>
+        </p:txBody>
+      </p:sp>
+      <p:sp>
+        <p:nvSpPr>
+          <p:cNvPr id="30" name="arch-trace-card">
+            <a:extLst xmlns:a="http://schemas.openxmlformats.org/drawingml/2006/main">
+              <a:ext uri="{FF2B5EF4-FFF2-40B4-BE49-F238E27FC236}">
+                <a16:creationId xmlns:a16="http://schemas.microsoft.com/office/drawing/2014/main" id="{4B5619E7-AE44-4C27-94F3-E9833861F74E}"/>
+              </a:ext>
+            </a:extLst>
+          </p:cNvPr>
+          <p:cNvSpPr>
+            <a:spLocks xmlns:a="http://schemas.openxmlformats.org/drawingml/2006/main" noGrp="1"/>
+          </p:cNvSpPr>
+          <p:nvPr/>
+        </p:nvSpPr>
+        <p:spPr>
+          <a:xfrm xmlns:a="http://schemas.openxmlformats.org/drawingml/2006/main">
+            <a:off x="9410700" y="1905000"/>
+            <a:ext cx="2381250" cy="895350"/>
           </a:xfrm>
           <a:prstGeom xmlns:a="http://schemas.openxmlformats.org/drawingml/2006/main" prst="roundRect">
             <a:avLst>
-              <a:gd name="adj" fmla="val 6667"/>
+              <a:gd name="adj" fmla="val 6383"/>
             </a:avLst>
           </a:prstGeom>
           <a:solidFill xmlns:a="http://schemas.openxmlformats.org/drawingml/2006/main">
-            <a:srgbClr val="EEF7F1"/>
+            <a:srgbClr val="FFFFFF"/>
           </a:solidFill>
           <a:ln xmlns:a="http://schemas.openxmlformats.org/drawingml/2006/main" w="9525">
             <a:solidFill>
@@ -2441,22 +2548,22 @@
       </p:sp>
       <p:sp>
         <p:nvSpPr>
-          <p:cNvPr id="28" name="arch-memory-title">
-            <a:extLst xmlns:a="http://schemas.openxmlformats.org/drawingml/2006/main">
-              <a:ext uri="{FF2B5EF4-FFF2-40B4-BE49-F238E27FC236}">
-                <a16:creationId xmlns:a16="http://schemas.microsoft.com/office/drawing/2014/main" id="{08810EB7-0822-4EE3-B160-9CEE7AB6722B}"/>
-              </a:ext>
-            </a:extLst>
-          </p:cNvPr>
-          <p:cNvSpPr>
-            <a:spLocks xmlns:a="http://schemas.openxmlformats.org/drawingml/2006/main" noGrp="1"/>
-          </p:cNvSpPr>
-          <p:nvPr/>
-        </p:nvSpPr>
-        <p:spPr>
-          <a:xfrm xmlns:a="http://schemas.openxmlformats.org/drawingml/2006/main">
-            <a:off x="7515225" y="1924050"/>
-            <a:ext cx="1543050" cy="266700"/>
+          <p:cNvPr id="31" name="arch-trace-title">
+            <a:extLst xmlns:a="http://schemas.openxmlformats.org/drawingml/2006/main">
+              <a:ext uri="{FF2B5EF4-FFF2-40B4-BE49-F238E27FC236}">
+                <a16:creationId xmlns:a16="http://schemas.microsoft.com/office/drawing/2014/main" id="{69E236CA-F712-4EAB-9DA2-5ECE0399A2A7}"/>
+              </a:ext>
+            </a:extLst>
+          </p:cNvPr>
+          <p:cNvSpPr>
+            <a:spLocks xmlns:a="http://schemas.openxmlformats.org/drawingml/2006/main" noGrp="1"/>
+          </p:cNvSpPr>
+          <p:nvPr/>
+        </p:nvSpPr>
+        <p:spPr>
+          <a:xfrm xmlns:a="http://schemas.openxmlformats.org/drawingml/2006/main">
+            <a:off x="9544050" y="2019300"/>
+            <a:ext cx="2114550" cy="266700"/>
           </a:xfrm>
           <a:prstGeom xmlns:a="http://schemas.openxmlformats.org/drawingml/2006/main" prst="rect">
             <a:avLst/>
@@ -2472,41 +2579,42 @@
           <a:lstStyle xmlns:a="http://schemas.openxmlformats.org/drawingml/2006/main"/>
           <a:p xmlns:a="http://schemas.openxmlformats.org/drawingml/2006/main">
             <a:pPr algn="l">
-              <a:defRPr sz="1200" b="1">
+              <a:buNone/>
+              <a:defRPr sz="1500" b="1">
                 <a:solidFill>
                   <a:srgbClr val="000000"/>
                 </a:solidFill>
               </a:defRPr>
             </a:pPr>
             <a:r>
-              <a:rPr sz="1200" b="1">
+              <a:rPr sz="1500" b="1">
                 <a:solidFill>
                   <a:srgbClr val="000000"/>
                 </a:solidFill>
               </a:rPr>
-              <a:t>Session memory</a:t>
-            </a:r>
-          </a:p>
-        </p:txBody>
-      </p:sp>
-      <p:sp>
-        <p:nvSpPr>
-          <p:cNvPr id="29" name="arch-memory-body">
-            <a:extLst xmlns:a="http://schemas.openxmlformats.org/drawingml/2006/main">
-              <a:ext uri="{FF2B5EF4-FFF2-40B4-BE49-F238E27FC236}">
-                <a16:creationId xmlns:a16="http://schemas.microsoft.com/office/drawing/2014/main" id="{0CF2EC83-07E5-48FD-8D4A-982F98CB0A37}"/>
-              </a:ext>
-            </a:extLst>
-          </p:cNvPr>
-          <p:cNvSpPr>
-            <a:spLocks xmlns:a="http://schemas.openxmlformats.org/drawingml/2006/main" noGrp="1"/>
-          </p:cNvSpPr>
-          <p:nvPr/>
-        </p:nvSpPr>
-        <p:spPr>
-          <a:xfrm xmlns:a="http://schemas.openxmlformats.org/drawingml/2006/main">
-            <a:off x="7515225" y="2228850"/>
-            <a:ext cx="1543050" cy="361950"/>
+              <a:t>Reply + trace</a:t>
+            </a:r>
+          </a:p>
+        </p:txBody>
+      </p:sp>
+      <p:sp>
+        <p:nvSpPr>
+          <p:cNvPr id="32" name="arch-trace-body">
+            <a:extLst xmlns:a="http://schemas.openxmlformats.org/drawingml/2006/main">
+              <a:ext uri="{FF2B5EF4-FFF2-40B4-BE49-F238E27FC236}">
+                <a16:creationId xmlns:a16="http://schemas.microsoft.com/office/drawing/2014/main" id="{F6F48061-1BBE-4893-9459-87249EC9D8DE}"/>
+              </a:ext>
+            </a:extLst>
+          </p:cNvPr>
+          <p:cNvSpPr>
+            <a:spLocks xmlns:a="http://schemas.openxmlformats.org/drawingml/2006/main" noGrp="1"/>
+          </p:cNvSpPr>
+          <p:nvPr/>
+        </p:nvSpPr>
+        <p:spPr>
+          <a:xfrm xmlns:a="http://schemas.openxmlformats.org/drawingml/2006/main">
+            <a:off x="9544050" y="2324100"/>
+            <a:ext cx="2114550" cy="400050"/>
           </a:xfrm>
           <a:prstGeom xmlns:a="http://schemas.openxmlformats.org/drawingml/2006/main" prst="rect">
             <a:avLst/>
@@ -2522,50 +2630,47 @@
           <a:lstStyle xmlns:a="http://schemas.openxmlformats.org/drawingml/2006/main"/>
           <a:p xmlns:a="http://schemas.openxmlformats.org/drawingml/2006/main">
             <a:pPr algn="l">
-              <a:defRPr sz="900" b="0">
-                <a:solidFill>
-                  <a:srgbClr val="555B57"/>
-                </a:solidFill>
-              </a:defRPr>
-            </a:pPr>
-            <a:r>
-              <a:rPr sz="900" b="0">
-                <a:solidFill>
-                  <a:srgbClr val="555B57"/>
-                </a:solidFill>
-              </a:rPr>
-              <a:t>Intent, slots, pending action, receipt.</a:t>
-            </a:r>
-          </a:p>
-        </p:txBody>
-      </p:sp>
-      <p:sp>
-        <p:nvSpPr>
-          <p:cNvPr id="30" name="arch-trace-card">
-            <a:extLst xmlns:a="http://schemas.openxmlformats.org/drawingml/2006/main">
-              <a:ext uri="{FF2B5EF4-FFF2-40B4-BE49-F238E27FC236}">
-                <a16:creationId xmlns:a16="http://schemas.microsoft.com/office/drawing/2014/main" id="{12CE0B6E-3754-4449-B135-15386F5AFF9C}"/>
-              </a:ext>
-            </a:extLst>
-          </p:cNvPr>
-          <p:cNvSpPr>
-            <a:spLocks xmlns:a="http://schemas.openxmlformats.org/drawingml/2006/main" noGrp="1"/>
-          </p:cNvSpPr>
-          <p:nvPr/>
-        </p:nvSpPr>
-        <p:spPr>
-          <a:xfrm xmlns:a="http://schemas.openxmlformats.org/drawingml/2006/main">
-            <a:off x="9620250" y="1809750"/>
-            <a:ext cx="2000250" cy="857250"/>
-          </a:xfrm>
-          <a:prstGeom xmlns:a="http://schemas.openxmlformats.org/drawingml/2006/main" prst="roundRect">
-            <a:avLst>
-              <a:gd name="adj" fmla="val 6667"/>
-            </a:avLst>
-          </a:prstGeom>
-          <a:solidFill xmlns:a="http://schemas.openxmlformats.org/drawingml/2006/main">
-            <a:srgbClr val="EEF7F1"/>
-          </a:solidFill>
+              <a:buNone/>
+              <a:defRPr sz="1350" b="0">
+                <a:solidFill>
+                  <a:srgbClr val="555B57"/>
+                </a:solidFill>
+              </a:defRPr>
+            </a:pPr>
+            <a:r>
+              <a:rPr sz="1350" b="0">
+                <a:solidFill>
+                  <a:srgbClr val="555B57"/>
+                </a:solidFill>
+              </a:rPr>
+              <a:t>Verified result or safe handoff</a:t>
+            </a:r>
+          </a:p>
+        </p:txBody>
+      </p:sp>
+      <p:sp>
+        <p:nvSpPr>
+          <p:cNvPr id="33" name="arch-read-band">
+            <a:extLst xmlns:a="http://schemas.openxmlformats.org/drawingml/2006/main">
+              <a:ext uri="{FF2B5EF4-FFF2-40B4-BE49-F238E27FC236}">
+                <a16:creationId xmlns:a16="http://schemas.microsoft.com/office/drawing/2014/main" id="{69C8AF16-C333-4800-8BC5-6816136C27B1}"/>
+              </a:ext>
+            </a:extLst>
+          </p:cNvPr>
+          <p:cNvSpPr>
+            <a:spLocks xmlns:a="http://schemas.openxmlformats.org/drawingml/2006/main" noGrp="1"/>
+          </p:cNvSpPr>
+          <p:nvPr/>
+        </p:nvSpPr>
+        <p:spPr>
+          <a:xfrm xmlns:a="http://schemas.openxmlformats.org/drawingml/2006/main">
+            <a:off x="390525" y="3219450"/>
+            <a:ext cx="11401425" cy="1000125"/>
+          </a:xfrm>
+          <a:prstGeom xmlns:a="http://schemas.openxmlformats.org/drawingml/2006/main" prst="rect">
+            <a:avLst/>
+          </a:prstGeom>
+          <a:noFill xmlns:a="http://schemas.openxmlformats.org/drawingml/2006/main"/>
           <a:ln xmlns:a="http://schemas.openxmlformats.org/drawingml/2006/main" w="9525">
             <a:solidFill>
               <a:srgbClr val="B8C5BC"/>
@@ -2576,22 +2681,22 @@
       </p:sp>
       <p:sp>
         <p:nvSpPr>
-          <p:cNvPr id="31" name="arch-trace-title">
-            <a:extLst xmlns:a="http://schemas.openxmlformats.org/drawingml/2006/main">
-              <a:ext uri="{FF2B5EF4-FFF2-40B4-BE49-F238E27FC236}">
-                <a16:creationId xmlns:a16="http://schemas.microsoft.com/office/drawing/2014/main" id="{762D3095-6585-43CE-8C47-43DE9FF46567}"/>
-              </a:ext>
-            </a:extLst>
-          </p:cNvPr>
-          <p:cNvSpPr>
-            <a:spLocks xmlns:a="http://schemas.openxmlformats.org/drawingml/2006/main" noGrp="1"/>
-          </p:cNvSpPr>
-          <p:nvPr/>
-        </p:nvSpPr>
-        <p:spPr>
-          <a:xfrm xmlns:a="http://schemas.openxmlformats.org/drawingml/2006/main">
-            <a:off x="9753600" y="1924050"/>
-            <a:ext cx="1733550" cy="266700"/>
+          <p:cNvPr id="34" name="arch-read-label">
+            <a:extLst xmlns:a="http://schemas.openxmlformats.org/drawingml/2006/main">
+              <a:ext uri="{FF2B5EF4-FFF2-40B4-BE49-F238E27FC236}">
+                <a16:creationId xmlns:a16="http://schemas.microsoft.com/office/drawing/2014/main" id="{1706D3D4-FA48-48E6-A2BB-87DD1E33BE26}"/>
+              </a:ext>
+            </a:extLst>
+          </p:cNvPr>
+          <p:cNvSpPr>
+            <a:spLocks xmlns:a="http://schemas.openxmlformats.org/drawingml/2006/main" noGrp="1"/>
+          </p:cNvSpPr>
+          <p:nvPr/>
+        </p:nvSpPr>
+        <p:spPr>
+          <a:xfrm xmlns:a="http://schemas.openxmlformats.org/drawingml/2006/main">
+            <a:off x="619125" y="3524250"/>
+            <a:ext cx="1428750" cy="323850"/>
           </a:xfrm>
           <a:prstGeom xmlns:a="http://schemas.openxmlformats.org/drawingml/2006/main" prst="rect">
             <a:avLst/>
@@ -2607,153 +2712,101 @@
           <a:lstStyle xmlns:a="http://schemas.openxmlformats.org/drawingml/2006/main"/>
           <a:p xmlns:a="http://schemas.openxmlformats.org/drawingml/2006/main">
             <a:pPr algn="l">
-              <a:defRPr sz="1200" b="1">
+              <a:buNone/>
+              <a:defRPr sz="1350" b="1">
+                <a:solidFill>
+                  <a:srgbClr val="1F714B"/>
+                </a:solidFill>
+              </a:defRPr>
+            </a:pPr>
+            <a:r>
+              <a:rPr sz="1350" b="1">
+                <a:solidFill>
+                  <a:srgbClr val="1F714B"/>
+                </a:solidFill>
+              </a:rPr>
+              <a:t>FAQ PATH</a:t>
+            </a:r>
+          </a:p>
+        </p:txBody>
+      </p:sp>
+      <p:sp>
+        <p:nvSpPr>
+          <p:cNvPr id="35" name="arch-read-flow">
+            <a:extLst xmlns:a="http://schemas.openxmlformats.org/drawingml/2006/main">
+              <a:ext uri="{FF2B5EF4-FFF2-40B4-BE49-F238E27FC236}">
+                <a16:creationId xmlns:a16="http://schemas.microsoft.com/office/drawing/2014/main" id="{27C88EA5-41A7-4E72-A41A-0A8B535DFDCF}"/>
+              </a:ext>
+            </a:extLst>
+          </p:cNvPr>
+          <p:cNvSpPr>
+            <a:spLocks xmlns:a="http://schemas.openxmlformats.org/drawingml/2006/main" noGrp="1"/>
+          </p:cNvSpPr>
+          <p:nvPr/>
+        </p:nvSpPr>
+        <p:spPr>
+          <a:xfrm xmlns:a="http://schemas.openxmlformats.org/drawingml/2006/main">
+            <a:off x="2095500" y="3400425"/>
+            <a:ext cx="9239250" cy="647700"/>
+          </a:xfrm>
+          <a:prstGeom xmlns:a="http://schemas.openxmlformats.org/drawingml/2006/main" prst="rect">
+            <a:avLst/>
+          </a:prstGeom>
+          <a:noFill xmlns:a="http://schemas.openxmlformats.org/drawingml/2006/main"/>
+          <a:ln xmlns:a="http://schemas.openxmlformats.org/drawingml/2006/main" w="0">
+            <a:noFill/>
+            <a:prstDash val="solid"/>
+          </a:ln>
+        </p:spPr>
+        <p:txBody>
+          <a:bodyPr xmlns:a="http://schemas.openxmlformats.org/drawingml/2006/main" anchor="t"/>
+          <a:lstStyle xmlns:a="http://schemas.openxmlformats.org/drawingml/2006/main"/>
+          <a:p xmlns:a="http://schemas.openxmlformats.org/drawingml/2006/main">
+            <a:pPr algn="l">
+              <a:buNone/>
+              <a:defRPr sz="1350" b="1">
                 <a:solidFill>
                   <a:srgbClr val="000000"/>
                 </a:solidFill>
               </a:defRPr>
             </a:pPr>
             <a:r>
-              <a:rPr sz="1200" b="1">
+              <a:rPr sz="1350" b="1">
                 <a:solidFill>
                   <a:srgbClr val="000000"/>
                 </a:solidFill>
               </a:rPr>
-              <a:t>Safe trace</a:t>
-            </a:r>
-          </a:p>
-        </p:txBody>
-      </p:sp>
-      <p:sp>
-        <p:nvSpPr>
-          <p:cNvPr id="32" name="arch-trace-body">
-            <a:extLst xmlns:a="http://schemas.openxmlformats.org/drawingml/2006/main">
-              <a:ext uri="{FF2B5EF4-FFF2-40B4-BE49-F238E27FC236}">
-                <a16:creationId xmlns:a16="http://schemas.microsoft.com/office/drawing/2014/main" id="{D029E3E6-A409-49B5-A63E-4C97C0B93D9F}"/>
-              </a:ext>
-            </a:extLst>
-          </p:cNvPr>
-          <p:cNvSpPr>
-            <a:spLocks xmlns:a="http://schemas.openxmlformats.org/drawingml/2006/main" noGrp="1"/>
-          </p:cNvSpPr>
-          <p:nvPr/>
-        </p:nvSpPr>
-        <p:spPr>
-          <a:xfrm xmlns:a="http://schemas.openxmlformats.org/drawingml/2006/main">
-            <a:off x="9753600" y="2228850"/>
-            <a:ext cx="1733550" cy="361950"/>
+              <a:t>Retrieve approved passages  →  grounded-answer prompt  →  validate cited IDs  →  answer or handoff</a:t>
+            </a:r>
+          </a:p>
+        </p:txBody>
+      </p:sp>
+      <p:sp>
+        <p:nvSpPr>
+          <p:cNvPr id="36" name="arch-write-band">
+            <a:extLst xmlns:a="http://schemas.openxmlformats.org/drawingml/2006/main">
+              <a:ext uri="{FF2B5EF4-FFF2-40B4-BE49-F238E27FC236}">
+                <a16:creationId xmlns:a16="http://schemas.microsoft.com/office/drawing/2014/main" id="{34DE1ECE-418E-400B-8F65-04E674667281}"/>
+              </a:ext>
+            </a:extLst>
+          </p:cNvPr>
+          <p:cNvSpPr>
+            <a:spLocks xmlns:a="http://schemas.openxmlformats.org/drawingml/2006/main" noGrp="1"/>
+          </p:cNvSpPr>
+          <p:nvPr/>
+        </p:nvSpPr>
+        <p:spPr>
+          <a:xfrm xmlns:a="http://schemas.openxmlformats.org/drawingml/2006/main">
+            <a:off x="390525" y="4476750"/>
+            <a:ext cx="11401425" cy="1200150"/>
           </a:xfrm>
           <a:prstGeom xmlns:a="http://schemas.openxmlformats.org/drawingml/2006/main" prst="rect">
             <a:avLst/>
           </a:prstGeom>
           <a:noFill xmlns:a="http://schemas.openxmlformats.org/drawingml/2006/main"/>
-          <a:ln xmlns:a="http://schemas.openxmlformats.org/drawingml/2006/main" w="0">
-            <a:noFill/>
-            <a:prstDash val="solid"/>
-          </a:ln>
-        </p:spPr>
-        <p:txBody>
-          <a:bodyPr xmlns:a="http://schemas.openxmlformats.org/drawingml/2006/main" anchor="t"/>
-          <a:lstStyle xmlns:a="http://schemas.openxmlformats.org/drawingml/2006/main"/>
-          <a:p xmlns:a="http://schemas.openxmlformats.org/drawingml/2006/main">
-            <a:pPr algn="l">
-              <a:defRPr sz="900" b="0">
-                <a:solidFill>
-                  <a:srgbClr val="555B57"/>
-                </a:solidFill>
-              </a:defRPr>
-            </a:pPr>
-            <a:r>
-              <a:rPr sz="900" b="0">
-                <a:solidFill>
-                  <a:srgbClr val="555B57"/>
-                </a:solidFill>
-              </a:rPr>
-              <a:t>Allowlisted operational metadata only.</a:t>
-            </a:r>
-          </a:p>
-        </p:txBody>
-      </p:sp>
-      <p:sp>
-        <p:nvSpPr>
-          <p:cNvPr id="33" name="arch-faq-label">
-            <a:extLst xmlns:a="http://schemas.openxmlformats.org/drawingml/2006/main">
-              <a:ext uri="{FF2B5EF4-FFF2-40B4-BE49-F238E27FC236}">
-                <a16:creationId xmlns:a16="http://schemas.microsoft.com/office/drawing/2014/main" id="{5856AD16-AA57-4CF5-B0F4-9AA67346F552}"/>
-              </a:ext>
-            </a:extLst>
-          </p:cNvPr>
-          <p:cNvSpPr>
-            <a:spLocks xmlns:a="http://schemas.openxmlformats.org/drawingml/2006/main" noGrp="1"/>
-          </p:cNvSpPr>
-          <p:nvPr/>
-        </p:nvSpPr>
-        <p:spPr>
-          <a:xfrm xmlns:a="http://schemas.openxmlformats.org/drawingml/2006/main">
-            <a:off x="619125" y="3448050"/>
-            <a:ext cx="2857500" cy="228600"/>
-          </a:xfrm>
-          <a:prstGeom xmlns:a="http://schemas.openxmlformats.org/drawingml/2006/main" prst="rect">
-            <a:avLst/>
-          </a:prstGeom>
-          <a:noFill xmlns:a="http://schemas.openxmlformats.org/drawingml/2006/main"/>
-          <a:ln xmlns:a="http://schemas.openxmlformats.org/drawingml/2006/main" w="0">
-            <a:noFill/>
-            <a:prstDash val="solid"/>
-          </a:ln>
-        </p:spPr>
-        <p:txBody>
-          <a:bodyPr xmlns:a="http://schemas.openxmlformats.org/drawingml/2006/main" anchor="t"/>
-          <a:lstStyle xmlns:a="http://schemas.openxmlformats.org/drawingml/2006/main"/>
-          <a:p xmlns:a="http://schemas.openxmlformats.org/drawingml/2006/main">
-            <a:pPr algn="l">
-              <a:defRPr sz="1125" b="1">
-                <a:solidFill>
-                  <a:srgbClr val="1F714B"/>
-                </a:solidFill>
-              </a:defRPr>
-            </a:pPr>
-            <a:r>
-              <a:rPr sz="1125" b="1">
-                <a:solidFill>
-                  <a:srgbClr val="1F714B"/>
-                </a:solidFill>
-              </a:rPr>
-              <a:t>READ-ONLY KNOWLEDGE PATH</a:t>
-            </a:r>
-          </a:p>
-        </p:txBody>
-      </p:sp>
-      <p:sp>
-        <p:nvSpPr>
-          <p:cNvPr id="34" name="arch-retrieve-card">
-            <a:extLst xmlns:a="http://schemas.openxmlformats.org/drawingml/2006/main">
-              <a:ext uri="{FF2B5EF4-FFF2-40B4-BE49-F238E27FC236}">
-                <a16:creationId xmlns:a16="http://schemas.microsoft.com/office/drawing/2014/main" id="{EA674021-ECA8-4BF6-BF31-CD95CE861715}"/>
-              </a:ext>
-            </a:extLst>
-          </p:cNvPr>
-          <p:cNvSpPr>
-            <a:spLocks xmlns:a="http://schemas.openxmlformats.org/drawingml/2006/main" noGrp="1"/>
-          </p:cNvSpPr>
-          <p:nvPr/>
-        </p:nvSpPr>
-        <p:spPr>
-          <a:xfrm xmlns:a="http://schemas.openxmlformats.org/drawingml/2006/main">
-            <a:off x="619125" y="3905250"/>
-            <a:ext cx="1428750" cy="1143000"/>
-          </a:xfrm>
-          <a:prstGeom xmlns:a="http://schemas.openxmlformats.org/drawingml/2006/main" prst="roundRect">
-            <a:avLst>
-              <a:gd name="adj" fmla="val 5000"/>
-            </a:avLst>
-          </a:prstGeom>
-          <a:solidFill xmlns:a="http://schemas.openxmlformats.org/drawingml/2006/main">
-            <a:srgbClr val="F2F2F2"/>
-          </a:solidFill>
-          <a:ln xmlns:a="http://schemas.openxmlformats.org/drawingml/2006/main" w="9525">
+          <a:ln xmlns:a="http://schemas.openxmlformats.org/drawingml/2006/main" w="14288">
             <a:solidFill>
-              <a:srgbClr val="B8C5BC"/>
+              <a:srgbClr val="1F714B"/>
             </a:solidFill>
             <a:prstDash val="solid"/>
           </a:ln>
@@ -2761,309 +2814,53 @@
       </p:sp>
       <p:sp>
         <p:nvSpPr>
-          <p:cNvPr id="35" name="arch-retrieve-title">
-            <a:extLst xmlns:a="http://schemas.openxmlformats.org/drawingml/2006/main">
-              <a:ext uri="{FF2B5EF4-FFF2-40B4-BE49-F238E27FC236}">
-                <a16:creationId xmlns:a16="http://schemas.microsoft.com/office/drawing/2014/main" id="{2C577A5D-AC6C-4605-8DBE-75ADA6EAB592}"/>
-              </a:ext>
-            </a:extLst>
-          </p:cNvPr>
-          <p:cNvSpPr>
-            <a:spLocks xmlns:a="http://schemas.openxmlformats.org/drawingml/2006/main" noGrp="1"/>
-          </p:cNvSpPr>
-          <p:nvPr/>
-        </p:nvSpPr>
-        <p:spPr>
-          <a:xfrm xmlns:a="http://schemas.openxmlformats.org/drawingml/2006/main">
-            <a:off x="752475" y="4019550"/>
-            <a:ext cx="1162050" cy="266700"/>
-          </a:xfrm>
-          <a:prstGeom xmlns:a="http://schemas.openxmlformats.org/drawingml/2006/main" prst="rect">
-            <a:avLst/>
-          </a:prstGeom>
-          <a:noFill xmlns:a="http://schemas.openxmlformats.org/drawingml/2006/main"/>
-          <a:ln xmlns:a="http://schemas.openxmlformats.org/drawingml/2006/main" w="0">
-            <a:noFill/>
-            <a:prstDash val="solid"/>
-          </a:ln>
-        </p:spPr>
-        <p:txBody>
-          <a:bodyPr xmlns:a="http://schemas.openxmlformats.org/drawingml/2006/main" anchor="t"/>
-          <a:lstStyle xmlns:a="http://schemas.openxmlformats.org/drawingml/2006/main"/>
-          <a:p xmlns:a="http://schemas.openxmlformats.org/drawingml/2006/main">
-            <a:pPr algn="l">
-              <a:defRPr sz="1200" b="1">
-                <a:solidFill>
-                  <a:srgbClr val="000000"/>
-                </a:solidFill>
-              </a:defRPr>
-            </a:pPr>
-            <a:r>
-              <a:rPr sz="1200" b="1">
-                <a:solidFill>
-                  <a:srgbClr val="000000"/>
-                </a:solidFill>
-              </a:rPr>
-              <a:t>Retrieve KB</a:t>
-            </a:r>
-          </a:p>
-        </p:txBody>
-      </p:sp>
-      <p:sp>
-        <p:nvSpPr>
-          <p:cNvPr id="36" name="arch-retrieve-body">
-            <a:extLst xmlns:a="http://schemas.openxmlformats.org/drawingml/2006/main">
-              <a:ext uri="{FF2B5EF4-FFF2-40B4-BE49-F238E27FC236}">
-                <a16:creationId xmlns:a16="http://schemas.microsoft.com/office/drawing/2014/main" id="{F4947E73-C5BE-4044-8AA7-BFC5D9308E83}"/>
-              </a:ext>
-            </a:extLst>
-          </p:cNvPr>
-          <p:cNvSpPr>
-            <a:spLocks xmlns:a="http://schemas.openxmlformats.org/drawingml/2006/main" noGrp="1"/>
-          </p:cNvSpPr>
-          <p:nvPr/>
-        </p:nvSpPr>
-        <p:spPr>
-          <a:xfrm xmlns:a="http://schemas.openxmlformats.org/drawingml/2006/main">
-            <a:off x="752475" y="4324350"/>
-            <a:ext cx="1162050" cy="647700"/>
-          </a:xfrm>
-          <a:prstGeom xmlns:a="http://schemas.openxmlformats.org/drawingml/2006/main" prst="rect">
-            <a:avLst/>
-          </a:prstGeom>
-          <a:noFill xmlns:a="http://schemas.openxmlformats.org/drawingml/2006/main"/>
-          <a:ln xmlns:a="http://schemas.openxmlformats.org/drawingml/2006/main" w="0">
-            <a:noFill/>
-            <a:prstDash val="solid"/>
-          </a:ln>
-        </p:spPr>
-        <p:txBody>
-          <a:bodyPr xmlns:a="http://schemas.openxmlformats.org/drawingml/2006/main" anchor="t"/>
-          <a:lstStyle xmlns:a="http://schemas.openxmlformats.org/drawingml/2006/main"/>
-          <a:p xmlns:a="http://schemas.openxmlformats.org/drawingml/2006/main">
-            <a:pPr algn="l">
-              <a:defRPr sz="825" b="0">
-                <a:solidFill>
-                  <a:srgbClr val="555B57"/>
-                </a:solidFill>
-              </a:defRPr>
-            </a:pPr>
-            <a:r>
-              <a:rPr sz="825" b="0">
-                <a:solidFill>
-                  <a:srgbClr val="555B57"/>
-                </a:solidFill>
-              </a:rPr>
-              <a:t>3 curated passages.</a:t>
-            </a:r>
-          </a:p>
-          <a:p xmlns:a="http://schemas.openxmlformats.org/drawingml/2006/main">
-            <a:pPr algn="l">
-              <a:defRPr sz="825" b="0">
-                <a:solidFill>
-                  <a:srgbClr val="555B57"/>
-                </a:solidFill>
-              </a:defRPr>
-            </a:pPr>
-            <a:r>
-              <a:rPr sz="825" b="0">
-                <a:solidFill>
-                  <a:srgbClr val="555B57"/>
-                </a:solidFill>
-              </a:rPr>
-              <a:t>Fixed threshold.</a:t>
-            </a:r>
-          </a:p>
-        </p:txBody>
-      </p:sp>
-      <p:sp>
-        <p:nvSpPr>
-          <p:cNvPr id="37" name="arch-answer-card">
-            <a:extLst xmlns:a="http://schemas.openxmlformats.org/drawingml/2006/main">
-              <a:ext uri="{FF2B5EF4-FFF2-40B4-BE49-F238E27FC236}">
-                <a16:creationId xmlns:a16="http://schemas.microsoft.com/office/drawing/2014/main" id="{E9B2782C-491F-46A6-9436-DD2E0C04CB34}"/>
-              </a:ext>
-            </a:extLst>
-          </p:cNvPr>
-          <p:cNvSpPr>
-            <a:spLocks xmlns:a="http://schemas.openxmlformats.org/drawingml/2006/main" noGrp="1"/>
-          </p:cNvSpPr>
-          <p:nvPr/>
-        </p:nvSpPr>
-        <p:spPr>
-          <a:xfrm xmlns:a="http://schemas.openxmlformats.org/drawingml/2006/main">
-            <a:off x="2352675" y="3905250"/>
-            <a:ext cx="1428750" cy="1143000"/>
-          </a:xfrm>
-          <a:prstGeom xmlns:a="http://schemas.openxmlformats.org/drawingml/2006/main" prst="roundRect">
-            <a:avLst>
-              <a:gd name="adj" fmla="val 5000"/>
-            </a:avLst>
-          </a:prstGeom>
-          <a:solidFill xmlns:a="http://schemas.openxmlformats.org/drawingml/2006/main">
-            <a:srgbClr val="F2F2F2"/>
-          </a:solidFill>
-          <a:ln xmlns:a="http://schemas.openxmlformats.org/drawingml/2006/main" w="9525">
-            <a:solidFill>
-              <a:srgbClr val="B8C5BC"/>
-            </a:solidFill>
-            <a:prstDash val="solid"/>
-          </a:ln>
-        </p:spPr>
-      </p:sp>
-      <p:sp>
-        <p:nvSpPr>
-          <p:cNvPr id="38" name="arch-answer-title">
-            <a:extLst xmlns:a="http://schemas.openxmlformats.org/drawingml/2006/main">
-              <a:ext uri="{FF2B5EF4-FFF2-40B4-BE49-F238E27FC236}">
-                <a16:creationId xmlns:a16="http://schemas.microsoft.com/office/drawing/2014/main" id="{4A71D431-B0B8-42AC-9BF0-8BDC21CFDF26}"/>
-              </a:ext>
-            </a:extLst>
-          </p:cNvPr>
-          <p:cNvSpPr>
-            <a:spLocks xmlns:a="http://schemas.openxmlformats.org/drawingml/2006/main" noGrp="1"/>
-          </p:cNvSpPr>
-          <p:nvPr/>
-        </p:nvSpPr>
-        <p:spPr>
-          <a:xfrm xmlns:a="http://schemas.openxmlformats.org/drawingml/2006/main">
-            <a:off x="2486025" y="4019550"/>
-            <a:ext cx="1162050" cy="266700"/>
-          </a:xfrm>
-          <a:prstGeom xmlns:a="http://schemas.openxmlformats.org/drawingml/2006/main" prst="rect">
-            <a:avLst/>
-          </a:prstGeom>
-          <a:noFill xmlns:a="http://schemas.openxmlformats.org/drawingml/2006/main"/>
-          <a:ln xmlns:a="http://schemas.openxmlformats.org/drawingml/2006/main" w="0">
-            <a:noFill/>
-            <a:prstDash val="solid"/>
-          </a:ln>
-        </p:spPr>
-        <p:txBody>
-          <a:bodyPr xmlns:a="http://schemas.openxmlformats.org/drawingml/2006/main" anchor="t"/>
-          <a:lstStyle xmlns:a="http://schemas.openxmlformats.org/drawingml/2006/main"/>
-          <a:p xmlns:a="http://schemas.openxmlformats.org/drawingml/2006/main">
-            <a:pPr algn="l">
-              <a:defRPr sz="1200" b="1">
-                <a:solidFill>
-                  <a:srgbClr val="000000"/>
-                </a:solidFill>
-              </a:defRPr>
-            </a:pPr>
-            <a:r>
-              <a:rPr sz="1200" b="1">
-                <a:solidFill>
-                  <a:srgbClr val="000000"/>
-                </a:solidFill>
-              </a:rPr>
-              <a:t>LLM answer</a:t>
-            </a:r>
-          </a:p>
-        </p:txBody>
-      </p:sp>
-      <p:sp>
-        <p:nvSpPr>
-          <p:cNvPr id="39" name="arch-answer-body">
-            <a:extLst xmlns:a="http://schemas.openxmlformats.org/drawingml/2006/main">
-              <a:ext uri="{FF2B5EF4-FFF2-40B4-BE49-F238E27FC236}">
-                <a16:creationId xmlns:a16="http://schemas.microsoft.com/office/drawing/2014/main" id="{0CCF9CCB-EA32-45DD-952C-CCB264EB8952}"/>
-              </a:ext>
-            </a:extLst>
-          </p:cNvPr>
-          <p:cNvSpPr>
-            <a:spLocks xmlns:a="http://schemas.openxmlformats.org/drawingml/2006/main" noGrp="1"/>
-          </p:cNvSpPr>
-          <p:nvPr/>
-        </p:nvSpPr>
-        <p:spPr>
-          <a:xfrm xmlns:a="http://schemas.openxmlformats.org/drawingml/2006/main">
-            <a:off x="2486025" y="4324350"/>
-            <a:ext cx="1162050" cy="647700"/>
-          </a:xfrm>
-          <a:prstGeom xmlns:a="http://schemas.openxmlformats.org/drawingml/2006/main" prst="rect">
-            <a:avLst/>
-          </a:prstGeom>
-          <a:noFill xmlns:a="http://schemas.openxmlformats.org/drawingml/2006/main"/>
-          <a:ln xmlns:a="http://schemas.openxmlformats.org/drawingml/2006/main" w="0">
-            <a:noFill/>
-            <a:prstDash val="solid"/>
-          </a:ln>
-        </p:spPr>
-        <p:txBody>
-          <a:bodyPr xmlns:a="http://schemas.openxmlformats.org/drawingml/2006/main" anchor="t"/>
-          <a:lstStyle xmlns:a="http://schemas.openxmlformats.org/drawingml/2006/main"/>
-          <a:p xmlns:a="http://schemas.openxmlformats.org/drawingml/2006/main">
-            <a:pPr algn="l">
-              <a:defRPr sz="825" b="0">
-                <a:solidFill>
-                  <a:srgbClr val="555B57"/>
-                </a:solidFill>
-              </a:defRPr>
-            </a:pPr>
-            <a:r>
-              <a:rPr sz="825" b="0">
-                <a:solidFill>
-                  <a:srgbClr val="555B57"/>
-                </a:solidFill>
-              </a:rPr>
-              <a:t>Question + retrieved passages only.</a:t>
-            </a:r>
-          </a:p>
-        </p:txBody>
-      </p:sp>
-      <p:sp>
-        <p:nvSpPr>
-          <p:cNvPr id="40" name="arch-grounding-card">
-            <a:extLst xmlns:a="http://schemas.openxmlformats.org/drawingml/2006/main">
-              <a:ext uri="{FF2B5EF4-FFF2-40B4-BE49-F238E27FC236}">
-                <a16:creationId xmlns:a16="http://schemas.microsoft.com/office/drawing/2014/main" id="{7868C990-F1C5-4184-A7EC-505C37D19E27}"/>
-              </a:ext>
-            </a:extLst>
-          </p:cNvPr>
-          <p:cNvSpPr>
-            <a:spLocks xmlns:a="http://schemas.openxmlformats.org/drawingml/2006/main" noGrp="1"/>
-          </p:cNvSpPr>
-          <p:nvPr/>
-        </p:nvSpPr>
-        <p:spPr>
-          <a:xfrm xmlns:a="http://schemas.openxmlformats.org/drawingml/2006/main">
-            <a:off x="4086225" y="3905250"/>
-            <a:ext cx="1428750" cy="1143000"/>
-          </a:xfrm>
-          <a:prstGeom xmlns:a="http://schemas.openxmlformats.org/drawingml/2006/main" prst="roundRect">
-            <a:avLst>
-              <a:gd name="adj" fmla="val 5000"/>
-            </a:avLst>
+          <p:cNvPr id="37" name="arch-write-accent">
+            <a:extLst xmlns:a="http://schemas.openxmlformats.org/drawingml/2006/main">
+              <a:ext uri="{FF2B5EF4-FFF2-40B4-BE49-F238E27FC236}">
+                <a16:creationId xmlns:a16="http://schemas.microsoft.com/office/drawing/2014/main" id="{05A22C12-8581-41BB-952C-DED180C96738}"/>
+              </a:ext>
+            </a:extLst>
+          </p:cNvPr>
+          <p:cNvSpPr>
+            <a:spLocks xmlns:a="http://schemas.openxmlformats.org/drawingml/2006/main" noGrp="1"/>
+          </p:cNvSpPr>
+          <p:nvPr/>
+        </p:nvSpPr>
+        <p:spPr>
+          <a:xfrm xmlns:a="http://schemas.openxmlformats.org/drawingml/2006/main">
+            <a:off x="390525" y="4476750"/>
+            <a:ext cx="76200" cy="1200150"/>
+          </a:xfrm>
+          <a:prstGeom xmlns:a="http://schemas.openxmlformats.org/drawingml/2006/main" prst="rect">
+            <a:avLst/>
           </a:prstGeom>
           <a:solidFill xmlns:a="http://schemas.openxmlformats.org/drawingml/2006/main">
             <a:srgbClr val="D7FA82"/>
           </a:solidFill>
-          <a:ln xmlns:a="http://schemas.openxmlformats.org/drawingml/2006/main" w="9525">
-            <a:solidFill>
-              <a:srgbClr val="1F714B"/>
-            </a:solidFill>
-            <a:prstDash val="solid"/>
-          </a:ln>
-        </p:spPr>
-      </p:sp>
-      <p:sp>
-        <p:nvSpPr>
-          <p:cNvPr id="41" name="arch-grounding-title">
-            <a:extLst xmlns:a="http://schemas.openxmlformats.org/drawingml/2006/main">
-              <a:ext uri="{FF2B5EF4-FFF2-40B4-BE49-F238E27FC236}">
-                <a16:creationId xmlns:a16="http://schemas.microsoft.com/office/drawing/2014/main" id="{B2659D9C-0DC9-4B32-A894-9550E78FAB43}"/>
-              </a:ext>
-            </a:extLst>
-          </p:cNvPr>
-          <p:cNvSpPr>
-            <a:spLocks xmlns:a="http://schemas.openxmlformats.org/drawingml/2006/main" noGrp="1"/>
-          </p:cNvSpPr>
-          <p:nvPr/>
-        </p:nvSpPr>
-        <p:spPr>
-          <a:xfrm xmlns:a="http://schemas.openxmlformats.org/drawingml/2006/main">
-            <a:off x="4219575" y="4019550"/>
-            <a:ext cx="1162050" cy="266700"/>
+          <a:ln xmlns:a="http://schemas.openxmlformats.org/drawingml/2006/main" w="0">
+            <a:noFill/>
+            <a:prstDash val="solid"/>
+          </a:ln>
+        </p:spPr>
+      </p:sp>
+      <p:sp>
+        <p:nvSpPr>
+          <p:cNvPr id="38" name="arch-write-label">
+            <a:extLst xmlns:a="http://schemas.openxmlformats.org/drawingml/2006/main">
+              <a:ext uri="{FF2B5EF4-FFF2-40B4-BE49-F238E27FC236}">
+                <a16:creationId xmlns:a16="http://schemas.microsoft.com/office/drawing/2014/main" id="{7F00763F-9C82-49FE-88AA-27B649B110C8}"/>
+              </a:ext>
+            </a:extLst>
+          </p:cNvPr>
+          <p:cNvSpPr>
+            <a:spLocks xmlns:a="http://schemas.openxmlformats.org/drawingml/2006/main" noGrp="1"/>
+          </p:cNvSpPr>
+          <p:nvPr/>
+        </p:nvSpPr>
+        <p:spPr>
+          <a:xfrm xmlns:a="http://schemas.openxmlformats.org/drawingml/2006/main">
+            <a:off x="619125" y="4886325"/>
+            <a:ext cx="1524000" cy="323850"/>
           </a:xfrm>
           <a:prstGeom xmlns:a="http://schemas.openxmlformats.org/drawingml/2006/main" prst="rect">
             <a:avLst/>
@@ -3079,986 +2876,93 @@
           <a:lstStyle xmlns:a="http://schemas.openxmlformats.org/drawingml/2006/main"/>
           <a:p xmlns:a="http://schemas.openxmlformats.org/drawingml/2006/main">
             <a:pPr algn="l">
-              <a:defRPr sz="1200" b="1">
+              <a:buNone/>
+              <a:defRPr sz="1350" b="1">
+                <a:solidFill>
+                  <a:srgbClr val="1F714B"/>
+                </a:solidFill>
+              </a:defRPr>
+            </a:pPr>
+            <a:r>
+              <a:rPr sz="1350" b="1">
+                <a:solidFill>
+                  <a:srgbClr val="1F714B"/>
+                </a:solidFill>
+              </a:rPr>
+              <a:t>ACTION PATH</a:t>
+            </a:r>
+          </a:p>
+        </p:txBody>
+      </p:sp>
+      <p:sp>
+        <p:nvSpPr>
+          <p:cNvPr id="39" name="arch-write-flow">
+            <a:extLst xmlns:a="http://schemas.openxmlformats.org/drawingml/2006/main">
+              <a:ext uri="{FF2B5EF4-FFF2-40B4-BE49-F238E27FC236}">
+                <a16:creationId xmlns:a16="http://schemas.microsoft.com/office/drawing/2014/main" id="{0576E36C-3172-4165-AF4B-B35231C5C8AD}"/>
+              </a:ext>
+            </a:extLst>
+          </p:cNvPr>
+          <p:cNvSpPr>
+            <a:spLocks xmlns:a="http://schemas.openxmlformats.org/drawingml/2006/main" noGrp="1"/>
+          </p:cNvSpPr>
+          <p:nvPr/>
+        </p:nvSpPr>
+        <p:spPr>
+          <a:xfrm xmlns:a="http://schemas.openxmlformats.org/drawingml/2006/main">
+            <a:off x="2238375" y="4667250"/>
+            <a:ext cx="9096375" cy="838200"/>
+          </a:xfrm>
+          <a:prstGeom xmlns:a="http://schemas.openxmlformats.org/drawingml/2006/main" prst="rect">
+            <a:avLst/>
+          </a:prstGeom>
+          <a:noFill xmlns:a="http://schemas.openxmlformats.org/drawingml/2006/main"/>
+          <a:ln xmlns:a="http://schemas.openxmlformats.org/drawingml/2006/main" w="0">
+            <a:noFill/>
+            <a:prstDash val="solid"/>
+          </a:ln>
+        </p:spPr>
+        <p:txBody>
+          <a:bodyPr xmlns:a="http://schemas.openxmlformats.org/drawingml/2006/main" anchor="t"/>
+          <a:lstStyle xmlns:a="http://schemas.openxmlformats.org/drawingml/2006/main"/>
+          <a:p xmlns:a="http://schemas.openxmlformats.org/drawingml/2006/main">
+            <a:pPr algn="l">
+              <a:buNone/>
+              <a:defRPr sz="1350" b="1">
                 <a:solidFill>
                   <a:srgbClr val="000000"/>
                 </a:solidFill>
               </a:defRPr>
             </a:pPr>
             <a:r>
-              <a:rPr sz="1200" b="1">
+              <a:rPr sz="1350" b="1">
                 <a:solidFill>
                   <a:srgbClr val="000000"/>
                 </a:solidFill>
               </a:rPr>
-              <a:t>Citation gate</a:t>
-            </a:r>
-          </a:p>
-        </p:txBody>
-      </p:sp>
-      <p:sp>
-        <p:nvSpPr>
-          <p:cNvPr id="42" name="arch-grounding-body">
-            <a:extLst xmlns:a="http://schemas.openxmlformats.org/drawingml/2006/main">
-              <a:ext uri="{FF2B5EF4-FFF2-40B4-BE49-F238E27FC236}">
-                <a16:creationId xmlns:a16="http://schemas.microsoft.com/office/drawing/2014/main" id="{D6315271-81E7-408D-B0B5-DDFBE02FE796}"/>
-              </a:ext>
-            </a:extLst>
-          </p:cNvPr>
-          <p:cNvSpPr>
-            <a:spLocks xmlns:a="http://schemas.openxmlformats.org/drawingml/2006/main" noGrp="1"/>
-          </p:cNvSpPr>
-          <p:nvPr/>
-        </p:nvSpPr>
-        <p:spPr>
-          <a:xfrm xmlns:a="http://schemas.openxmlformats.org/drawingml/2006/main">
-            <a:off x="4219575" y="4324350"/>
-            <a:ext cx="1162050" cy="647700"/>
-          </a:xfrm>
-          <a:prstGeom xmlns:a="http://schemas.openxmlformats.org/drawingml/2006/main" prst="rect">
-            <a:avLst/>
-          </a:prstGeom>
-          <a:noFill xmlns:a="http://schemas.openxmlformats.org/drawingml/2006/main"/>
-          <a:ln xmlns:a="http://schemas.openxmlformats.org/drawingml/2006/main" w="0">
-            <a:noFill/>
-            <a:prstDash val="solid"/>
-          </a:ln>
-        </p:spPr>
-        <p:txBody>
-          <a:bodyPr xmlns:a="http://schemas.openxmlformats.org/drawingml/2006/main" anchor="t"/>
-          <a:lstStyle xmlns:a="http://schemas.openxmlformats.org/drawingml/2006/main"/>
-          <a:p xmlns:a="http://schemas.openxmlformats.org/drawingml/2006/main">
-            <a:pPr algn="l">
-              <a:defRPr sz="825" b="0">
-                <a:solidFill>
-                  <a:srgbClr val="555B57"/>
-                </a:solidFill>
-              </a:defRPr>
-            </a:pPr>
-            <a:r>
-              <a:rPr sz="825" b="0">
-                <a:solidFill>
-                  <a:srgbClr val="555B57"/>
-                </a:solidFill>
-              </a:rPr>
-              <a:t>Reject empty or unknown citations.</a:t>
-            </a:r>
-          </a:p>
-        </p:txBody>
-      </p:sp>
-      <p:sp>
-        <p:nvSpPr>
-          <p:cNvPr id="43" name="arch-action-label">
-            <a:extLst xmlns:a="http://schemas.openxmlformats.org/drawingml/2006/main">
-              <a:ext uri="{FF2B5EF4-FFF2-40B4-BE49-F238E27FC236}">
-                <a16:creationId xmlns:a16="http://schemas.microsoft.com/office/drawing/2014/main" id="{581FA8FC-45DC-4251-8F6A-5029E7A66DED}"/>
-              </a:ext>
-            </a:extLst>
-          </p:cNvPr>
-          <p:cNvSpPr>
-            <a:spLocks xmlns:a="http://schemas.openxmlformats.org/drawingml/2006/main" noGrp="1"/>
-          </p:cNvSpPr>
-          <p:nvPr/>
-        </p:nvSpPr>
-        <p:spPr>
-          <a:xfrm xmlns:a="http://schemas.openxmlformats.org/drawingml/2006/main">
-            <a:off x="6286500" y="3448050"/>
-            <a:ext cx="2952750" cy="228600"/>
-          </a:xfrm>
-          <a:prstGeom xmlns:a="http://schemas.openxmlformats.org/drawingml/2006/main" prst="rect">
-            <a:avLst/>
-          </a:prstGeom>
-          <a:noFill xmlns:a="http://schemas.openxmlformats.org/drawingml/2006/main"/>
-          <a:ln xmlns:a="http://schemas.openxmlformats.org/drawingml/2006/main" w="0">
-            <a:noFill/>
-            <a:prstDash val="solid"/>
-          </a:ln>
-        </p:spPr>
-        <p:txBody>
-          <a:bodyPr xmlns:a="http://schemas.openxmlformats.org/drawingml/2006/main" anchor="t"/>
-          <a:lstStyle xmlns:a="http://schemas.openxmlformats.org/drawingml/2006/main"/>
-          <a:p xmlns:a="http://schemas.openxmlformats.org/drawingml/2006/main">
-            <a:pPr algn="l">
-              <a:defRPr sz="1125" b="1">
-                <a:solidFill>
-                  <a:srgbClr val="1F714B"/>
-                </a:solidFill>
-              </a:defRPr>
-            </a:pPr>
-            <a:r>
-              <a:rPr sz="1125" b="1">
-                <a:solidFill>
-                  <a:srgbClr val="1F714B"/>
-                </a:solidFill>
-              </a:rPr>
-              <a:t>READ / WRITE WORKFLOW PATH</a:t>
-            </a:r>
-          </a:p>
-        </p:txBody>
-      </p:sp>
-      <p:sp>
-        <p:nvSpPr>
-          <p:cNvPr id="44" name="arch-lane-divider">
-            <a:extLst xmlns:a="http://schemas.openxmlformats.org/drawingml/2006/main">
-              <a:ext uri="{FF2B5EF4-FFF2-40B4-BE49-F238E27FC236}">
-                <a16:creationId xmlns:a16="http://schemas.microsoft.com/office/drawing/2014/main" id="{7B2AC8D8-3BA4-4CA1-AB0C-03785B634E14}"/>
-              </a:ext>
-            </a:extLst>
-          </p:cNvPr>
-          <p:cNvSpPr>
-            <a:spLocks xmlns:a="http://schemas.openxmlformats.org/drawingml/2006/main" noGrp="1"/>
-          </p:cNvSpPr>
-          <p:nvPr/>
-        </p:nvSpPr>
-        <p:spPr>
-          <a:xfrm xmlns:a="http://schemas.openxmlformats.org/drawingml/2006/main">
-            <a:off x="5905500" y="3381375"/>
-            <a:ext cx="9525" cy="1952625"/>
-          </a:xfrm>
-          <a:prstGeom xmlns:a="http://schemas.openxmlformats.org/drawingml/2006/main" prst="rect">
-            <a:avLst/>
-          </a:prstGeom>
-          <a:solidFill xmlns:a="http://schemas.openxmlformats.org/drawingml/2006/main">
-            <a:srgbClr val="B8C5BC"/>
-          </a:solidFill>
-          <a:ln xmlns:a="http://schemas.openxmlformats.org/drawingml/2006/main" w="0">
-            <a:noFill/>
-            <a:prstDash val="solid"/>
-          </a:ln>
-        </p:spPr>
-      </p:sp>
-      <p:sp>
-        <p:nvSpPr>
-          <p:cNvPr id="45" name="arch-workflow-card">
-            <a:extLst xmlns:a="http://schemas.openxmlformats.org/drawingml/2006/main">
-              <a:ext uri="{FF2B5EF4-FFF2-40B4-BE49-F238E27FC236}">
-                <a16:creationId xmlns:a16="http://schemas.microsoft.com/office/drawing/2014/main" id="{6C6659FF-EBFD-4927-BCDD-261C83F7A42C}"/>
-              </a:ext>
-            </a:extLst>
-          </p:cNvPr>
-          <p:cNvSpPr>
-            <a:spLocks xmlns:a="http://schemas.openxmlformats.org/drawingml/2006/main" noGrp="1"/>
-          </p:cNvSpPr>
-          <p:nvPr/>
-        </p:nvSpPr>
-        <p:spPr>
-          <a:xfrm xmlns:a="http://schemas.openxmlformats.org/drawingml/2006/main">
-            <a:off x="6286500" y="3905250"/>
-            <a:ext cx="1190625" cy="1143000"/>
-          </a:xfrm>
-          <a:prstGeom xmlns:a="http://schemas.openxmlformats.org/drawingml/2006/main" prst="roundRect">
-            <a:avLst>
-              <a:gd name="adj" fmla="val 5000"/>
-            </a:avLst>
-          </a:prstGeom>
-          <a:solidFill xmlns:a="http://schemas.openxmlformats.org/drawingml/2006/main">
-            <a:srgbClr val="F2F2F2"/>
-          </a:solidFill>
-          <a:ln xmlns:a="http://schemas.openxmlformats.org/drawingml/2006/main" w="9525">
-            <a:solidFill>
-              <a:srgbClr val="B8C5BC"/>
-            </a:solidFill>
-            <a:prstDash val="solid"/>
-          </a:ln>
-        </p:spPr>
-      </p:sp>
-      <p:sp>
-        <p:nvSpPr>
-          <p:cNvPr id="46" name="arch-workflow-title">
-            <a:extLst xmlns:a="http://schemas.openxmlformats.org/drawingml/2006/main">
-              <a:ext uri="{FF2B5EF4-FFF2-40B4-BE49-F238E27FC236}">
-                <a16:creationId xmlns:a16="http://schemas.microsoft.com/office/drawing/2014/main" id="{80D116DD-71A5-4EB7-9C67-F5A0AC44BD0C}"/>
-              </a:ext>
-            </a:extLst>
-          </p:cNvPr>
-          <p:cNvSpPr>
-            <a:spLocks xmlns:a="http://schemas.openxmlformats.org/drawingml/2006/main" noGrp="1"/>
-          </p:cNvSpPr>
-          <p:nvPr/>
-        </p:nvSpPr>
-        <p:spPr>
-          <a:xfrm xmlns:a="http://schemas.openxmlformats.org/drawingml/2006/main">
-            <a:off x="6419850" y="4019550"/>
-            <a:ext cx="923925" cy="266700"/>
-          </a:xfrm>
-          <a:prstGeom xmlns:a="http://schemas.openxmlformats.org/drawingml/2006/main" prst="rect">
-            <a:avLst/>
-          </a:prstGeom>
-          <a:noFill xmlns:a="http://schemas.openxmlformats.org/drawingml/2006/main"/>
-          <a:ln xmlns:a="http://schemas.openxmlformats.org/drawingml/2006/main" w="0">
-            <a:noFill/>
-            <a:prstDash val="solid"/>
-          </a:ln>
-        </p:spPr>
-        <p:txBody>
-          <a:bodyPr xmlns:a="http://schemas.openxmlformats.org/drawingml/2006/main" anchor="t"/>
-          <a:lstStyle xmlns:a="http://schemas.openxmlformats.org/drawingml/2006/main"/>
-          <a:p xmlns:a="http://schemas.openxmlformats.org/drawingml/2006/main">
-            <a:pPr algn="l">
-              <a:defRPr sz="1125" b="1">
+              <a:t>lookupOrder  →  identity check  →  return policy  →  explicit confirmation</a:t>
+            </a:r>
+          </a:p>
+          <a:p xmlns:a="http://schemas.openxmlformats.org/drawingml/2006/main">
+            <a:pPr algn="l">
+              <a:buNone/>
+              <a:defRPr sz="1350" b="1">
                 <a:solidFill>
                   <a:srgbClr val="000000"/>
                 </a:solidFill>
               </a:defRPr>
             </a:pPr>
             <a:r>
-              <a:rPr sz="1125" b="1">
+              <a:rPr sz="1350" b="1">
                 <a:solidFill>
                   <a:srgbClr val="000000"/>
                 </a:solidFill>
               </a:rPr>
-              <a:t>Workflow</a:t>
-            </a:r>
-          </a:p>
-        </p:txBody>
-      </p:sp>
-      <p:sp>
-        <p:nvSpPr>
-          <p:cNvPr id="47" name="arch-workflow-body">
-            <a:extLst xmlns:a="http://schemas.openxmlformats.org/drawingml/2006/main">
-              <a:ext uri="{FF2B5EF4-FFF2-40B4-BE49-F238E27FC236}">
-                <a16:creationId xmlns:a16="http://schemas.microsoft.com/office/drawing/2014/main" id="{3BF28E90-3C4F-45D3-9212-08F24B6846D8}"/>
-              </a:ext>
-            </a:extLst>
-          </p:cNvPr>
-          <p:cNvSpPr>
-            <a:spLocks xmlns:a="http://schemas.openxmlformats.org/drawingml/2006/main" noGrp="1"/>
-          </p:cNvSpPr>
-          <p:nvPr/>
-        </p:nvSpPr>
-        <p:spPr>
-          <a:xfrm xmlns:a="http://schemas.openxmlformats.org/drawingml/2006/main">
-            <a:off x="6419850" y="4324350"/>
-            <a:ext cx="923925" cy="647700"/>
-          </a:xfrm>
-          <a:prstGeom xmlns:a="http://schemas.openxmlformats.org/drawingml/2006/main" prst="rect">
-            <a:avLst/>
-          </a:prstGeom>
-          <a:noFill xmlns:a="http://schemas.openxmlformats.org/drawingml/2006/main"/>
-          <a:ln xmlns:a="http://schemas.openxmlformats.org/drawingml/2006/main" w="0">
-            <a:noFill/>
-            <a:prstDash val="solid"/>
-          </a:ln>
-        </p:spPr>
-        <p:txBody>
-          <a:bodyPr xmlns:a="http://schemas.openxmlformats.org/drawingml/2006/main" anchor="t"/>
-          <a:lstStyle xmlns:a="http://schemas.openxmlformats.org/drawingml/2006/main"/>
-          <a:p xmlns:a="http://schemas.openxmlformats.org/drawingml/2006/main">
-            <a:pPr algn="l">
-              <a:defRPr sz="825" b="0">
-                <a:solidFill>
-                  <a:srgbClr val="555B57"/>
-                </a:solidFill>
-              </a:defRPr>
-            </a:pPr>
-            <a:r>
-              <a:rPr sz="825" b="0">
-                <a:solidFill>
-                  <a:srgbClr val="555B57"/>
-                </a:solidFill>
-              </a:rPr>
-              <a:t>Identity + fixed tool order.</a:t>
-            </a:r>
-          </a:p>
-        </p:txBody>
-      </p:sp>
-      <p:sp>
-        <p:nvSpPr>
-          <p:cNvPr id="48" name="arch-tools-card">
-            <a:extLst xmlns:a="http://schemas.openxmlformats.org/drawingml/2006/main">
-              <a:ext uri="{FF2B5EF4-FFF2-40B4-BE49-F238E27FC236}">
-                <a16:creationId xmlns:a16="http://schemas.microsoft.com/office/drawing/2014/main" id="{FC932D6E-907D-4F56-A2C7-67C8F5D80469}"/>
-              </a:ext>
-            </a:extLst>
-          </p:cNvPr>
-          <p:cNvSpPr>
-            <a:spLocks xmlns:a="http://schemas.openxmlformats.org/drawingml/2006/main" noGrp="1"/>
-          </p:cNvSpPr>
-          <p:nvPr/>
-        </p:nvSpPr>
-        <p:spPr>
-          <a:xfrm xmlns:a="http://schemas.openxmlformats.org/drawingml/2006/main">
-            <a:off x="7591425" y="3905250"/>
-            <a:ext cx="1190625" cy="1143000"/>
-          </a:xfrm>
-          <a:prstGeom xmlns:a="http://schemas.openxmlformats.org/drawingml/2006/main" prst="roundRect">
-            <a:avLst>
-              <a:gd name="adj" fmla="val 5000"/>
-            </a:avLst>
-          </a:prstGeom>
-          <a:solidFill xmlns:a="http://schemas.openxmlformats.org/drawingml/2006/main">
-            <a:srgbClr val="F2F2F2"/>
-          </a:solidFill>
-          <a:ln xmlns:a="http://schemas.openxmlformats.org/drawingml/2006/main" w="9525">
-            <a:solidFill>
-              <a:srgbClr val="B8C5BC"/>
-            </a:solidFill>
-            <a:prstDash val="solid"/>
-          </a:ln>
-        </p:spPr>
-      </p:sp>
-      <p:sp>
-        <p:nvSpPr>
-          <p:cNvPr id="49" name="arch-tools-title">
-            <a:extLst xmlns:a="http://schemas.openxmlformats.org/drawingml/2006/main">
-              <a:ext uri="{FF2B5EF4-FFF2-40B4-BE49-F238E27FC236}">
-                <a16:creationId xmlns:a16="http://schemas.microsoft.com/office/drawing/2014/main" id="{C183FD8C-D15D-4553-B593-6ED8404AB2BA}"/>
-              </a:ext>
-            </a:extLst>
-          </p:cNvPr>
-          <p:cNvSpPr>
-            <a:spLocks xmlns:a="http://schemas.openxmlformats.org/drawingml/2006/main" noGrp="1"/>
-          </p:cNvSpPr>
-          <p:nvPr/>
-        </p:nvSpPr>
-        <p:spPr>
-          <a:xfrm xmlns:a="http://schemas.openxmlformats.org/drawingml/2006/main">
-            <a:off x="7724775" y="4019550"/>
-            <a:ext cx="923925" cy="266700"/>
-          </a:xfrm>
-          <a:prstGeom xmlns:a="http://schemas.openxmlformats.org/drawingml/2006/main" prst="rect">
-            <a:avLst/>
-          </a:prstGeom>
-          <a:noFill xmlns:a="http://schemas.openxmlformats.org/drawingml/2006/main"/>
-          <a:ln xmlns:a="http://schemas.openxmlformats.org/drawingml/2006/main" w="0">
-            <a:noFill/>
-            <a:prstDash val="solid"/>
-          </a:ln>
-        </p:spPr>
-        <p:txBody>
-          <a:bodyPr xmlns:a="http://schemas.openxmlformats.org/drawingml/2006/main" anchor="t"/>
-          <a:lstStyle xmlns:a="http://schemas.openxmlformats.org/drawingml/2006/main"/>
-          <a:p xmlns:a="http://schemas.openxmlformats.org/drawingml/2006/main">
-            <a:pPr algn="l">
-              <a:defRPr sz="975" b="1">
-                <a:solidFill>
-                  <a:srgbClr val="000000"/>
-                </a:solidFill>
-              </a:defRPr>
-            </a:pPr>
-            <a:r>
-              <a:rPr sz="975" b="1">
-                <a:solidFill>
-                  <a:srgbClr val="000000"/>
-                </a:solidFill>
-              </a:rPr>
-              <a:t>Typed tools</a:t>
-            </a:r>
-          </a:p>
-        </p:txBody>
-      </p:sp>
-      <p:sp>
-        <p:nvSpPr>
-          <p:cNvPr id="50" name="arch-tools-body">
-            <a:extLst xmlns:a="http://schemas.openxmlformats.org/drawingml/2006/main">
-              <a:ext uri="{FF2B5EF4-FFF2-40B4-BE49-F238E27FC236}">
-                <a16:creationId xmlns:a16="http://schemas.microsoft.com/office/drawing/2014/main" id="{E01BA072-3360-4399-BC9E-CDAAAD774C9E}"/>
-              </a:ext>
-            </a:extLst>
-          </p:cNvPr>
-          <p:cNvSpPr>
-            <a:spLocks xmlns:a="http://schemas.openxmlformats.org/drawingml/2006/main" noGrp="1"/>
-          </p:cNvSpPr>
-          <p:nvPr/>
-        </p:nvSpPr>
-        <p:spPr>
-          <a:xfrm xmlns:a="http://schemas.openxmlformats.org/drawingml/2006/main">
-            <a:off x="7724775" y="4324350"/>
-            <a:ext cx="923925" cy="647700"/>
-          </a:xfrm>
-          <a:prstGeom xmlns:a="http://schemas.openxmlformats.org/drawingml/2006/main" prst="rect">
-            <a:avLst/>
-          </a:prstGeom>
-          <a:noFill xmlns:a="http://schemas.openxmlformats.org/drawingml/2006/main"/>
-          <a:ln xmlns:a="http://schemas.openxmlformats.org/drawingml/2006/main" w="0">
-            <a:noFill/>
-            <a:prstDash val="solid"/>
-          </a:ln>
-        </p:spPr>
-        <p:txBody>
-          <a:bodyPr xmlns:a="http://schemas.openxmlformats.org/drawingml/2006/main" anchor="t"/>
-          <a:lstStyle xmlns:a="http://schemas.openxmlformats.org/drawingml/2006/main"/>
-          <a:p xmlns:a="http://schemas.openxmlformats.org/drawingml/2006/main">
-            <a:pPr algn="l">
-              <a:defRPr sz="825" b="0">
-                <a:solidFill>
-                  <a:srgbClr val="555B57"/>
-                </a:solidFill>
-              </a:defRPr>
-            </a:pPr>
-            <a:r>
-              <a:rPr sz="825" b="0">
-                <a:solidFill>
-                  <a:srgbClr val="555B57"/>
-                </a:solidFill>
-              </a:rPr>
-              <a:t>Lookup facts; apply policy.</a:t>
-            </a:r>
-          </a:p>
-        </p:txBody>
-      </p:sp>
-      <p:sp>
-        <p:nvSpPr>
-          <p:cNvPr id="51" name="arch-confirm-card">
-            <a:extLst xmlns:a="http://schemas.openxmlformats.org/drawingml/2006/main">
-              <a:ext uri="{FF2B5EF4-FFF2-40B4-BE49-F238E27FC236}">
-                <a16:creationId xmlns:a16="http://schemas.microsoft.com/office/drawing/2014/main" id="{AEE1A6E4-9C80-49F6-91DA-655FA168E631}"/>
-              </a:ext>
-            </a:extLst>
-          </p:cNvPr>
-          <p:cNvSpPr>
-            <a:spLocks xmlns:a="http://schemas.openxmlformats.org/drawingml/2006/main" noGrp="1"/>
-          </p:cNvSpPr>
-          <p:nvPr/>
-        </p:nvSpPr>
-        <p:spPr>
-          <a:xfrm xmlns:a="http://schemas.openxmlformats.org/drawingml/2006/main">
-            <a:off x="8896350" y="3905250"/>
-            <a:ext cx="1190625" cy="1143000"/>
-          </a:xfrm>
-          <a:prstGeom xmlns:a="http://schemas.openxmlformats.org/drawingml/2006/main" prst="roundRect">
-            <a:avLst>
-              <a:gd name="adj" fmla="val 5000"/>
-            </a:avLst>
-          </a:prstGeom>
-          <a:solidFill xmlns:a="http://schemas.openxmlformats.org/drawingml/2006/main">
-            <a:srgbClr val="D7FA82"/>
-          </a:solidFill>
-          <a:ln xmlns:a="http://schemas.openxmlformats.org/drawingml/2006/main" w="9525">
-            <a:solidFill>
-              <a:srgbClr val="1F714B"/>
-            </a:solidFill>
-            <a:prstDash val="solid"/>
-          </a:ln>
-        </p:spPr>
-      </p:sp>
-      <p:sp>
-        <p:nvSpPr>
-          <p:cNvPr id="52" name="arch-confirm-title">
-            <a:extLst xmlns:a="http://schemas.openxmlformats.org/drawingml/2006/main">
-              <a:ext uri="{FF2B5EF4-FFF2-40B4-BE49-F238E27FC236}">
-                <a16:creationId xmlns:a16="http://schemas.microsoft.com/office/drawing/2014/main" id="{79A5CAB5-75A2-4DB1-A358-2CCC5BE8C2C3}"/>
-              </a:ext>
-            </a:extLst>
-          </p:cNvPr>
-          <p:cNvSpPr>
-            <a:spLocks xmlns:a="http://schemas.openxmlformats.org/drawingml/2006/main" noGrp="1"/>
-          </p:cNvSpPr>
-          <p:nvPr/>
-        </p:nvSpPr>
-        <p:spPr>
-          <a:xfrm xmlns:a="http://schemas.openxmlformats.org/drawingml/2006/main">
-            <a:off x="9029700" y="4019550"/>
-            <a:ext cx="923925" cy="266700"/>
-          </a:xfrm>
-          <a:prstGeom xmlns:a="http://schemas.openxmlformats.org/drawingml/2006/main" prst="rect">
-            <a:avLst/>
-          </a:prstGeom>
-          <a:noFill xmlns:a="http://schemas.openxmlformats.org/drawingml/2006/main"/>
-          <a:ln xmlns:a="http://schemas.openxmlformats.org/drawingml/2006/main" w="0">
-            <a:noFill/>
-            <a:prstDash val="solid"/>
-          </a:ln>
-        </p:spPr>
-        <p:txBody>
-          <a:bodyPr xmlns:a="http://schemas.openxmlformats.org/drawingml/2006/main" anchor="t"/>
-          <a:lstStyle xmlns:a="http://schemas.openxmlformats.org/drawingml/2006/main"/>
-          <a:p xmlns:a="http://schemas.openxmlformats.org/drawingml/2006/main">
-            <a:pPr algn="l">
-              <a:defRPr sz="1125" b="1">
-                <a:solidFill>
-                  <a:srgbClr val="000000"/>
-                </a:solidFill>
-              </a:defRPr>
-            </a:pPr>
-            <a:r>
-              <a:rPr sz="1125" b="1">
-                <a:solidFill>
-                  <a:srgbClr val="000000"/>
-                </a:solidFill>
-              </a:rPr>
-              <a:t>Confirm</a:t>
-            </a:r>
-          </a:p>
-        </p:txBody>
-      </p:sp>
-      <p:sp>
-        <p:nvSpPr>
-          <p:cNvPr id="53" name="arch-confirm-body">
-            <a:extLst xmlns:a="http://schemas.openxmlformats.org/drawingml/2006/main">
-              <a:ext uri="{FF2B5EF4-FFF2-40B4-BE49-F238E27FC236}">
-                <a16:creationId xmlns:a16="http://schemas.microsoft.com/office/drawing/2014/main" id="{1C709CBB-5A5A-4501-9DBD-C5BAD4F825C1}"/>
-              </a:ext>
-            </a:extLst>
-          </p:cNvPr>
-          <p:cNvSpPr>
-            <a:spLocks xmlns:a="http://schemas.openxmlformats.org/drawingml/2006/main" noGrp="1"/>
-          </p:cNvSpPr>
-          <p:nvPr/>
-        </p:nvSpPr>
-        <p:spPr>
-          <a:xfrm xmlns:a="http://schemas.openxmlformats.org/drawingml/2006/main">
-            <a:off x="9029700" y="4324350"/>
-            <a:ext cx="923925" cy="647700"/>
-          </a:xfrm>
-          <a:prstGeom xmlns:a="http://schemas.openxmlformats.org/drawingml/2006/main" prst="rect">
-            <a:avLst/>
-          </a:prstGeom>
-          <a:noFill xmlns:a="http://schemas.openxmlformats.org/drawingml/2006/main"/>
-          <a:ln xmlns:a="http://schemas.openxmlformats.org/drawingml/2006/main" w="0">
-            <a:noFill/>
-            <a:prstDash val="solid"/>
-          </a:ln>
-        </p:spPr>
-        <p:txBody>
-          <a:bodyPr xmlns:a="http://schemas.openxmlformats.org/drawingml/2006/main" anchor="t"/>
-          <a:lstStyle xmlns:a="http://schemas.openxmlformats.org/drawingml/2006/main"/>
-          <a:p xmlns:a="http://schemas.openxmlformats.org/drawingml/2006/main">
-            <a:pPr algn="l">
-              <a:defRPr sz="825" b="0">
-                <a:solidFill>
-                  <a:srgbClr val="555B57"/>
-                </a:solidFill>
-              </a:defRPr>
-            </a:pPr>
-            <a:r>
-              <a:rPr sz="825" b="0">
-                <a:solidFill>
-                  <a:srgbClr val="555B57"/>
-                </a:solidFill>
-              </a:rPr>
-              <a:t>Freeze details; require approval.</a:t>
-            </a:r>
-          </a:p>
-        </p:txBody>
-      </p:sp>
-      <p:sp>
-        <p:nvSpPr>
-          <p:cNvPr id="54" name="arch-write-card">
-            <a:extLst xmlns:a="http://schemas.openxmlformats.org/drawingml/2006/main">
-              <a:ext uri="{FF2B5EF4-FFF2-40B4-BE49-F238E27FC236}">
-                <a16:creationId xmlns:a16="http://schemas.microsoft.com/office/drawing/2014/main" id="{64F9933D-9B3C-4637-98D9-30B9C27FB9B1}"/>
-              </a:ext>
-            </a:extLst>
-          </p:cNvPr>
-          <p:cNvSpPr>
-            <a:spLocks xmlns:a="http://schemas.openxmlformats.org/drawingml/2006/main" noGrp="1"/>
-          </p:cNvSpPr>
-          <p:nvPr/>
-        </p:nvSpPr>
-        <p:spPr>
-          <a:xfrm xmlns:a="http://schemas.openxmlformats.org/drawingml/2006/main">
-            <a:off x="10201275" y="3905250"/>
-            <a:ext cx="1190625" cy="1143000"/>
-          </a:xfrm>
-          <a:prstGeom xmlns:a="http://schemas.openxmlformats.org/drawingml/2006/main" prst="roundRect">
-            <a:avLst>
-              <a:gd name="adj" fmla="val 5000"/>
-            </a:avLst>
-          </a:prstGeom>
-          <a:solidFill xmlns:a="http://schemas.openxmlformats.org/drawingml/2006/main">
-            <a:srgbClr val="EEF7F1"/>
-          </a:solidFill>
-          <a:ln xmlns:a="http://schemas.openxmlformats.org/drawingml/2006/main" w="9525">
-            <a:solidFill>
-              <a:srgbClr val="B8C5BC"/>
-            </a:solidFill>
-            <a:prstDash val="solid"/>
-          </a:ln>
-        </p:spPr>
-      </p:sp>
-      <p:sp>
-        <p:nvSpPr>
-          <p:cNvPr id="55" name="arch-write-title">
-            <a:extLst xmlns:a="http://schemas.openxmlformats.org/drawingml/2006/main">
-              <a:ext uri="{FF2B5EF4-FFF2-40B4-BE49-F238E27FC236}">
-                <a16:creationId xmlns:a16="http://schemas.microsoft.com/office/drawing/2014/main" id="{47EDBB4A-8AEB-4FDD-9E9F-39A79BC3C29F}"/>
-              </a:ext>
-            </a:extLst>
-          </p:cNvPr>
-          <p:cNvSpPr>
-            <a:spLocks xmlns:a="http://schemas.openxmlformats.org/drawingml/2006/main" noGrp="1"/>
-          </p:cNvSpPr>
-          <p:nvPr/>
-        </p:nvSpPr>
-        <p:spPr>
-          <a:xfrm xmlns:a="http://schemas.openxmlformats.org/drawingml/2006/main">
-            <a:off x="10334625" y="4019550"/>
-            <a:ext cx="923925" cy="266700"/>
-          </a:xfrm>
-          <a:prstGeom xmlns:a="http://schemas.openxmlformats.org/drawingml/2006/main" prst="rect">
-            <a:avLst/>
-          </a:prstGeom>
-          <a:noFill xmlns:a="http://schemas.openxmlformats.org/drawingml/2006/main"/>
-          <a:ln xmlns:a="http://schemas.openxmlformats.org/drawingml/2006/main" w="0">
-            <a:noFill/>
-            <a:prstDash val="solid"/>
-          </a:ln>
-        </p:spPr>
-        <p:txBody>
-          <a:bodyPr xmlns:a="http://schemas.openxmlformats.org/drawingml/2006/main" anchor="t"/>
-          <a:lstStyle xmlns:a="http://schemas.openxmlformats.org/drawingml/2006/main"/>
-          <a:p xmlns:a="http://schemas.openxmlformats.org/drawingml/2006/main">
-            <a:pPr algn="l">
-              <a:defRPr sz="1125" b="1">
-                <a:solidFill>
-                  <a:srgbClr val="000000"/>
-                </a:solidFill>
-              </a:defRPr>
-            </a:pPr>
-            <a:r>
-              <a:rPr sz="1125" b="1">
-                <a:solidFill>
-                  <a:srgbClr val="000000"/>
-                </a:solidFill>
-              </a:rPr>
-              <a:t>Write</a:t>
-            </a:r>
-          </a:p>
-        </p:txBody>
-      </p:sp>
-      <p:sp>
-        <p:nvSpPr>
-          <p:cNvPr id="56" name="arch-write-body">
-            <a:extLst xmlns:a="http://schemas.openxmlformats.org/drawingml/2006/main">
-              <a:ext uri="{FF2B5EF4-FFF2-40B4-BE49-F238E27FC236}">
-                <a16:creationId xmlns:a16="http://schemas.microsoft.com/office/drawing/2014/main" id="{2BDEF9B4-B8CC-42D2-8BB9-0025F4FF36E2}"/>
-              </a:ext>
-            </a:extLst>
-          </p:cNvPr>
-          <p:cNvSpPr>
-            <a:spLocks xmlns:a="http://schemas.openxmlformats.org/drawingml/2006/main" noGrp="1"/>
-          </p:cNvSpPr>
-          <p:nvPr/>
-        </p:nvSpPr>
-        <p:spPr>
-          <a:xfrm xmlns:a="http://schemas.openxmlformats.org/drawingml/2006/main">
-            <a:off x="10334625" y="4324350"/>
-            <a:ext cx="923925" cy="647700"/>
-          </a:xfrm>
-          <a:prstGeom xmlns:a="http://schemas.openxmlformats.org/drawingml/2006/main" prst="rect">
-            <a:avLst/>
-          </a:prstGeom>
-          <a:noFill xmlns:a="http://schemas.openxmlformats.org/drawingml/2006/main"/>
-          <a:ln xmlns:a="http://schemas.openxmlformats.org/drawingml/2006/main" w="0">
-            <a:noFill/>
-            <a:prstDash val="solid"/>
-          </a:ln>
-        </p:spPr>
-        <p:txBody>
-          <a:bodyPr xmlns:a="http://schemas.openxmlformats.org/drawingml/2006/main" anchor="t"/>
-          <a:lstStyle xmlns:a="http://schemas.openxmlformats.org/drawingml/2006/main"/>
-          <a:p xmlns:a="http://schemas.openxmlformats.org/drawingml/2006/main">
-            <a:pPr algn="l">
-              <a:defRPr sz="825" b="0">
-                <a:solidFill>
-                  <a:srgbClr val="555B57"/>
-                </a:solidFill>
-              </a:defRPr>
-            </a:pPr>
-            <a:r>
-              <a:rPr sz="825" b="0">
-                <a:solidFill>
-                  <a:srgbClr val="555B57"/>
-                </a:solidFill>
-              </a:rPr>
-              <a:t>Recheck; create one return.</a:t>
-            </a:r>
-          </a:p>
-        </p:txBody>
-      </p:sp>
-      <p:cxnSp>
-        <p:nvCxnSpPr>
-          <p:cNvPr id="110" name=""/>
-          <p:cNvCxnSpPr>
-            <a:stCxn xmlns:a="http://schemas.openxmlformats.org/drawingml/2006/main" id="18" idx="3"/>
-            <a:endCxn xmlns:a="http://schemas.openxmlformats.org/drawingml/2006/main" id="21" idx="1"/>
-          </p:cNvCxnSpPr>
-          <p:nvPr/>
-        </p:nvCxnSpPr>
-        <p:spPr>
-          <a:xfrm xmlns:a="http://schemas.openxmlformats.org/drawingml/2006/main">
-            <a:off x="2143125" y="2238375"/>
-            <a:ext cx="428625" cy="0"/>
-          </a:xfrm>
-          <a:prstGeom xmlns:a="http://schemas.openxmlformats.org/drawingml/2006/main" prst="straightConnector1">
-            <a:avLst/>
-          </a:prstGeom>
-          <a:ln xmlns:a="http://schemas.openxmlformats.org/drawingml/2006/main" w="19050">
-            <a:solidFill>
-              <a:srgbClr val="1F714B"/>
-            </a:solidFill>
-            <a:prstDash val="solid"/>
-            <a:tailEnd type="arrow" w="med" len="med"/>
-          </a:ln>
-        </p:spPr>
-      </p:cxnSp>
-      <p:cxnSp>
-        <p:nvCxnSpPr>
-          <p:cNvPr id="111" name=""/>
-          <p:cNvCxnSpPr>
-            <a:stCxn xmlns:a="http://schemas.openxmlformats.org/drawingml/2006/main" id="21" idx="3"/>
-            <a:endCxn xmlns:a="http://schemas.openxmlformats.org/drawingml/2006/main" id="24" idx="1"/>
-          </p:cNvCxnSpPr>
-          <p:nvPr/>
-        </p:nvCxnSpPr>
-        <p:spPr>
-          <a:xfrm xmlns:a="http://schemas.openxmlformats.org/drawingml/2006/main">
-            <a:off x="4524375" y="2238375"/>
-            <a:ext cx="428625" cy="0"/>
-          </a:xfrm>
-          <a:prstGeom xmlns:a="http://schemas.openxmlformats.org/drawingml/2006/main" prst="straightConnector1">
-            <a:avLst/>
-          </a:prstGeom>
-          <a:ln xmlns:a="http://schemas.openxmlformats.org/drawingml/2006/main" w="19050">
-            <a:solidFill>
-              <a:srgbClr val="1F714B"/>
-            </a:solidFill>
-            <a:prstDash val="solid"/>
-            <a:tailEnd type="arrow" w="med" len="med"/>
-          </a:ln>
-        </p:spPr>
-      </p:cxnSp>
-      <p:cxnSp>
-        <p:nvCxnSpPr>
-          <p:cNvPr id="112" name=""/>
-          <p:cNvCxnSpPr>
-            <a:stCxn xmlns:a="http://schemas.openxmlformats.org/drawingml/2006/main" id="24" idx="3"/>
-            <a:endCxn xmlns:a="http://schemas.openxmlformats.org/drawingml/2006/main" id="27" idx="1"/>
-          </p:cNvCxnSpPr>
-          <p:nvPr/>
-        </p:nvCxnSpPr>
-        <p:spPr>
-          <a:xfrm xmlns:a="http://schemas.openxmlformats.org/drawingml/2006/main">
-            <a:off x="6953250" y="2238375"/>
-            <a:ext cx="428625" cy="0"/>
-          </a:xfrm>
-          <a:prstGeom xmlns:a="http://schemas.openxmlformats.org/drawingml/2006/main" prst="straightConnector1">
-            <a:avLst/>
-          </a:prstGeom>
-          <a:ln xmlns:a="http://schemas.openxmlformats.org/drawingml/2006/main" w="19050">
-            <a:solidFill>
-              <a:srgbClr val="1F714B"/>
-            </a:solidFill>
-            <a:prstDash val="solid"/>
-            <a:tailEnd type="arrow" w="med" len="med"/>
-          </a:ln>
-        </p:spPr>
-      </p:cxnSp>
-      <p:cxnSp>
-        <p:nvCxnSpPr>
-          <p:cNvPr id="113" name=""/>
-          <p:cNvCxnSpPr>
-            <a:stCxn xmlns:a="http://schemas.openxmlformats.org/drawingml/2006/main" id="27" idx="3"/>
-            <a:endCxn xmlns:a="http://schemas.openxmlformats.org/drawingml/2006/main" id="30" idx="1"/>
-          </p:cNvCxnSpPr>
-          <p:nvPr/>
-        </p:nvCxnSpPr>
-        <p:spPr>
-          <a:xfrm xmlns:a="http://schemas.openxmlformats.org/drawingml/2006/main">
-            <a:off x="9191625" y="2238375"/>
-            <a:ext cx="428625" cy="0"/>
-          </a:xfrm>
-          <a:prstGeom xmlns:a="http://schemas.openxmlformats.org/drawingml/2006/main" prst="straightConnector1">
-            <a:avLst/>
-          </a:prstGeom>
-          <a:ln xmlns:a="http://schemas.openxmlformats.org/drawingml/2006/main" w="19050">
-            <a:solidFill>
-              <a:srgbClr val="B8C5BC"/>
-            </a:solidFill>
-            <a:prstDash val="dash"/>
-            <a:tailEnd type="arrow" w="med" len="med"/>
-          </a:ln>
-        </p:spPr>
-      </p:cxnSp>
-      <p:cxnSp>
-        <p:nvCxnSpPr>
-          <p:cNvPr id="114" name=""/>
-          <p:cNvCxnSpPr>
-            <a:stCxn xmlns:a="http://schemas.openxmlformats.org/drawingml/2006/main" id="24" idx="2"/>
-            <a:endCxn xmlns:a="http://schemas.openxmlformats.org/drawingml/2006/main" id="34" idx="0"/>
-          </p:cNvCxnSpPr>
-          <p:nvPr/>
-        </p:nvCxnSpPr>
-        <p:spPr>
-          <a:xfrm xmlns:a="http://schemas.openxmlformats.org/drawingml/2006/main" flipH="1">
-            <a:off x="1333500" y="2667000"/>
-            <a:ext cx="4619625" cy="1238250"/>
-          </a:xfrm>
-          <a:prstGeom xmlns:a="http://schemas.openxmlformats.org/drawingml/2006/main" prst="bentConnector4">
-            <a:avLst>
-              <a:gd name="adj1" fmla="val 0"/>
-              <a:gd name="adj2" fmla="val 50000"/>
-            </a:avLst>
-          </a:prstGeom>
-          <a:ln xmlns:a="http://schemas.openxmlformats.org/drawingml/2006/main" w="19050">
-            <a:solidFill>
-              <a:srgbClr val="1F714B"/>
-            </a:solidFill>
-            <a:prstDash val="solid"/>
-            <a:tailEnd type="arrow" w="med" len="med"/>
-          </a:ln>
-        </p:spPr>
-      </p:cxnSp>
-      <p:cxnSp>
-        <p:nvCxnSpPr>
-          <p:cNvPr id="115" name=""/>
-          <p:cNvCxnSpPr>
-            <a:stCxn xmlns:a="http://schemas.openxmlformats.org/drawingml/2006/main" id="34" idx="3"/>
-            <a:endCxn xmlns:a="http://schemas.openxmlformats.org/drawingml/2006/main" id="37" idx="1"/>
-          </p:cNvCxnSpPr>
-          <p:nvPr/>
-        </p:nvCxnSpPr>
-        <p:spPr>
-          <a:xfrm xmlns:a="http://schemas.openxmlformats.org/drawingml/2006/main">
-            <a:off x="2047875" y="4476750"/>
-            <a:ext cx="304800" cy="0"/>
-          </a:xfrm>
-          <a:prstGeom xmlns:a="http://schemas.openxmlformats.org/drawingml/2006/main" prst="straightConnector1">
-            <a:avLst/>
-          </a:prstGeom>
-          <a:ln xmlns:a="http://schemas.openxmlformats.org/drawingml/2006/main" w="19050">
-            <a:solidFill>
-              <a:srgbClr val="1F714B"/>
-            </a:solidFill>
-            <a:prstDash val="solid"/>
-            <a:tailEnd type="arrow" w="med" len="med"/>
-          </a:ln>
-        </p:spPr>
-      </p:cxnSp>
-      <p:cxnSp>
-        <p:nvCxnSpPr>
-          <p:cNvPr id="116" name=""/>
-          <p:cNvCxnSpPr>
-            <a:stCxn xmlns:a="http://schemas.openxmlformats.org/drawingml/2006/main" id="37" idx="3"/>
-            <a:endCxn xmlns:a="http://schemas.openxmlformats.org/drawingml/2006/main" id="40" idx="1"/>
-          </p:cNvCxnSpPr>
-          <p:nvPr/>
-        </p:nvCxnSpPr>
-        <p:spPr>
-          <a:xfrm xmlns:a="http://schemas.openxmlformats.org/drawingml/2006/main">
-            <a:off x="3781425" y="4476750"/>
-            <a:ext cx="304800" cy="0"/>
-          </a:xfrm>
-          <a:prstGeom xmlns:a="http://schemas.openxmlformats.org/drawingml/2006/main" prst="straightConnector1">
-            <a:avLst/>
-          </a:prstGeom>
-          <a:ln xmlns:a="http://schemas.openxmlformats.org/drawingml/2006/main" w="19050">
-            <a:solidFill>
-              <a:srgbClr val="1F714B"/>
-            </a:solidFill>
-            <a:prstDash val="solid"/>
-            <a:tailEnd type="arrow" w="med" len="med"/>
-          </a:ln>
-        </p:spPr>
-      </p:cxnSp>
-      <p:cxnSp>
-        <p:nvCxnSpPr>
-          <p:cNvPr id="117" name=""/>
-          <p:cNvCxnSpPr>
-            <a:stCxn xmlns:a="http://schemas.openxmlformats.org/drawingml/2006/main" id="24" idx="2"/>
-            <a:endCxn xmlns:a="http://schemas.openxmlformats.org/drawingml/2006/main" id="45" idx="0"/>
-          </p:cNvCxnSpPr>
-          <p:nvPr/>
-        </p:nvCxnSpPr>
-        <p:spPr>
-          <a:xfrm xmlns:a="http://schemas.openxmlformats.org/drawingml/2006/main">
-            <a:off x="5953125" y="2667000"/>
-            <a:ext cx="928688" cy="1238250"/>
-          </a:xfrm>
-          <a:prstGeom xmlns:a="http://schemas.openxmlformats.org/drawingml/2006/main" prst="bentConnector4">
-            <a:avLst>
-              <a:gd name="adj1" fmla="val 0"/>
-              <a:gd name="adj2" fmla="val 50000"/>
-            </a:avLst>
-          </a:prstGeom>
-          <a:ln xmlns:a="http://schemas.openxmlformats.org/drawingml/2006/main" w="19050">
-            <a:solidFill>
-              <a:srgbClr val="1F714B"/>
-            </a:solidFill>
-            <a:prstDash val="solid"/>
-            <a:tailEnd type="arrow" w="med" len="med"/>
-          </a:ln>
-        </p:spPr>
-      </p:cxnSp>
-      <p:cxnSp>
-        <p:nvCxnSpPr>
-          <p:cNvPr id="118" name=""/>
-          <p:cNvCxnSpPr>
-            <a:stCxn xmlns:a="http://schemas.openxmlformats.org/drawingml/2006/main" id="45" idx="3"/>
-            <a:endCxn xmlns:a="http://schemas.openxmlformats.org/drawingml/2006/main" id="48" idx="1"/>
-          </p:cNvCxnSpPr>
-          <p:nvPr/>
-        </p:nvCxnSpPr>
-        <p:spPr>
-          <a:xfrm xmlns:a="http://schemas.openxmlformats.org/drawingml/2006/main">
-            <a:off x="7477125" y="4476750"/>
-            <a:ext cx="114300" cy="0"/>
-          </a:xfrm>
-          <a:prstGeom xmlns:a="http://schemas.openxmlformats.org/drawingml/2006/main" prst="straightConnector1">
-            <a:avLst/>
-          </a:prstGeom>
-          <a:ln xmlns:a="http://schemas.openxmlformats.org/drawingml/2006/main" w="19050">
-            <a:solidFill>
-              <a:srgbClr val="1F714B"/>
-            </a:solidFill>
-            <a:prstDash val="solid"/>
-            <a:tailEnd type="arrow" w="med" len="med"/>
-          </a:ln>
-        </p:spPr>
-      </p:cxnSp>
-      <p:cxnSp>
-        <p:nvCxnSpPr>
-          <p:cNvPr id="119" name=""/>
-          <p:cNvCxnSpPr>
-            <a:stCxn xmlns:a="http://schemas.openxmlformats.org/drawingml/2006/main" id="48" idx="3"/>
-            <a:endCxn xmlns:a="http://schemas.openxmlformats.org/drawingml/2006/main" id="51" idx="1"/>
-          </p:cNvCxnSpPr>
-          <p:nvPr/>
-        </p:nvCxnSpPr>
-        <p:spPr>
-          <a:xfrm xmlns:a="http://schemas.openxmlformats.org/drawingml/2006/main">
-            <a:off x="8782050" y="4476750"/>
-            <a:ext cx="114300" cy="0"/>
-          </a:xfrm>
-          <a:prstGeom xmlns:a="http://schemas.openxmlformats.org/drawingml/2006/main" prst="straightConnector1">
-            <a:avLst/>
-          </a:prstGeom>
-          <a:ln xmlns:a="http://schemas.openxmlformats.org/drawingml/2006/main" w="19050">
-            <a:solidFill>
-              <a:srgbClr val="1F714B"/>
-            </a:solidFill>
-            <a:prstDash val="solid"/>
-            <a:tailEnd type="arrow" w="med" len="med"/>
-          </a:ln>
-        </p:spPr>
-      </p:cxnSp>
-      <p:cxnSp>
-        <p:nvCxnSpPr>
-          <p:cNvPr id="120" name=""/>
-          <p:cNvCxnSpPr>
-            <a:stCxn xmlns:a="http://schemas.openxmlformats.org/drawingml/2006/main" id="51" idx="3"/>
-            <a:endCxn xmlns:a="http://schemas.openxmlformats.org/drawingml/2006/main" id="54" idx="1"/>
-          </p:cNvCxnSpPr>
-          <p:nvPr/>
-        </p:nvCxnSpPr>
-        <p:spPr>
-          <a:xfrm xmlns:a="http://schemas.openxmlformats.org/drawingml/2006/main">
-            <a:off x="10086975" y="4476750"/>
-            <a:ext cx="114300" cy="0"/>
-          </a:xfrm>
-          <a:prstGeom xmlns:a="http://schemas.openxmlformats.org/drawingml/2006/main" prst="straightConnector1">
-            <a:avLst/>
-          </a:prstGeom>
-          <a:ln xmlns:a="http://schemas.openxmlformats.org/drawingml/2006/main" w="19050">
-            <a:solidFill>
-              <a:srgbClr val="1F714B"/>
-            </a:solidFill>
-            <a:prstDash val="solid"/>
-            <a:tailEnd type="arrow" w="med" len="med"/>
-          </a:ln>
-        </p:spPr>
-      </p:cxnSp>
+              <a:t>→  createReturn rechecks confirmation, identity, eligibility, and idempotency</a:t>
+            </a:r>
+          </a:p>
+        </p:txBody>
+      </p:sp>
     </p:spTree>
     <p:extLst>
       <p:ext uri="{BB962C8B-B14F-4D97-AF65-F5344CB8AC3E}">
@@ -4134,7 +3038,7 @@
                   <a:srgbClr val="000000"/>
                 </a:solidFill>
               </a:rPr>
-              <a:t>This is not a classifier bolted onto a decision tree.</a:t>
+              <a:t>Three technical decisions that mattered most</a:t>
             </a:r>
           </a:p>
         </p:txBody>
@@ -4185,7 +3089,7 @@
                   <a:srgbClr val="555B57"/>
                 </a:solidFill>
               </a:rPr>
-              <a:t>The boundary scales because ambiguity and business risk evolve independently.</a:t>
+              <a:t>Each choice gives up some flexibility in exchange for behavior that is easier to test, explain, and trust.</a:t>
             </a:r>
           </a:p>
         </p:txBody>
@@ -4206,18 +3110,18 @@
         </p:nvSpPr>
         <p:spPr>
           <a:xfrm xmlns:a="http://schemas.openxmlformats.org/drawingml/2006/main">
-            <a:off x="390525" y="3143250"/>
+            <a:off x="390525" y="2095500"/>
             <a:ext cx="400050" cy="400050"/>
           </a:xfrm>
           <a:prstGeom xmlns:a="http://schemas.openxmlformats.org/drawingml/2006/main" prst="ellipse">
             <a:avLst/>
           </a:prstGeom>
           <a:solidFill xmlns:a="http://schemas.openxmlformats.org/drawingml/2006/main">
-            <a:srgbClr val="D7FA82"/>
+            <a:srgbClr val="FFFFFF"/>
           </a:solidFill>
-          <a:ln xmlns:a="http://schemas.openxmlformats.org/drawingml/2006/main" w="9525">
+          <a:ln xmlns:a="http://schemas.openxmlformats.org/drawingml/2006/main" w="19050">
             <a:solidFill>
-              <a:srgbClr val="000000"/>
+              <a:srgbClr val="1F714B"/>
             </a:solidFill>
             <a:prstDash val="solid"/>
           </a:ln>
@@ -4239,8 +3143,8 @@
         </p:nvSpPr>
         <p:spPr>
           <a:xfrm xmlns:a="http://schemas.openxmlformats.org/drawingml/2006/main">
-            <a:off x="390525" y="3190875"/>
-            <a:ext cx="400050" cy="285750"/>
+            <a:off x="390525" y="2095500"/>
+            <a:ext cx="400050" cy="400050"/>
           </a:xfrm>
           <a:prstGeom xmlns:a="http://schemas.openxmlformats.org/drawingml/2006/main" prst="rect">
             <a:avLst/>
@@ -4259,39 +3163,348 @@
               <a:buNone/>
               <a:defRPr sz="1350" b="1">
                 <a:solidFill>
+                  <a:srgbClr val="1F714B"/>
+                </a:solidFill>
+              </a:defRPr>
+            </a:pPr>
+            <a:r>
+              <a:rPr sz="1350" b="1">
+                <a:solidFill>
+                  <a:srgbClr val="1F714B"/>
+                </a:solidFill>
+              </a:rPr>
+              <a:t>1</a:t>
+            </a:r>
+          </a:p>
+        </p:txBody>
+      </p:sp>
+      <p:sp>
+        <p:nvSpPr>
+          <p:cNvPr id="5" name="tradeoff-title-1">
+            <a:extLst xmlns:a="http://schemas.openxmlformats.org/drawingml/2006/main">
+              <a:ext uri="{FF2B5EF4-FFF2-40B4-BE49-F238E27FC236}">
+                <a16:creationId xmlns:a16="http://schemas.microsoft.com/office/drawing/2014/main" id="{D42905AD-D458-4B95-BFE6-172DBDD2B60E}"/>
+              </a:ext>
+            </a:extLst>
+          </p:cNvPr>
+          <p:cNvSpPr>
+            <a:spLocks xmlns:a="http://schemas.openxmlformats.org/drawingml/2006/main" noGrp="1"/>
+          </p:cNvSpPr>
+          <p:nvPr/>
+        </p:nvSpPr>
+        <p:spPr>
+          <a:xfrm xmlns:a="http://schemas.openxmlformats.org/drawingml/2006/main">
+            <a:off x="390525" y="2647950"/>
+            <a:ext cx="3238500" cy="609600"/>
+          </a:xfrm>
+          <a:prstGeom xmlns:a="http://schemas.openxmlformats.org/drawingml/2006/main" prst="rect">
+            <a:avLst/>
+          </a:prstGeom>
+          <a:noFill xmlns:a="http://schemas.openxmlformats.org/drawingml/2006/main"/>
+          <a:ln xmlns:a="http://schemas.openxmlformats.org/drawingml/2006/main" w="0">
+            <a:noFill/>
+            <a:prstDash val="solid"/>
+          </a:ln>
+        </p:spPr>
+        <p:txBody>
+          <a:bodyPr xmlns:a="http://schemas.openxmlformats.org/drawingml/2006/main" anchor="t"/>
+          <a:lstStyle xmlns:a="http://schemas.openxmlformats.org/drawingml/2006/main"/>
+          <a:p xmlns:a="http://schemas.openxmlformats.org/drawingml/2006/main">
+            <a:pPr algn="l">
+              <a:buNone/>
+              <a:defRPr sz="1875" b="1">
+                <a:solidFill>
                   <a:srgbClr val="000000"/>
                 </a:solidFill>
               </a:defRPr>
             </a:pPr>
             <a:r>
+              <a:rPr sz="1875" b="1">
+                <a:solidFill>
+                  <a:srgbClr val="000000"/>
+                </a:solidFill>
+              </a:rPr>
+              <a:t>Interpretation is not execution</a:t>
+            </a:r>
+          </a:p>
+        </p:txBody>
+      </p:sp>
+      <p:sp>
+        <p:nvSpPr>
+          <p:cNvPr id="6" name="tradeoff-body-1">
+            <a:extLst xmlns:a="http://schemas.openxmlformats.org/drawingml/2006/main">
+              <a:ext uri="{FF2B5EF4-FFF2-40B4-BE49-F238E27FC236}">
+                <a16:creationId xmlns:a16="http://schemas.microsoft.com/office/drawing/2014/main" id="{B2320F6C-41D0-4B28-B197-8408F708A742}"/>
+              </a:ext>
+            </a:extLst>
+          </p:cNvPr>
+          <p:cNvSpPr>
+            <a:spLocks xmlns:a="http://schemas.openxmlformats.org/drawingml/2006/main" noGrp="1"/>
+          </p:cNvSpPr>
+          <p:nvPr/>
+        </p:nvSpPr>
+        <p:spPr>
+          <a:xfrm xmlns:a="http://schemas.openxmlformats.org/drawingml/2006/main">
+            <a:off x="390525" y="3352800"/>
+            <a:ext cx="3333750" cy="2667000"/>
+          </a:xfrm>
+          <a:prstGeom xmlns:a="http://schemas.openxmlformats.org/drawingml/2006/main" prst="rect">
+            <a:avLst/>
+          </a:prstGeom>
+          <a:noFill xmlns:a="http://schemas.openxmlformats.org/drawingml/2006/main"/>
+          <a:ln xmlns:a="http://schemas.openxmlformats.org/drawingml/2006/main" w="0">
+            <a:noFill/>
+            <a:prstDash val="solid"/>
+          </a:ln>
+        </p:spPr>
+        <p:txBody>
+          <a:bodyPr xmlns:a="http://schemas.openxmlformats.org/drawingml/2006/main" anchor="t"/>
+          <a:lstStyle xmlns:a="http://schemas.openxmlformats.org/drawingml/2006/main"/>
+          <a:p xmlns:a="http://schemas.openxmlformats.org/drawingml/2006/main">
+            <a:pPr algn="l">
+              <a:buNone/>
+              <a:defRPr sz="1350" b="0">
+                <a:solidFill>
+                  <a:srgbClr val="555B57"/>
+                </a:solidFill>
+              </a:defRPr>
+            </a:pPr>
+            <a:r>
+              <a:rPr sz="1350" b="0">
+                <a:solidFill>
+                  <a:srgbClr val="555B57"/>
+                </a:solidFill>
+              </a:rPr>
+              <a:t>CHOICE</a:t>
+            </a:r>
+          </a:p>
+          <a:p xmlns:a="http://schemas.openxmlformats.org/drawingml/2006/main">
+            <a:pPr algn="l">
+              <a:buNone/>
+              <a:defRPr sz="1350" b="0">
+                <a:solidFill>
+                  <a:srgbClr val="555B57"/>
+                </a:solidFill>
+              </a:defRPr>
+            </a:pPr>
+            <a:r>
+              <a:rPr sz="1350" b="0">
+                <a:solidFill>
+                  <a:srgbClr val="555B57"/>
+                </a:solidFill>
+              </a:rPr>
+              <a:t>The model returns typed intent, slots, and contextAction. Code validates literal IDs and chooses the workflow.</a:t>
+            </a:r>
+          </a:p>
+          <a:p xmlns:a="http://schemas.openxmlformats.org/drawingml/2006/main">
+            <a:pPr algn="l">
+              <a:buNone/>
+              <a:defRPr sz="1425" b="0">
+                <a:solidFill>
+                  <a:srgbClr val="555B57"/>
+                </a:solidFill>
+              </a:defRPr>
+            </a:pPr>
+            <a:r>
+              <a:rPr sz="1425" b="0">
+                <a:solidFill>
+                  <a:srgbClr val="555B57"/>
+                </a:solidFill>
+              </a:rPr>
+              <a:t/>
+            </a:r>
+          </a:p>
+          <a:p xmlns:a="http://schemas.openxmlformats.org/drawingml/2006/main">
+            <a:pPr algn="l">
+              <a:buNone/>
+              <a:defRPr sz="1350" b="0">
+                <a:solidFill>
+                  <a:srgbClr val="555B57"/>
+                </a:solidFill>
+              </a:defRPr>
+            </a:pPr>
+            <a:r>
+              <a:rPr sz="1350" b="0">
+                <a:solidFill>
+                  <a:srgbClr val="555B57"/>
+                </a:solidFill>
+              </a:rPr>
+              <a:t>TRADEOFF</a:t>
+            </a:r>
+          </a:p>
+          <a:p xmlns:a="http://schemas.openxmlformats.org/drawingml/2006/main">
+            <a:pPr algn="l">
+              <a:buNone/>
+              <a:defRPr sz="1350" b="0">
+                <a:solidFill>
+                  <a:srgbClr val="555B57"/>
+                </a:solidFill>
+              </a:defRPr>
+            </a:pPr>
+            <a:r>
+              <a:rPr sz="1350" b="0">
+                <a:solidFill>
+                  <a:srgbClr val="555B57"/>
+                </a:solidFill>
+              </a:rPr>
+              <a:t>More orchestration code, but no model-selected tools or invented operational facts.</a:t>
+            </a:r>
+          </a:p>
+        </p:txBody>
+      </p:sp>
+      <p:sp>
+        <p:nvSpPr>
+          <p:cNvPr id="7" name="tradeoff-2-circle">
+            <a:extLst xmlns:a="http://schemas.openxmlformats.org/drawingml/2006/main">
+              <a:ext uri="{FF2B5EF4-FFF2-40B4-BE49-F238E27FC236}">
+                <a16:creationId xmlns:a16="http://schemas.microsoft.com/office/drawing/2014/main" id="{7F796CC8-1F65-4028-9ABD-9F255E867E50}"/>
+              </a:ext>
+            </a:extLst>
+          </p:cNvPr>
+          <p:cNvSpPr>
+            <a:spLocks xmlns:a="http://schemas.openxmlformats.org/drawingml/2006/main" noGrp="1"/>
+          </p:cNvSpPr>
+          <p:nvPr/>
+        </p:nvSpPr>
+        <p:spPr>
+          <a:xfrm xmlns:a="http://schemas.openxmlformats.org/drawingml/2006/main">
+            <a:off x="4314825" y="2095500"/>
+            <a:ext cx="400050" cy="400050"/>
+          </a:xfrm>
+          <a:prstGeom xmlns:a="http://schemas.openxmlformats.org/drawingml/2006/main" prst="ellipse">
+            <a:avLst/>
+          </a:prstGeom>
+          <a:solidFill xmlns:a="http://schemas.openxmlformats.org/drawingml/2006/main">
+            <a:srgbClr val="FFFFFF"/>
+          </a:solidFill>
+          <a:ln xmlns:a="http://schemas.openxmlformats.org/drawingml/2006/main" w="19050">
+            <a:solidFill>
+              <a:srgbClr val="1F714B"/>
+            </a:solidFill>
+            <a:prstDash val="solid"/>
+          </a:ln>
+        </p:spPr>
+      </p:sp>
+      <p:sp>
+        <p:nvSpPr>
+          <p:cNvPr id="8" name="tradeoff-2-number">
+            <a:extLst xmlns:a="http://schemas.openxmlformats.org/drawingml/2006/main">
+              <a:ext uri="{FF2B5EF4-FFF2-40B4-BE49-F238E27FC236}">
+                <a16:creationId xmlns:a16="http://schemas.microsoft.com/office/drawing/2014/main" id="{5000B126-6D2E-45E5-8492-9F4A0D9E475E}"/>
+              </a:ext>
+            </a:extLst>
+          </p:cNvPr>
+          <p:cNvSpPr>
+            <a:spLocks xmlns:a="http://schemas.openxmlformats.org/drawingml/2006/main" noGrp="1"/>
+          </p:cNvSpPr>
+          <p:nvPr/>
+        </p:nvSpPr>
+        <p:spPr>
+          <a:xfrm xmlns:a="http://schemas.openxmlformats.org/drawingml/2006/main">
+            <a:off x="4314825" y="2095500"/>
+            <a:ext cx="400050" cy="400050"/>
+          </a:xfrm>
+          <a:prstGeom xmlns:a="http://schemas.openxmlformats.org/drawingml/2006/main" prst="rect">
+            <a:avLst/>
+          </a:prstGeom>
+          <a:noFill xmlns:a="http://schemas.openxmlformats.org/drawingml/2006/main"/>
+          <a:ln xmlns:a="http://schemas.openxmlformats.org/drawingml/2006/main" w="0">
+            <a:noFill/>
+            <a:prstDash val="solid"/>
+          </a:ln>
+        </p:spPr>
+        <p:txBody>
+          <a:bodyPr xmlns:a="http://schemas.openxmlformats.org/drawingml/2006/main" anchor="ctr"/>
+          <a:lstStyle xmlns:a="http://schemas.openxmlformats.org/drawingml/2006/main"/>
+          <a:p xmlns:a="http://schemas.openxmlformats.org/drawingml/2006/main">
+            <a:pPr algn="ctr">
+              <a:buNone/>
+              <a:defRPr sz="1350" b="1">
+                <a:solidFill>
+                  <a:srgbClr val="1F714B"/>
+                </a:solidFill>
+              </a:defRPr>
+            </a:pPr>
+            <a:r>
               <a:rPr sz="1350" b="1">
                 <a:solidFill>
+                  <a:srgbClr val="1F714B"/>
+                </a:solidFill>
+              </a:rPr>
+              <a:t>2</a:t>
+            </a:r>
+          </a:p>
+        </p:txBody>
+      </p:sp>
+      <p:sp>
+        <p:nvSpPr>
+          <p:cNvPr id="9" name="tradeoff-title-2">
+            <a:extLst xmlns:a="http://schemas.openxmlformats.org/drawingml/2006/main">
+              <a:ext uri="{FF2B5EF4-FFF2-40B4-BE49-F238E27FC236}">
+                <a16:creationId xmlns:a16="http://schemas.microsoft.com/office/drawing/2014/main" id="{B3601179-B18C-4E88-A052-8F107FA01204}"/>
+              </a:ext>
+            </a:extLst>
+          </p:cNvPr>
+          <p:cNvSpPr>
+            <a:spLocks xmlns:a="http://schemas.openxmlformats.org/drawingml/2006/main" noGrp="1"/>
+          </p:cNvSpPr>
+          <p:nvPr/>
+        </p:nvSpPr>
+        <p:spPr>
+          <a:xfrm xmlns:a="http://schemas.openxmlformats.org/drawingml/2006/main">
+            <a:off x="4314825" y="2647950"/>
+            <a:ext cx="3238500" cy="609600"/>
+          </a:xfrm>
+          <a:prstGeom xmlns:a="http://schemas.openxmlformats.org/drawingml/2006/main" prst="rect">
+            <a:avLst/>
+          </a:prstGeom>
+          <a:noFill xmlns:a="http://schemas.openxmlformats.org/drawingml/2006/main"/>
+          <a:ln xmlns:a="http://schemas.openxmlformats.org/drawingml/2006/main" w="0">
+            <a:noFill/>
+            <a:prstDash val="solid"/>
+          </a:ln>
+        </p:spPr>
+        <p:txBody>
+          <a:bodyPr xmlns:a="http://schemas.openxmlformats.org/drawingml/2006/main" anchor="t"/>
+          <a:lstStyle xmlns:a="http://schemas.openxmlformats.org/drawingml/2006/main"/>
+          <a:p xmlns:a="http://schemas.openxmlformats.org/drawingml/2006/main">
+            <a:pPr algn="l">
+              <a:buNone/>
+              <a:defRPr sz="1875" b="1">
+                <a:solidFill>
                   <a:srgbClr val="000000"/>
                 </a:solidFill>
-              </a:rPr>
-              <a:t>01</a:t>
-            </a:r>
-          </a:p>
-        </p:txBody>
-      </p:sp>
-      <p:sp>
-        <p:nvSpPr>
-          <p:cNvPr id="5" name="tradeoff-title-1">
-            <a:extLst xmlns:a="http://schemas.openxmlformats.org/drawingml/2006/main">
-              <a:ext uri="{FF2B5EF4-FFF2-40B4-BE49-F238E27FC236}">
-                <a16:creationId xmlns:a16="http://schemas.microsoft.com/office/drawing/2014/main" id="{D42905AD-D458-4B95-BFE6-172DBDD2B60E}"/>
-              </a:ext>
-            </a:extLst>
-          </p:cNvPr>
-          <p:cNvSpPr>
-            <a:spLocks xmlns:a="http://schemas.openxmlformats.org/drawingml/2006/main" noGrp="1"/>
-          </p:cNvSpPr>
-          <p:nvPr/>
-        </p:nvSpPr>
-        <p:spPr>
-          <a:xfrm xmlns:a="http://schemas.openxmlformats.org/drawingml/2006/main">
-            <a:off x="390525" y="3914775"/>
-            <a:ext cx="3333750" cy="400050"/>
+              </a:defRPr>
+            </a:pPr>
+            <a:r>
+              <a:rPr sz="1875" b="1">
+                <a:solidFill>
+                  <a:srgbClr val="000000"/>
+                </a:solidFill>
+              </a:rPr>
+              <a:t>Ground every FAQ answer</a:t>
+            </a:r>
+          </a:p>
+        </p:txBody>
+      </p:sp>
+      <p:sp>
+        <p:nvSpPr>
+          <p:cNvPr id="10" name="tradeoff-body-2">
+            <a:extLst xmlns:a="http://schemas.openxmlformats.org/drawingml/2006/main">
+              <a:ext uri="{FF2B5EF4-FFF2-40B4-BE49-F238E27FC236}">
+                <a16:creationId xmlns:a16="http://schemas.microsoft.com/office/drawing/2014/main" id="{41CFC16B-3190-4FD3-8BC6-E5F20B4E6656}"/>
+              </a:ext>
+            </a:extLst>
+          </p:cNvPr>
+          <p:cNvSpPr>
+            <a:spLocks xmlns:a="http://schemas.openxmlformats.org/drawingml/2006/main" noGrp="1"/>
+          </p:cNvSpPr>
+          <p:nvPr/>
+        </p:nvSpPr>
+        <p:spPr>
+          <a:xfrm xmlns:a="http://schemas.openxmlformats.org/drawingml/2006/main">
+            <a:off x="4314825" y="3352800"/>
+            <a:ext cx="3333750" cy="2667000"/>
           </a:xfrm>
           <a:prstGeom xmlns:a="http://schemas.openxmlformats.org/drawingml/2006/main" prst="rect">
             <a:avLst/>
@@ -4308,41 +3521,248 @@
           <a:p xmlns:a="http://schemas.openxmlformats.org/drawingml/2006/main">
             <a:pPr algn="l">
               <a:buNone/>
-              <a:defRPr sz="2025" b="1">
+              <a:defRPr sz="1350" b="0">
+                <a:solidFill>
+                  <a:srgbClr val="555B57"/>
+                </a:solidFill>
+              </a:defRPr>
+            </a:pPr>
+            <a:r>
+              <a:rPr sz="1350" b="0">
+                <a:solidFill>
+                  <a:srgbClr val="555B57"/>
+                </a:solidFill>
+              </a:rPr>
+              <a:t>CHOICE</a:t>
+            </a:r>
+          </a:p>
+          <a:p xmlns:a="http://schemas.openxmlformats.org/drawingml/2006/main">
+            <a:pPr algn="l">
+              <a:buNone/>
+              <a:defRPr sz="1350" b="0">
+                <a:solidFill>
+                  <a:srgbClr val="555B57"/>
+                </a:solidFill>
+              </a:defRPr>
+            </a:pPr>
+            <a:r>
+              <a:rPr sz="1350" b="0">
+                <a:solidFill>
+                  <a:srgbClr val="555B57"/>
+                </a:solidFill>
+              </a:rPr>
+              <a:t>Deterministic retrieval selects approved passages. The model sees only that evidence; cited IDs are checked before display.</a:t>
+            </a:r>
+          </a:p>
+          <a:p xmlns:a="http://schemas.openxmlformats.org/drawingml/2006/main">
+            <a:pPr algn="l">
+              <a:buNone/>
+              <a:defRPr sz="1425" b="0">
+                <a:solidFill>
+                  <a:srgbClr val="555B57"/>
+                </a:solidFill>
+              </a:defRPr>
+            </a:pPr>
+            <a:r>
+              <a:rPr sz="1425" b="0">
+                <a:solidFill>
+                  <a:srgbClr val="555B57"/>
+                </a:solidFill>
+              </a:rPr>
+              <a:t/>
+            </a:r>
+          </a:p>
+          <a:p xmlns:a="http://schemas.openxmlformats.org/drawingml/2006/main">
+            <a:pPr algn="l">
+              <a:buNone/>
+              <a:defRPr sz="1350" b="0">
+                <a:solidFill>
+                  <a:srgbClr val="555B57"/>
+                </a:solidFill>
+              </a:defRPr>
+            </a:pPr>
+            <a:r>
+              <a:rPr sz="1350" b="0">
+                <a:solidFill>
+                  <a:srgbClr val="555B57"/>
+                </a:solidFill>
+              </a:rPr>
+              <a:t>TRADEOFF</a:t>
+            </a:r>
+          </a:p>
+          <a:p xmlns:a="http://schemas.openxmlformats.org/drawingml/2006/main">
+            <a:pPr algn="l">
+              <a:buNone/>
+              <a:defRPr sz="1350" b="0">
+                <a:solidFill>
+                  <a:srgbClr val="555B57"/>
+                </a:solidFill>
+              </a:defRPr>
+            </a:pPr>
+            <a:r>
+              <a:rPr sz="1350" b="0">
+                <a:solidFill>
+                  <a:srgbClr val="555B57"/>
+                </a:solidFill>
+              </a:rPr>
+              <a:t>A small knowledge base causes more handoffs, but unsupported answers never reach customers.</a:t>
+            </a:r>
+          </a:p>
+        </p:txBody>
+      </p:sp>
+      <p:sp>
+        <p:nvSpPr>
+          <p:cNvPr id="11" name="tradeoff-3-circle">
+            <a:extLst xmlns:a="http://schemas.openxmlformats.org/drawingml/2006/main">
+              <a:ext uri="{FF2B5EF4-FFF2-40B4-BE49-F238E27FC236}">
+                <a16:creationId xmlns:a16="http://schemas.microsoft.com/office/drawing/2014/main" id="{727511EB-507D-4C6A-8729-738F41C7A40C}"/>
+              </a:ext>
+            </a:extLst>
+          </p:cNvPr>
+          <p:cNvSpPr>
+            <a:spLocks xmlns:a="http://schemas.openxmlformats.org/drawingml/2006/main" noGrp="1"/>
+          </p:cNvSpPr>
+          <p:nvPr/>
+        </p:nvSpPr>
+        <p:spPr>
+          <a:xfrm xmlns:a="http://schemas.openxmlformats.org/drawingml/2006/main">
+            <a:off x="8229600" y="2095500"/>
+            <a:ext cx="400050" cy="400050"/>
+          </a:xfrm>
+          <a:prstGeom xmlns:a="http://schemas.openxmlformats.org/drawingml/2006/main" prst="ellipse">
+            <a:avLst/>
+          </a:prstGeom>
+          <a:solidFill xmlns:a="http://schemas.openxmlformats.org/drawingml/2006/main">
+            <a:srgbClr val="FFFFFF"/>
+          </a:solidFill>
+          <a:ln xmlns:a="http://schemas.openxmlformats.org/drawingml/2006/main" w="19050">
+            <a:solidFill>
+              <a:srgbClr val="1F714B"/>
+            </a:solidFill>
+            <a:prstDash val="solid"/>
+          </a:ln>
+        </p:spPr>
+      </p:sp>
+      <p:sp>
+        <p:nvSpPr>
+          <p:cNvPr id="12" name="tradeoff-3-number">
+            <a:extLst xmlns:a="http://schemas.openxmlformats.org/drawingml/2006/main">
+              <a:ext uri="{FF2B5EF4-FFF2-40B4-BE49-F238E27FC236}">
+                <a16:creationId xmlns:a16="http://schemas.microsoft.com/office/drawing/2014/main" id="{BEE1D8DF-41DF-4569-A0EA-6A38AB2F5620}"/>
+              </a:ext>
+            </a:extLst>
+          </p:cNvPr>
+          <p:cNvSpPr>
+            <a:spLocks xmlns:a="http://schemas.openxmlformats.org/drawingml/2006/main" noGrp="1"/>
+          </p:cNvSpPr>
+          <p:nvPr/>
+        </p:nvSpPr>
+        <p:spPr>
+          <a:xfrm xmlns:a="http://schemas.openxmlformats.org/drawingml/2006/main">
+            <a:off x="8229600" y="2095500"/>
+            <a:ext cx="400050" cy="400050"/>
+          </a:xfrm>
+          <a:prstGeom xmlns:a="http://schemas.openxmlformats.org/drawingml/2006/main" prst="rect">
+            <a:avLst/>
+          </a:prstGeom>
+          <a:noFill xmlns:a="http://schemas.openxmlformats.org/drawingml/2006/main"/>
+          <a:ln xmlns:a="http://schemas.openxmlformats.org/drawingml/2006/main" w="0">
+            <a:noFill/>
+            <a:prstDash val="solid"/>
+          </a:ln>
+        </p:spPr>
+        <p:txBody>
+          <a:bodyPr xmlns:a="http://schemas.openxmlformats.org/drawingml/2006/main" anchor="ctr"/>
+          <a:lstStyle xmlns:a="http://schemas.openxmlformats.org/drawingml/2006/main"/>
+          <a:p xmlns:a="http://schemas.openxmlformats.org/drawingml/2006/main">
+            <a:pPr algn="ctr">
+              <a:buNone/>
+              <a:defRPr sz="1350" b="1">
+                <a:solidFill>
+                  <a:srgbClr val="1F714B"/>
+                </a:solidFill>
+              </a:defRPr>
+            </a:pPr>
+            <a:r>
+              <a:rPr sz="1350" b="1">
+                <a:solidFill>
+                  <a:srgbClr val="1F714B"/>
+                </a:solidFill>
+              </a:rPr>
+              <a:t>3</a:t>
+            </a:r>
+          </a:p>
+        </p:txBody>
+      </p:sp>
+      <p:sp>
+        <p:nvSpPr>
+          <p:cNvPr id="13" name="tradeoff-title-3">
+            <a:extLst xmlns:a="http://schemas.openxmlformats.org/drawingml/2006/main">
+              <a:ext uri="{FF2B5EF4-FFF2-40B4-BE49-F238E27FC236}">
+                <a16:creationId xmlns:a16="http://schemas.microsoft.com/office/drawing/2014/main" id="{B4693120-C9D0-4892-B57D-2AF223AC41C0}"/>
+              </a:ext>
+            </a:extLst>
+          </p:cNvPr>
+          <p:cNvSpPr>
+            <a:spLocks xmlns:a="http://schemas.openxmlformats.org/drawingml/2006/main" noGrp="1"/>
+          </p:cNvSpPr>
+          <p:nvPr/>
+        </p:nvSpPr>
+        <p:spPr>
+          <a:xfrm xmlns:a="http://schemas.openxmlformats.org/drawingml/2006/main">
+            <a:off x="8229600" y="2647950"/>
+            <a:ext cx="3238500" cy="609600"/>
+          </a:xfrm>
+          <a:prstGeom xmlns:a="http://schemas.openxmlformats.org/drawingml/2006/main" prst="rect">
+            <a:avLst/>
+          </a:prstGeom>
+          <a:noFill xmlns:a="http://schemas.openxmlformats.org/drawingml/2006/main"/>
+          <a:ln xmlns:a="http://schemas.openxmlformats.org/drawingml/2006/main" w="0">
+            <a:noFill/>
+            <a:prstDash val="solid"/>
+          </a:ln>
+        </p:spPr>
+        <p:txBody>
+          <a:bodyPr xmlns:a="http://schemas.openxmlformats.org/drawingml/2006/main" anchor="t"/>
+          <a:lstStyle xmlns:a="http://schemas.openxmlformats.org/drawingml/2006/main"/>
+          <a:p xmlns:a="http://schemas.openxmlformats.org/drawingml/2006/main">
+            <a:pPr algn="l">
+              <a:buNone/>
+              <a:defRPr sz="1875" b="1">
                 <a:solidFill>
                   <a:srgbClr val="000000"/>
                 </a:solidFill>
               </a:defRPr>
             </a:pPr>
             <a:r>
-              <a:rPr sz="2025" b="1">
+              <a:rPr sz="1875" b="1">
                 <a:solidFill>
                   <a:srgbClr val="000000"/>
                 </a:solidFill>
               </a:rPr>
-              <a:t>Model-owned ambiguity</a:t>
-            </a:r>
-          </a:p>
-        </p:txBody>
-      </p:sp>
-      <p:sp>
-        <p:nvSpPr>
-          <p:cNvPr id="6" name="tradeoff-body-1">
-            <a:extLst xmlns:a="http://schemas.openxmlformats.org/drawingml/2006/main">
-              <a:ext uri="{FF2B5EF4-FFF2-40B4-BE49-F238E27FC236}">
-                <a16:creationId xmlns:a16="http://schemas.microsoft.com/office/drawing/2014/main" id="{B2320F6C-41D0-4B28-B197-8408F708A742}"/>
-              </a:ext>
-            </a:extLst>
-          </p:cNvPr>
-          <p:cNvSpPr>
-            <a:spLocks xmlns:a="http://schemas.openxmlformats.org/drawingml/2006/main" noGrp="1"/>
-          </p:cNvSpPr>
-          <p:nvPr/>
-        </p:nvSpPr>
-        <p:spPr>
-          <a:xfrm xmlns:a="http://schemas.openxmlformats.org/drawingml/2006/main">
-            <a:off x="390525" y="4457700"/>
-            <a:ext cx="3333750" cy="1381125"/>
+              <a:t>Make writes earn permission</a:t>
+            </a:r>
+          </a:p>
+        </p:txBody>
+      </p:sp>
+      <p:sp>
+        <p:nvSpPr>
+          <p:cNvPr id="14" name="tradeoff-body-3">
+            <a:extLst xmlns:a="http://schemas.openxmlformats.org/drawingml/2006/main">
+              <a:ext uri="{FF2B5EF4-FFF2-40B4-BE49-F238E27FC236}">
+                <a16:creationId xmlns:a16="http://schemas.microsoft.com/office/drawing/2014/main" id="{53BF6D68-65B3-40E7-8C56-B0A9EB849519}"/>
+              </a:ext>
+            </a:extLst>
+          </p:cNvPr>
+          <p:cNvSpPr>
+            <a:spLocks xmlns:a="http://schemas.openxmlformats.org/drawingml/2006/main" noGrp="1"/>
+          </p:cNvSpPr>
+          <p:nvPr/>
+        </p:nvSpPr>
+        <p:spPr>
+          <a:xfrm xmlns:a="http://schemas.openxmlformats.org/drawingml/2006/main">
+            <a:off x="8229600" y="3352800"/>
+            <a:ext cx="3333750" cy="2667000"/>
           </a:xfrm>
           <a:prstGeom xmlns:a="http://schemas.openxmlformats.org/drawingml/2006/main" prst="rect">
             <a:avLst/>
@@ -4359,6 +3779,42 @@
           <a:p xmlns:a="http://schemas.openxmlformats.org/drawingml/2006/main">
             <a:pPr algn="l">
               <a:buNone/>
+              <a:defRPr sz="1350" b="0">
+                <a:solidFill>
+                  <a:srgbClr val="555B57"/>
+                </a:solidFill>
+              </a:defRPr>
+            </a:pPr>
+            <a:r>
+              <a:rPr sz="1350" b="0">
+                <a:solidFill>
+                  <a:srgbClr val="555B57"/>
+                </a:solidFill>
+              </a:rPr>
+              <a:t>CHOICE</a:t>
+            </a:r>
+          </a:p>
+          <a:p xmlns:a="http://schemas.openxmlformats.org/drawingml/2006/main">
+            <a:pPr algn="l">
+              <a:buNone/>
+              <a:defRPr sz="1350" b="0">
+                <a:solidFill>
+                  <a:srgbClr val="555B57"/>
+                </a:solidFill>
+              </a:defRPr>
+            </a:pPr>
+            <a:r>
+              <a:rPr sz="1350" b="0">
+                <a:solidFill>
+                  <a:srgbClr val="555B57"/>
+                </a:solidFill>
+              </a:rPr>
+              <a:t>Identity and policy run before a staged action. Confirmation is parsed in code; createReturn rechecks every write condition.</a:t>
+            </a:r>
+          </a:p>
+          <a:p xmlns:a="http://schemas.openxmlformats.org/drawingml/2006/main">
+            <a:pPr algn="l">
+              <a:buNone/>
               <a:defRPr sz="1425" b="0">
                 <a:solidFill>
                   <a:srgbClr val="555B57"/>
@@ -4371,379 +3827,43 @@
                   <a:srgbClr val="555B57"/>
                 </a:solidFill>
               </a:rPr>
-              <a:t>Interpret novel phrasing, extract slots, resolve context references, and write FAQ prose from retrieved passages.</a:t>
-            </a:r>
-          </a:p>
-        </p:txBody>
-      </p:sp>
-      <p:sp>
-        <p:nvSpPr>
-          <p:cNvPr id="7" name="tradeoff-2-circle">
-            <a:extLst xmlns:a="http://schemas.openxmlformats.org/drawingml/2006/main">
-              <a:ext uri="{FF2B5EF4-FFF2-40B4-BE49-F238E27FC236}">
-                <a16:creationId xmlns:a16="http://schemas.microsoft.com/office/drawing/2014/main" id="{7F796CC8-1F65-4028-9ABD-9F255E867E50}"/>
-              </a:ext>
-            </a:extLst>
-          </p:cNvPr>
-          <p:cNvSpPr>
-            <a:spLocks xmlns:a="http://schemas.openxmlformats.org/drawingml/2006/main" noGrp="1"/>
-          </p:cNvSpPr>
-          <p:nvPr/>
-        </p:nvSpPr>
-        <p:spPr>
-          <a:xfrm xmlns:a="http://schemas.openxmlformats.org/drawingml/2006/main">
-            <a:off x="4314825" y="3143250"/>
-            <a:ext cx="400050" cy="400050"/>
-          </a:xfrm>
-          <a:prstGeom xmlns:a="http://schemas.openxmlformats.org/drawingml/2006/main" prst="ellipse">
-            <a:avLst/>
-          </a:prstGeom>
-          <a:solidFill xmlns:a="http://schemas.openxmlformats.org/drawingml/2006/main">
-            <a:srgbClr val="D7FA82"/>
-          </a:solidFill>
-          <a:ln xmlns:a="http://schemas.openxmlformats.org/drawingml/2006/main" w="9525">
-            <a:solidFill>
-              <a:srgbClr val="000000"/>
-            </a:solidFill>
-            <a:prstDash val="solid"/>
-          </a:ln>
-        </p:spPr>
-      </p:sp>
-      <p:sp>
-        <p:nvSpPr>
-          <p:cNvPr id="8" name="tradeoff-2-number">
-            <a:extLst xmlns:a="http://schemas.openxmlformats.org/drawingml/2006/main">
-              <a:ext uri="{FF2B5EF4-FFF2-40B4-BE49-F238E27FC236}">
-                <a16:creationId xmlns:a16="http://schemas.microsoft.com/office/drawing/2014/main" id="{5000B126-6D2E-45E5-8492-9F4A0D9E475E}"/>
-              </a:ext>
-            </a:extLst>
-          </p:cNvPr>
-          <p:cNvSpPr>
-            <a:spLocks xmlns:a="http://schemas.openxmlformats.org/drawingml/2006/main" noGrp="1"/>
-          </p:cNvSpPr>
-          <p:nvPr/>
-        </p:nvSpPr>
-        <p:spPr>
-          <a:xfrm xmlns:a="http://schemas.openxmlformats.org/drawingml/2006/main">
-            <a:off x="4314825" y="3190875"/>
-            <a:ext cx="400050" cy="285750"/>
-          </a:xfrm>
-          <a:prstGeom xmlns:a="http://schemas.openxmlformats.org/drawingml/2006/main" prst="rect">
-            <a:avLst/>
-          </a:prstGeom>
-          <a:noFill xmlns:a="http://schemas.openxmlformats.org/drawingml/2006/main"/>
-          <a:ln xmlns:a="http://schemas.openxmlformats.org/drawingml/2006/main" w="0">
-            <a:noFill/>
-            <a:prstDash val="solid"/>
-          </a:ln>
-        </p:spPr>
-        <p:txBody>
-          <a:bodyPr xmlns:a="http://schemas.openxmlformats.org/drawingml/2006/main" anchor="ctr"/>
-          <a:lstStyle xmlns:a="http://schemas.openxmlformats.org/drawingml/2006/main"/>
-          <a:p xmlns:a="http://schemas.openxmlformats.org/drawingml/2006/main">
-            <a:pPr algn="ctr">
-              <a:buNone/>
-              <a:defRPr sz="1350" b="1">
-                <a:solidFill>
-                  <a:srgbClr val="000000"/>
-                </a:solidFill>
-              </a:defRPr>
-            </a:pPr>
-            <a:r>
-              <a:rPr sz="1350" b="1">
-                <a:solidFill>
-                  <a:srgbClr val="000000"/>
-                </a:solidFill>
-              </a:rPr>
-              <a:t>02</a:t>
-            </a:r>
-          </a:p>
-        </p:txBody>
-      </p:sp>
-      <p:sp>
-        <p:nvSpPr>
-          <p:cNvPr id="9" name="tradeoff-title-2">
-            <a:extLst xmlns:a="http://schemas.openxmlformats.org/drawingml/2006/main">
-              <a:ext uri="{FF2B5EF4-FFF2-40B4-BE49-F238E27FC236}">
-                <a16:creationId xmlns:a16="http://schemas.microsoft.com/office/drawing/2014/main" id="{B3601179-B18C-4E88-A052-8F107FA01204}"/>
-              </a:ext>
-            </a:extLst>
-          </p:cNvPr>
-          <p:cNvSpPr>
-            <a:spLocks xmlns:a="http://schemas.openxmlformats.org/drawingml/2006/main" noGrp="1"/>
-          </p:cNvSpPr>
-          <p:nvPr/>
-        </p:nvSpPr>
-        <p:spPr>
-          <a:xfrm xmlns:a="http://schemas.openxmlformats.org/drawingml/2006/main">
-            <a:off x="4314825" y="3914775"/>
-            <a:ext cx="3333750" cy="400050"/>
-          </a:xfrm>
-          <a:prstGeom xmlns:a="http://schemas.openxmlformats.org/drawingml/2006/main" prst="rect">
-            <a:avLst/>
-          </a:prstGeom>
-          <a:noFill xmlns:a="http://schemas.openxmlformats.org/drawingml/2006/main"/>
-          <a:ln xmlns:a="http://schemas.openxmlformats.org/drawingml/2006/main" w="0">
-            <a:noFill/>
-            <a:prstDash val="solid"/>
-          </a:ln>
-        </p:spPr>
-        <p:txBody>
-          <a:bodyPr xmlns:a="http://schemas.openxmlformats.org/drawingml/2006/main" anchor="t"/>
-          <a:lstStyle xmlns:a="http://schemas.openxmlformats.org/drawingml/2006/main"/>
-          <a:p xmlns:a="http://schemas.openxmlformats.org/drawingml/2006/main">
-            <a:pPr algn="l">
-              <a:buNone/>
-              <a:defRPr sz="2025" b="1">
-                <a:solidFill>
-                  <a:srgbClr val="000000"/>
-                </a:solidFill>
-              </a:defRPr>
-            </a:pPr>
-            <a:r>
-              <a:rPr sz="2025" b="1">
-                <a:solidFill>
-                  <a:srgbClr val="000000"/>
-                </a:solidFill>
-              </a:rPr>
-              <a:t>Reusable primitives</a:t>
-            </a:r>
-          </a:p>
-        </p:txBody>
-      </p:sp>
-      <p:sp>
-        <p:nvSpPr>
-          <p:cNvPr id="10" name="tradeoff-body-2">
-            <a:extLst xmlns:a="http://schemas.openxmlformats.org/drawingml/2006/main">
-              <a:ext uri="{FF2B5EF4-FFF2-40B4-BE49-F238E27FC236}">
-                <a16:creationId xmlns:a16="http://schemas.microsoft.com/office/drawing/2014/main" id="{41CFC16B-3190-4FD3-8BC6-E5F20B4E6656}"/>
-              </a:ext>
-            </a:extLst>
-          </p:cNvPr>
-          <p:cNvSpPr>
-            <a:spLocks xmlns:a="http://schemas.openxmlformats.org/drawingml/2006/main" noGrp="1"/>
-          </p:cNvSpPr>
-          <p:nvPr/>
-        </p:nvSpPr>
-        <p:spPr>
-          <a:xfrm xmlns:a="http://schemas.openxmlformats.org/drawingml/2006/main">
-            <a:off x="4314825" y="4457700"/>
-            <a:ext cx="3333750" cy="1381125"/>
-          </a:xfrm>
-          <a:prstGeom xmlns:a="http://schemas.openxmlformats.org/drawingml/2006/main" prst="rect">
-            <a:avLst/>
-          </a:prstGeom>
-          <a:noFill xmlns:a="http://schemas.openxmlformats.org/drawingml/2006/main"/>
-          <a:ln xmlns:a="http://schemas.openxmlformats.org/drawingml/2006/main" w="0">
-            <a:noFill/>
-            <a:prstDash val="solid"/>
-          </a:ln>
-        </p:spPr>
-        <p:txBody>
-          <a:bodyPr xmlns:a="http://schemas.openxmlformats.org/drawingml/2006/main" anchor="t"/>
-          <a:lstStyle xmlns:a="http://schemas.openxmlformats.org/drawingml/2006/main"/>
-          <a:p xmlns:a="http://schemas.openxmlformats.org/drawingml/2006/main">
-            <a:pPr algn="l">
-              <a:buNone/>
-              <a:defRPr sz="1425" b="0">
-                <a:solidFill>
-                  <a:srgbClr val="555B57"/>
-                </a:solidFill>
-              </a:defRPr>
-            </a:pPr>
-            <a:r>
-              <a:rPr sz="1425" b="0">
-                <a:solidFill>
-                  <a:srgbClr val="555B57"/>
-                </a:solidFill>
-              </a:rPr>
-              <a:t>Identity, reads, policy, confirmation, idempotency, and safe failures are shared building blocks—not per-intent templates.</a:t>
-            </a:r>
-          </a:p>
-        </p:txBody>
-      </p:sp>
-      <p:sp>
-        <p:nvSpPr>
-          <p:cNvPr id="11" name="tradeoff-3-circle">
-            <a:extLst xmlns:a="http://schemas.openxmlformats.org/drawingml/2006/main">
-              <a:ext uri="{FF2B5EF4-FFF2-40B4-BE49-F238E27FC236}">
-                <a16:creationId xmlns:a16="http://schemas.microsoft.com/office/drawing/2014/main" id="{727511EB-507D-4C6A-8729-738F41C7A40C}"/>
-              </a:ext>
-            </a:extLst>
-          </p:cNvPr>
-          <p:cNvSpPr>
-            <a:spLocks xmlns:a="http://schemas.openxmlformats.org/drawingml/2006/main" noGrp="1"/>
-          </p:cNvSpPr>
-          <p:nvPr/>
-        </p:nvSpPr>
-        <p:spPr>
-          <a:xfrm xmlns:a="http://schemas.openxmlformats.org/drawingml/2006/main">
-            <a:off x="8229600" y="3143250"/>
-            <a:ext cx="400050" cy="400050"/>
-          </a:xfrm>
-          <a:prstGeom xmlns:a="http://schemas.openxmlformats.org/drawingml/2006/main" prst="ellipse">
-            <a:avLst/>
-          </a:prstGeom>
-          <a:solidFill xmlns:a="http://schemas.openxmlformats.org/drawingml/2006/main">
-            <a:srgbClr val="D7FA82"/>
-          </a:solidFill>
-          <a:ln xmlns:a="http://schemas.openxmlformats.org/drawingml/2006/main" w="9525">
-            <a:solidFill>
-              <a:srgbClr val="000000"/>
-            </a:solidFill>
-            <a:prstDash val="solid"/>
-          </a:ln>
-        </p:spPr>
-      </p:sp>
-      <p:sp>
-        <p:nvSpPr>
-          <p:cNvPr id="12" name="tradeoff-3-number">
-            <a:extLst xmlns:a="http://schemas.openxmlformats.org/drawingml/2006/main">
-              <a:ext uri="{FF2B5EF4-FFF2-40B4-BE49-F238E27FC236}">
-                <a16:creationId xmlns:a16="http://schemas.microsoft.com/office/drawing/2014/main" id="{BEE1D8DF-41DF-4569-A0EA-6A38AB2F5620}"/>
-              </a:ext>
-            </a:extLst>
-          </p:cNvPr>
-          <p:cNvSpPr>
-            <a:spLocks xmlns:a="http://schemas.openxmlformats.org/drawingml/2006/main" noGrp="1"/>
-          </p:cNvSpPr>
-          <p:nvPr/>
-        </p:nvSpPr>
-        <p:spPr>
-          <a:xfrm xmlns:a="http://schemas.openxmlformats.org/drawingml/2006/main">
-            <a:off x="8229600" y="3190875"/>
-            <a:ext cx="400050" cy="285750"/>
-          </a:xfrm>
-          <a:prstGeom xmlns:a="http://schemas.openxmlformats.org/drawingml/2006/main" prst="rect">
-            <a:avLst/>
-          </a:prstGeom>
-          <a:noFill xmlns:a="http://schemas.openxmlformats.org/drawingml/2006/main"/>
-          <a:ln xmlns:a="http://schemas.openxmlformats.org/drawingml/2006/main" w="0">
-            <a:noFill/>
-            <a:prstDash val="solid"/>
-          </a:ln>
-        </p:spPr>
-        <p:txBody>
-          <a:bodyPr xmlns:a="http://schemas.openxmlformats.org/drawingml/2006/main" anchor="ctr"/>
-          <a:lstStyle xmlns:a="http://schemas.openxmlformats.org/drawingml/2006/main"/>
-          <a:p xmlns:a="http://schemas.openxmlformats.org/drawingml/2006/main">
-            <a:pPr algn="ctr">
-              <a:buNone/>
-              <a:defRPr sz="1350" b="1">
-                <a:solidFill>
-                  <a:srgbClr val="000000"/>
-                </a:solidFill>
-              </a:defRPr>
-            </a:pPr>
-            <a:r>
-              <a:rPr sz="1350" b="1">
-                <a:solidFill>
-                  <a:srgbClr val="000000"/>
-                </a:solidFill>
-              </a:rPr>
-              <a:t>03</a:t>
-            </a:r>
-          </a:p>
-        </p:txBody>
-      </p:sp>
-      <p:sp>
-        <p:nvSpPr>
-          <p:cNvPr id="13" name="tradeoff-title-3">
-            <a:extLst xmlns:a="http://schemas.openxmlformats.org/drawingml/2006/main">
-              <a:ext uri="{FF2B5EF4-FFF2-40B4-BE49-F238E27FC236}">
-                <a16:creationId xmlns:a16="http://schemas.microsoft.com/office/drawing/2014/main" id="{B4693120-C9D0-4892-B57D-2AF223AC41C0}"/>
-              </a:ext>
-            </a:extLst>
-          </p:cNvPr>
-          <p:cNvSpPr>
-            <a:spLocks xmlns:a="http://schemas.openxmlformats.org/drawingml/2006/main" noGrp="1"/>
-          </p:cNvSpPr>
-          <p:nvPr/>
-        </p:nvSpPr>
-        <p:spPr>
-          <a:xfrm xmlns:a="http://schemas.openxmlformats.org/drawingml/2006/main">
-            <a:off x="8229600" y="3914775"/>
-            <a:ext cx="3333750" cy="400050"/>
-          </a:xfrm>
-          <a:prstGeom xmlns:a="http://schemas.openxmlformats.org/drawingml/2006/main" prst="rect">
-            <a:avLst/>
-          </a:prstGeom>
-          <a:noFill xmlns:a="http://schemas.openxmlformats.org/drawingml/2006/main"/>
-          <a:ln xmlns:a="http://schemas.openxmlformats.org/drawingml/2006/main" w="0">
-            <a:noFill/>
-            <a:prstDash val="solid"/>
-          </a:ln>
-        </p:spPr>
-        <p:txBody>
-          <a:bodyPr xmlns:a="http://schemas.openxmlformats.org/drawingml/2006/main" anchor="t"/>
-          <a:lstStyle xmlns:a="http://schemas.openxmlformats.org/drawingml/2006/main"/>
-          <a:p xmlns:a="http://schemas.openxmlformats.org/drawingml/2006/main">
-            <a:pPr algn="l">
-              <a:buNone/>
-              <a:defRPr sz="2025" b="1">
-                <a:solidFill>
-                  <a:srgbClr val="000000"/>
-                </a:solidFill>
-              </a:defRPr>
-            </a:pPr>
-            <a:r>
-              <a:rPr sz="2025" b="1">
-                <a:solidFill>
-                  <a:srgbClr val="000000"/>
-                </a:solidFill>
-              </a:rPr>
-              <a:t>Scale to 20+ intents</a:t>
-            </a:r>
-          </a:p>
-        </p:txBody>
-      </p:sp>
-      <p:sp>
-        <p:nvSpPr>
-          <p:cNvPr id="14" name="tradeoff-body-3">
-            <a:extLst xmlns:a="http://schemas.openxmlformats.org/drawingml/2006/main">
-              <a:ext uri="{FF2B5EF4-FFF2-40B4-BE49-F238E27FC236}">
-                <a16:creationId xmlns:a16="http://schemas.microsoft.com/office/drawing/2014/main" id="{53BF6D68-65B3-40E7-8C56-B0A9EB849519}"/>
-              </a:ext>
-            </a:extLst>
-          </p:cNvPr>
-          <p:cNvSpPr>
-            <a:spLocks xmlns:a="http://schemas.openxmlformats.org/drawingml/2006/main" noGrp="1"/>
-          </p:cNvSpPr>
-          <p:nvPr/>
-        </p:nvSpPr>
-        <p:spPr>
-          <a:xfrm xmlns:a="http://schemas.openxmlformats.org/drawingml/2006/main">
-            <a:off x="8229600" y="4457700"/>
-            <a:ext cx="3333750" cy="1381125"/>
-          </a:xfrm>
-          <a:prstGeom xmlns:a="http://schemas.openxmlformats.org/drawingml/2006/main" prst="rect">
-            <a:avLst/>
-          </a:prstGeom>
-          <a:noFill xmlns:a="http://schemas.openxmlformats.org/drawingml/2006/main"/>
-          <a:ln xmlns:a="http://schemas.openxmlformats.org/drawingml/2006/main" w="0">
-            <a:noFill/>
-            <a:prstDash val="solid"/>
-          </a:ln>
-        </p:spPr>
-        <p:txBody>
-          <a:bodyPr xmlns:a="http://schemas.openxmlformats.org/drawingml/2006/main" anchor="t"/>
-          <a:lstStyle xmlns:a="http://schemas.openxmlformats.org/drawingml/2006/main"/>
-          <a:p xmlns:a="http://schemas.openxmlformats.org/drawingml/2006/main">
-            <a:pPr algn="l">
-              <a:buNone/>
-              <a:defRPr sz="1425" b="0">
-                <a:solidFill>
-                  <a:srgbClr val="555B57"/>
-                </a:solidFill>
-              </a:defRPr>
-            </a:pPr>
-            <a:r>
-              <a:rPr sz="1425" b="0">
-                <a:solidFill>
-                  <a:srgbClr val="555B57"/>
-                </a:solidFill>
-              </a:rPr>
-              <a:t>Add a route, retrieved content or a typed workflow, and eval cases. The orchestrator, memory, trace, and gates stay unchanged.</a:t>
+              <a:t/>
+            </a:r>
+          </a:p>
+          <a:p xmlns:a="http://schemas.openxmlformats.org/drawingml/2006/main">
+            <a:pPr algn="l">
+              <a:buNone/>
+              <a:defRPr sz="1350" b="0">
+                <a:solidFill>
+                  <a:srgbClr val="555B57"/>
+                </a:solidFill>
+              </a:defRPr>
+            </a:pPr>
+            <a:r>
+              <a:rPr sz="1350" b="0">
+                <a:solidFill>
+                  <a:srgbClr val="555B57"/>
+                </a:solidFill>
+              </a:rPr>
+              <a:t>TRADEOFF</a:t>
+            </a:r>
+          </a:p>
+          <a:p xmlns:a="http://schemas.openxmlformats.org/drawingml/2006/main">
+            <a:pPr algn="l">
+              <a:buNone/>
+              <a:defRPr sz="1350" b="0">
+                <a:solidFill>
+                  <a:srgbClr val="555B57"/>
+                </a:solidFill>
+              </a:defRPr>
+            </a:pPr>
+            <a:r>
+              <a:rPr sz="1350" b="0">
+                <a:solidFill>
+                  <a:srgbClr val="555B57"/>
+                </a:solidFill>
+              </a:rPr>
+              <a:t>A narrower conversation flow, but a language model cannot authorize a return.</a:t>
             </a:r>
           </a:p>
         </p:txBody>
@@ -4782,16 +3902,16 @@
           <a:p xmlns:a="http://schemas.openxmlformats.org/drawingml/2006/main">
             <a:pPr algn="r">
               <a:buNone/>
-              <a:defRPr sz="975" b="0">
-                <a:solidFill>
-                  <a:srgbClr val="000000"/>
-                </a:solidFill>
-              </a:defRPr>
-            </a:pPr>
-            <a:r>
-              <a:rPr sz="975" b="0">
-                <a:solidFill>
-                  <a:srgbClr val="000000"/>
+              <a:defRPr sz="1350" b="0">
+                <a:solidFill>
+                  <a:srgbClr val="555B57"/>
+                </a:solidFill>
+              </a:defRPr>
+            </a:pPr>
+            <a:r>
+              <a:rPr sz="1350" b="0">
+                <a:solidFill>
+                  <a:srgbClr val="555B57"/>
                 </a:solidFill>
               </a:rPr>
               <a:t>3</a:t>
@@ -4874,7 +3994,7 @@
                   <a:srgbClr val="000000"/>
                 </a:solidFill>
               </a:rPr>
-              <a:t>Failure modes are designed, not hidden.</a:t>
+              <a:t>How Bookly handles ambiguity and failure</a:t>
             </a:r>
           </a:p>
         </p:txBody>
@@ -4925,7 +4045,7 @@
                   <a:srgbClr val="555B57"/>
                 </a:solidFill>
               </a:rPr>
-              <a:t>Every uncertain path has one visible stop condition and one measurable outcome.</a:t>
+              <a:t>The safe behavior is explicit: preserve verified context, invalidate stale actions, and hand off instead of guessing.</a:t>
             </a:r>
           </a:p>
         </p:txBody>
@@ -4946,18 +4066,18 @@
         </p:nvSpPr>
         <p:spPr>
           <a:xfrm xmlns:a="http://schemas.openxmlformats.org/drawingml/2006/main">
-            <a:off x="390525" y="3143250"/>
+            <a:off x="390525" y="2095500"/>
             <a:ext cx="400050" cy="400050"/>
           </a:xfrm>
           <a:prstGeom xmlns:a="http://schemas.openxmlformats.org/drawingml/2006/main" prst="ellipse">
             <a:avLst/>
           </a:prstGeom>
           <a:solidFill xmlns:a="http://schemas.openxmlformats.org/drawingml/2006/main">
-            <a:srgbClr val="D7FA82"/>
+            <a:srgbClr val="FFFFFF"/>
           </a:solidFill>
-          <a:ln xmlns:a="http://schemas.openxmlformats.org/drawingml/2006/main" w="9525">
+          <a:ln xmlns:a="http://schemas.openxmlformats.org/drawingml/2006/main" w="19050">
             <a:solidFill>
-              <a:srgbClr val="000000"/>
+              <a:srgbClr val="1F714B"/>
             </a:solidFill>
             <a:prstDash val="solid"/>
           </a:ln>
@@ -4979,8 +4099,8 @@
         </p:nvSpPr>
         <p:spPr>
           <a:xfrm xmlns:a="http://schemas.openxmlformats.org/drawingml/2006/main">
-            <a:off x="390525" y="3190875"/>
-            <a:ext cx="400050" cy="285750"/>
+            <a:off x="390525" y="2095500"/>
+            <a:ext cx="400050" cy="400050"/>
           </a:xfrm>
           <a:prstGeom xmlns:a="http://schemas.openxmlformats.org/drawingml/2006/main" prst="rect">
             <a:avLst/>
@@ -4999,39 +4119,402 @@
               <a:buNone/>
               <a:defRPr sz="1350" b="1">
                 <a:solidFill>
+                  <a:srgbClr val="1F714B"/>
+                </a:solidFill>
+              </a:defRPr>
+            </a:pPr>
+            <a:r>
+              <a:rPr sz="1350" b="1">
+                <a:solidFill>
+                  <a:srgbClr val="1F714B"/>
+                </a:solidFill>
+              </a:rPr>
+              <a:t>1</a:t>
+            </a:r>
+          </a:p>
+        </p:txBody>
+      </p:sp>
+      <p:sp>
+        <p:nvSpPr>
+          <p:cNvPr id="5" name="tradeoff-title-1">
+            <a:extLst xmlns:a="http://schemas.openxmlformats.org/drawingml/2006/main">
+              <a:ext uri="{FF2B5EF4-FFF2-40B4-BE49-F238E27FC236}">
+                <a16:creationId xmlns:a16="http://schemas.microsoft.com/office/drawing/2014/main" id="{D42905AD-D458-4B95-BFE6-172DBDD2B60E}"/>
+              </a:ext>
+            </a:extLst>
+          </p:cNvPr>
+          <p:cNvSpPr>
+            <a:spLocks xmlns:a="http://schemas.openxmlformats.org/drawingml/2006/main" noGrp="1"/>
+          </p:cNvSpPr>
+          <p:nvPr/>
+        </p:nvSpPr>
+        <p:spPr>
+          <a:xfrm xmlns:a="http://schemas.openxmlformats.org/drawingml/2006/main">
+            <a:off x="390525" y="2647950"/>
+            <a:ext cx="3238500" cy="609600"/>
+          </a:xfrm>
+          <a:prstGeom xmlns:a="http://schemas.openxmlformats.org/drawingml/2006/main" prst="rect">
+            <a:avLst/>
+          </a:prstGeom>
+          <a:noFill xmlns:a="http://schemas.openxmlformats.org/drawingml/2006/main"/>
+          <a:ln xmlns:a="http://schemas.openxmlformats.org/drawingml/2006/main" w="0">
+            <a:noFill/>
+            <a:prstDash val="solid"/>
+          </a:ln>
+        </p:spPr>
+        <p:txBody>
+          <a:bodyPr xmlns:a="http://schemas.openxmlformats.org/drawingml/2006/main" anchor="t"/>
+          <a:lstStyle xmlns:a="http://schemas.openxmlformats.org/drawingml/2006/main"/>
+          <a:p xmlns:a="http://schemas.openxmlformats.org/drawingml/2006/main">
+            <a:pPr algn="l">
+              <a:buNone/>
+              <a:defRPr sz="1875" b="1">
+                <a:solidFill>
                   <a:srgbClr val="000000"/>
                 </a:solidFill>
               </a:defRPr>
             </a:pPr>
             <a:r>
+              <a:rPr sz="1875" b="1">
+                <a:solidFill>
+                  <a:srgbClr val="000000"/>
+                </a:solidFill>
+              </a:rPr>
+              <a:t>Clarify without restarting</a:t>
+            </a:r>
+          </a:p>
+        </p:txBody>
+      </p:sp>
+      <p:sp>
+        <p:nvSpPr>
+          <p:cNvPr id="6" name="tradeoff-body-1">
+            <a:extLst xmlns:a="http://schemas.openxmlformats.org/drawingml/2006/main">
+              <a:ext uri="{FF2B5EF4-FFF2-40B4-BE49-F238E27FC236}">
+                <a16:creationId xmlns:a16="http://schemas.microsoft.com/office/drawing/2014/main" id="{B2320F6C-41D0-4B28-B197-8408F708A742}"/>
+              </a:ext>
+            </a:extLst>
+          </p:cNvPr>
+          <p:cNvSpPr>
+            <a:spLocks xmlns:a="http://schemas.openxmlformats.org/drawingml/2006/main" noGrp="1"/>
+          </p:cNvSpPr>
+          <p:nvPr/>
+        </p:nvSpPr>
+        <p:spPr>
+          <a:xfrm xmlns:a="http://schemas.openxmlformats.org/drawingml/2006/main">
+            <a:off x="390525" y="3352800"/>
+            <a:ext cx="3333750" cy="2667000"/>
+          </a:xfrm>
+          <a:prstGeom xmlns:a="http://schemas.openxmlformats.org/drawingml/2006/main" prst="rect">
+            <a:avLst/>
+          </a:prstGeom>
+          <a:noFill xmlns:a="http://schemas.openxmlformats.org/drawingml/2006/main"/>
+          <a:ln xmlns:a="http://schemas.openxmlformats.org/drawingml/2006/main" w="0">
+            <a:noFill/>
+            <a:prstDash val="solid"/>
+          </a:ln>
+        </p:spPr>
+        <p:txBody>
+          <a:bodyPr xmlns:a="http://schemas.openxmlformats.org/drawingml/2006/main" anchor="t"/>
+          <a:lstStyle xmlns:a="http://schemas.openxmlformats.org/drawingml/2006/main"/>
+          <a:p xmlns:a="http://schemas.openxmlformats.org/drawingml/2006/main">
+            <a:pPr algn="l">
+              <a:buNone/>
+              <a:defRPr sz="1350" b="0">
+                <a:solidFill>
+                  <a:srgbClr val="555B57"/>
+                </a:solidFill>
+              </a:defRPr>
+            </a:pPr>
+            <a:r>
+              <a:rPr sz="1350" b="0">
+                <a:solidFill>
+                  <a:srgbClr val="555B57"/>
+                </a:solidFill>
+              </a:rPr>
+              <a:t>Missing order, email, or reason</a:t>
+            </a:r>
+          </a:p>
+          <a:p xmlns:a="http://schemas.openxmlformats.org/drawingml/2006/main">
+            <a:pPr algn="l">
+              <a:buNone/>
+              <a:defRPr sz="1350" b="0">
+                <a:solidFill>
+                  <a:srgbClr val="555B57"/>
+                </a:solidFill>
+              </a:defRPr>
+            </a:pPr>
+            <a:r>
+              <a:rPr sz="1350" b="0">
+                <a:solidFill>
+                  <a:srgbClr val="555B57"/>
+                </a:solidFill>
+              </a:rPr>
+              <a:t>→ ask for that field only.</a:t>
+            </a:r>
+          </a:p>
+          <a:p xmlns:a="http://schemas.openxmlformats.org/drawingml/2006/main">
+            <a:pPr algn="l">
+              <a:buNone/>
+              <a:defRPr sz="1575" b="0">
+                <a:solidFill>
+                  <a:srgbClr val="555B57"/>
+                </a:solidFill>
+              </a:defRPr>
+            </a:pPr>
+            <a:r>
+              <a:rPr sz="1575" b="0">
+                <a:solidFill>
+                  <a:srgbClr val="555B57"/>
+                </a:solidFill>
+              </a:rPr>
+              <a:t/>
+            </a:r>
+          </a:p>
+          <a:p xmlns:a="http://schemas.openxmlformats.org/drawingml/2006/main">
+            <a:pPr algn="l">
+              <a:buNone/>
+              <a:defRPr sz="1350" b="0">
+                <a:solidFill>
+                  <a:srgbClr val="555B57"/>
+                </a:solidFill>
+              </a:defRPr>
+            </a:pPr>
+            <a:r>
+              <a:rPr sz="1350" b="0">
+                <a:solidFill>
+                  <a:srgbClr val="555B57"/>
+                </a:solidFill>
+              </a:rPr>
+              <a:t>‘Return it’ after a verified lookup</a:t>
+            </a:r>
+          </a:p>
+          <a:p xmlns:a="http://schemas.openxmlformats.org/drawingml/2006/main">
+            <a:pPr algn="l">
+              <a:buNone/>
+              <a:defRPr sz="1350" b="0">
+                <a:solidFill>
+                  <a:srgbClr val="555B57"/>
+                </a:solidFill>
+              </a:defRPr>
+            </a:pPr>
+            <a:r>
+              <a:rPr sz="1350" b="0">
+                <a:solidFill>
+                  <a:srgbClr val="555B57"/>
+                </a:solidFill>
+              </a:rPr>
+              <a:t>→ reuse that order.</a:t>
+            </a:r>
+          </a:p>
+          <a:p xmlns:a="http://schemas.openxmlformats.org/drawingml/2006/main">
+            <a:pPr algn="l">
+              <a:buNone/>
+              <a:defRPr sz="1350" b="0">
+                <a:solidFill>
+                  <a:srgbClr val="555B57"/>
+                </a:solidFill>
+              </a:defRPr>
+            </a:pPr>
+            <a:r>
+              <a:rPr sz="1350" b="0">
+                <a:solidFill>
+                  <a:srgbClr val="555B57"/>
+                </a:solidFill>
+              </a:rPr>
+              <a:t/>
+            </a:r>
+          </a:p>
+          <a:p xmlns:a="http://schemas.openxmlformats.org/drawingml/2006/main">
+            <a:pPr algn="l">
+              <a:buNone/>
+              <a:defRPr sz="1350" b="0">
+                <a:solidFill>
+                  <a:srgbClr val="555B57"/>
+                </a:solidFill>
+              </a:defRPr>
+            </a:pPr>
+            <a:r>
+              <a:rPr sz="1350" b="0">
+                <a:solidFill>
+                  <a:srgbClr val="555B57"/>
+                </a:solidFill>
+              </a:rPr>
+              <a:t>Different order or customer</a:t>
+            </a:r>
+          </a:p>
+          <a:p xmlns:a="http://schemas.openxmlformats.org/drawingml/2006/main">
+            <a:pPr algn="l">
+              <a:buNone/>
+              <a:defRPr sz="1350" b="0">
+                <a:solidFill>
+                  <a:srgbClr val="555B57"/>
+                </a:solidFill>
+              </a:defRPr>
+            </a:pPr>
+            <a:r>
+              <a:rPr sz="1350" b="0">
+                <a:solidFill>
+                  <a:srgbClr val="555B57"/>
+                </a:solidFill>
+              </a:rPr>
+              <a:t>→ start fresh.</a:t>
+            </a:r>
+          </a:p>
+        </p:txBody>
+      </p:sp>
+      <p:sp>
+        <p:nvSpPr>
+          <p:cNvPr id="7" name="tradeoff-2-circle">
+            <a:extLst xmlns:a="http://schemas.openxmlformats.org/drawingml/2006/main">
+              <a:ext uri="{FF2B5EF4-FFF2-40B4-BE49-F238E27FC236}">
+                <a16:creationId xmlns:a16="http://schemas.microsoft.com/office/drawing/2014/main" id="{7F796CC8-1F65-4028-9ABD-9F255E867E50}"/>
+              </a:ext>
+            </a:extLst>
+          </p:cNvPr>
+          <p:cNvSpPr>
+            <a:spLocks xmlns:a="http://schemas.openxmlformats.org/drawingml/2006/main" noGrp="1"/>
+          </p:cNvSpPr>
+          <p:nvPr/>
+        </p:nvSpPr>
+        <p:spPr>
+          <a:xfrm xmlns:a="http://schemas.openxmlformats.org/drawingml/2006/main">
+            <a:off x="4314825" y="2095500"/>
+            <a:ext cx="400050" cy="400050"/>
+          </a:xfrm>
+          <a:prstGeom xmlns:a="http://schemas.openxmlformats.org/drawingml/2006/main" prst="ellipse">
+            <a:avLst/>
+          </a:prstGeom>
+          <a:solidFill xmlns:a="http://schemas.openxmlformats.org/drawingml/2006/main">
+            <a:srgbClr val="FFFFFF"/>
+          </a:solidFill>
+          <a:ln xmlns:a="http://schemas.openxmlformats.org/drawingml/2006/main" w="19050">
+            <a:solidFill>
+              <a:srgbClr val="1F714B"/>
+            </a:solidFill>
+            <a:prstDash val="solid"/>
+          </a:ln>
+        </p:spPr>
+      </p:sp>
+      <p:sp>
+        <p:nvSpPr>
+          <p:cNvPr id="8" name="tradeoff-2-number">
+            <a:extLst xmlns:a="http://schemas.openxmlformats.org/drawingml/2006/main">
+              <a:ext uri="{FF2B5EF4-FFF2-40B4-BE49-F238E27FC236}">
+                <a16:creationId xmlns:a16="http://schemas.microsoft.com/office/drawing/2014/main" id="{5000B126-6D2E-45E5-8492-9F4A0D9E475E}"/>
+              </a:ext>
+            </a:extLst>
+          </p:cNvPr>
+          <p:cNvSpPr>
+            <a:spLocks xmlns:a="http://schemas.openxmlformats.org/drawingml/2006/main" noGrp="1"/>
+          </p:cNvSpPr>
+          <p:nvPr/>
+        </p:nvSpPr>
+        <p:spPr>
+          <a:xfrm xmlns:a="http://schemas.openxmlformats.org/drawingml/2006/main">
+            <a:off x="4314825" y="2095500"/>
+            <a:ext cx="400050" cy="400050"/>
+          </a:xfrm>
+          <a:prstGeom xmlns:a="http://schemas.openxmlformats.org/drawingml/2006/main" prst="rect">
+            <a:avLst/>
+          </a:prstGeom>
+          <a:noFill xmlns:a="http://schemas.openxmlformats.org/drawingml/2006/main"/>
+          <a:ln xmlns:a="http://schemas.openxmlformats.org/drawingml/2006/main" w="0">
+            <a:noFill/>
+            <a:prstDash val="solid"/>
+          </a:ln>
+        </p:spPr>
+        <p:txBody>
+          <a:bodyPr xmlns:a="http://schemas.openxmlformats.org/drawingml/2006/main" anchor="ctr"/>
+          <a:lstStyle xmlns:a="http://schemas.openxmlformats.org/drawingml/2006/main"/>
+          <a:p xmlns:a="http://schemas.openxmlformats.org/drawingml/2006/main">
+            <a:pPr algn="ctr">
+              <a:buNone/>
+              <a:defRPr sz="1350" b="1">
+                <a:solidFill>
+                  <a:srgbClr val="1F714B"/>
+                </a:solidFill>
+              </a:defRPr>
+            </a:pPr>
+            <a:r>
               <a:rPr sz="1350" b="1">
                 <a:solidFill>
+                  <a:srgbClr val="1F714B"/>
+                </a:solidFill>
+              </a:rPr>
+              <a:t>2</a:t>
+            </a:r>
+          </a:p>
+        </p:txBody>
+      </p:sp>
+      <p:sp>
+        <p:nvSpPr>
+          <p:cNvPr id="9" name="tradeoff-title-2">
+            <a:extLst xmlns:a="http://schemas.openxmlformats.org/drawingml/2006/main">
+              <a:ext uri="{FF2B5EF4-FFF2-40B4-BE49-F238E27FC236}">
+                <a16:creationId xmlns:a16="http://schemas.microsoft.com/office/drawing/2014/main" id="{B3601179-B18C-4E88-A052-8F107FA01204}"/>
+              </a:ext>
+            </a:extLst>
+          </p:cNvPr>
+          <p:cNvSpPr>
+            <a:spLocks xmlns:a="http://schemas.openxmlformats.org/drawingml/2006/main" noGrp="1"/>
+          </p:cNvSpPr>
+          <p:nvPr/>
+        </p:nvSpPr>
+        <p:spPr>
+          <a:xfrm xmlns:a="http://schemas.openxmlformats.org/drawingml/2006/main">
+            <a:off x="4314825" y="2647950"/>
+            <a:ext cx="3238500" cy="609600"/>
+          </a:xfrm>
+          <a:prstGeom xmlns:a="http://schemas.openxmlformats.org/drawingml/2006/main" prst="rect">
+            <a:avLst/>
+          </a:prstGeom>
+          <a:noFill xmlns:a="http://schemas.openxmlformats.org/drawingml/2006/main"/>
+          <a:ln xmlns:a="http://schemas.openxmlformats.org/drawingml/2006/main" w="0">
+            <a:noFill/>
+            <a:prstDash val="solid"/>
+          </a:ln>
+        </p:spPr>
+        <p:txBody>
+          <a:bodyPr xmlns:a="http://schemas.openxmlformats.org/drawingml/2006/main" anchor="t"/>
+          <a:lstStyle xmlns:a="http://schemas.openxmlformats.org/drawingml/2006/main"/>
+          <a:p xmlns:a="http://schemas.openxmlformats.org/drawingml/2006/main">
+            <a:pPr algn="l">
+              <a:buNone/>
+              <a:defRPr sz="1875" b="1">
+                <a:solidFill>
                   <a:srgbClr val="000000"/>
                 </a:solidFill>
-              </a:rPr>
-              <a:t>01</a:t>
-            </a:r>
-          </a:p>
-        </p:txBody>
-      </p:sp>
-      <p:sp>
-        <p:nvSpPr>
-          <p:cNvPr id="5" name="tradeoff-title-1">
-            <a:extLst xmlns:a="http://schemas.openxmlformats.org/drawingml/2006/main">
-              <a:ext uri="{FF2B5EF4-FFF2-40B4-BE49-F238E27FC236}">
-                <a16:creationId xmlns:a16="http://schemas.microsoft.com/office/drawing/2014/main" id="{D42905AD-D458-4B95-BFE6-172DBDD2B60E}"/>
-              </a:ext>
-            </a:extLst>
-          </p:cNvPr>
-          <p:cNvSpPr>
-            <a:spLocks xmlns:a="http://schemas.openxmlformats.org/drawingml/2006/main" noGrp="1"/>
-          </p:cNvSpPr>
-          <p:nvPr/>
-        </p:nvSpPr>
-        <p:spPr>
-          <a:xfrm xmlns:a="http://schemas.openxmlformats.org/drawingml/2006/main">
-            <a:off x="390525" y="3914775"/>
-            <a:ext cx="3333750" cy="400050"/>
+              </a:defRPr>
+            </a:pPr>
+            <a:r>
+              <a:rPr sz="1875" b="1">
+                <a:solidFill>
+                  <a:srgbClr val="000000"/>
+                </a:solidFill>
+              </a:rPr>
+              <a:t>Protect staged actions</a:t>
+            </a:r>
+          </a:p>
+        </p:txBody>
+      </p:sp>
+      <p:sp>
+        <p:nvSpPr>
+          <p:cNvPr id="10" name="tradeoff-body-2">
+            <a:extLst xmlns:a="http://schemas.openxmlformats.org/drawingml/2006/main">
+              <a:ext uri="{FF2B5EF4-FFF2-40B4-BE49-F238E27FC236}">
+                <a16:creationId xmlns:a16="http://schemas.microsoft.com/office/drawing/2014/main" id="{41CFC16B-3190-4FD3-8BC6-E5F20B4E6656}"/>
+              </a:ext>
+            </a:extLst>
+          </p:cNvPr>
+          <p:cNvSpPr>
+            <a:spLocks xmlns:a="http://schemas.openxmlformats.org/drawingml/2006/main" noGrp="1"/>
+          </p:cNvSpPr>
+          <p:nvPr/>
+        </p:nvSpPr>
+        <p:spPr>
+          <a:xfrm xmlns:a="http://schemas.openxmlformats.org/drawingml/2006/main">
+            <a:off x="4314825" y="3352800"/>
+            <a:ext cx="3333750" cy="2667000"/>
           </a:xfrm>
           <a:prstGeom xmlns:a="http://schemas.openxmlformats.org/drawingml/2006/main" prst="rect">
             <a:avLst/>
@@ -5048,41 +4531,302 @@
           <a:p xmlns:a="http://schemas.openxmlformats.org/drawingml/2006/main">
             <a:pPr algn="l">
               <a:buNone/>
-              <a:defRPr sz="2025" b="1">
+              <a:defRPr sz="1350" b="0">
+                <a:solidFill>
+                  <a:srgbClr val="555B57"/>
+                </a:solidFill>
+              </a:defRPr>
+            </a:pPr>
+            <a:r>
+              <a:rPr sz="1350" b="0">
+                <a:solidFill>
+                  <a:srgbClr val="555B57"/>
+                </a:solidFill>
+              </a:rPr>
+              <a:t>‘Yes, go ahead’</a:t>
+            </a:r>
+          </a:p>
+          <a:p xmlns:a="http://schemas.openxmlformats.org/drawingml/2006/main">
+            <a:pPr algn="l">
+              <a:buNone/>
+              <a:defRPr sz="1350" b="0">
+                <a:solidFill>
+                  <a:srgbClr val="555B57"/>
+                </a:solidFill>
+              </a:defRPr>
+            </a:pPr>
+            <a:r>
+              <a:rPr sz="1350" b="0">
+                <a:solidFill>
+                  <a:srgbClr val="555B57"/>
+                </a:solidFill>
+              </a:rPr>
+              <a:t>→ complete the pending return.</a:t>
+            </a:r>
+          </a:p>
+          <a:p xmlns:a="http://schemas.openxmlformats.org/drawingml/2006/main">
+            <a:pPr algn="l">
+              <a:buNone/>
+              <a:defRPr sz="1575" b="0">
+                <a:solidFill>
+                  <a:srgbClr val="555B57"/>
+                </a:solidFill>
+              </a:defRPr>
+            </a:pPr>
+            <a:r>
+              <a:rPr sz="1575" b="0">
+                <a:solidFill>
+                  <a:srgbClr val="555B57"/>
+                </a:solidFill>
+              </a:rPr>
+              <a:t/>
+            </a:r>
+          </a:p>
+          <a:p xmlns:a="http://schemas.openxmlformats.org/drawingml/2006/main">
+            <a:pPr algn="l">
+              <a:buNone/>
+              <a:defRPr sz="1350" b="0">
+                <a:solidFill>
+                  <a:srgbClr val="555B57"/>
+                </a:solidFill>
+              </a:defRPr>
+            </a:pPr>
+            <a:r>
+              <a:rPr sz="1350" b="0">
+                <a:solidFill>
+                  <a:srgbClr val="555B57"/>
+                </a:solidFill>
+              </a:rPr>
+              <a:t>Changed email, order, or reason</a:t>
+            </a:r>
+          </a:p>
+          <a:p xmlns:a="http://schemas.openxmlformats.org/drawingml/2006/main">
+            <a:pPr algn="l">
+              <a:buNone/>
+              <a:defRPr sz="1350" b="0">
+                <a:solidFill>
+                  <a:srgbClr val="555B57"/>
+                </a:solidFill>
+              </a:defRPr>
+            </a:pPr>
+            <a:r>
+              <a:rPr sz="1350" b="0">
+                <a:solidFill>
+                  <a:srgbClr val="555B57"/>
+                </a:solidFill>
+              </a:rPr>
+              <a:t>→ invalidate and recheck.</a:t>
+            </a:r>
+          </a:p>
+          <a:p xmlns:a="http://schemas.openxmlformats.org/drawingml/2006/main">
+            <a:pPr algn="l">
+              <a:buNone/>
+              <a:defRPr sz="1350" b="0">
+                <a:solidFill>
+                  <a:srgbClr val="555B57"/>
+                </a:solidFill>
+              </a:defRPr>
+            </a:pPr>
+            <a:r>
+              <a:rPr sz="1350" b="0">
+                <a:solidFill>
+                  <a:srgbClr val="555B57"/>
+                </a:solidFill>
+              </a:rPr>
+              <a:t/>
+            </a:r>
+          </a:p>
+          <a:p xmlns:a="http://schemas.openxmlformats.org/drawingml/2006/main">
+            <a:pPr algn="l">
+              <a:buNone/>
+              <a:defRPr sz="1350" b="0">
+                <a:solidFill>
+                  <a:srgbClr val="555B57"/>
+                </a:solidFill>
+              </a:defRPr>
+            </a:pPr>
+            <a:r>
+              <a:rPr sz="1350" b="0">
+                <a:solidFill>
+                  <a:srgbClr val="555B57"/>
+                </a:solidFill>
+              </a:rPr>
+              <a:t>Duplicate request</a:t>
+            </a:r>
+          </a:p>
+          <a:p xmlns:a="http://schemas.openxmlformats.org/drawingml/2006/main">
+            <a:pPr algn="l">
+              <a:buNone/>
+              <a:defRPr sz="1350" b="0">
+                <a:solidFill>
+                  <a:srgbClr val="555B57"/>
+                </a:solidFill>
+              </a:defRPr>
+            </a:pPr>
+            <a:r>
+              <a:rPr sz="1350" b="0">
+                <a:solidFill>
+                  <a:srgbClr val="555B57"/>
+                </a:solidFill>
+              </a:rPr>
+              <a:t>→ return the existing receipt.</a:t>
+            </a:r>
+          </a:p>
+        </p:txBody>
+      </p:sp>
+      <p:sp>
+        <p:nvSpPr>
+          <p:cNvPr id="11" name="tradeoff-3-circle">
+            <a:extLst xmlns:a="http://schemas.openxmlformats.org/drawingml/2006/main">
+              <a:ext uri="{FF2B5EF4-FFF2-40B4-BE49-F238E27FC236}">
+                <a16:creationId xmlns:a16="http://schemas.microsoft.com/office/drawing/2014/main" id="{727511EB-507D-4C6A-8729-738F41C7A40C}"/>
+              </a:ext>
+            </a:extLst>
+          </p:cNvPr>
+          <p:cNvSpPr>
+            <a:spLocks xmlns:a="http://schemas.openxmlformats.org/drawingml/2006/main" noGrp="1"/>
+          </p:cNvSpPr>
+          <p:nvPr/>
+        </p:nvSpPr>
+        <p:spPr>
+          <a:xfrm xmlns:a="http://schemas.openxmlformats.org/drawingml/2006/main">
+            <a:off x="8229600" y="2095500"/>
+            <a:ext cx="400050" cy="400050"/>
+          </a:xfrm>
+          <a:prstGeom xmlns:a="http://schemas.openxmlformats.org/drawingml/2006/main" prst="ellipse">
+            <a:avLst/>
+          </a:prstGeom>
+          <a:solidFill xmlns:a="http://schemas.openxmlformats.org/drawingml/2006/main">
+            <a:srgbClr val="FFFFFF"/>
+          </a:solidFill>
+          <a:ln xmlns:a="http://schemas.openxmlformats.org/drawingml/2006/main" w="19050">
+            <a:solidFill>
+              <a:srgbClr val="1F714B"/>
+            </a:solidFill>
+            <a:prstDash val="solid"/>
+          </a:ln>
+        </p:spPr>
+      </p:sp>
+      <p:sp>
+        <p:nvSpPr>
+          <p:cNvPr id="12" name="tradeoff-3-number">
+            <a:extLst xmlns:a="http://schemas.openxmlformats.org/drawingml/2006/main">
+              <a:ext uri="{FF2B5EF4-FFF2-40B4-BE49-F238E27FC236}">
+                <a16:creationId xmlns:a16="http://schemas.microsoft.com/office/drawing/2014/main" id="{BEE1D8DF-41DF-4569-A0EA-6A38AB2F5620}"/>
+              </a:ext>
+            </a:extLst>
+          </p:cNvPr>
+          <p:cNvSpPr>
+            <a:spLocks xmlns:a="http://schemas.openxmlformats.org/drawingml/2006/main" noGrp="1"/>
+          </p:cNvSpPr>
+          <p:nvPr/>
+        </p:nvSpPr>
+        <p:spPr>
+          <a:xfrm xmlns:a="http://schemas.openxmlformats.org/drawingml/2006/main">
+            <a:off x="8229600" y="2095500"/>
+            <a:ext cx="400050" cy="400050"/>
+          </a:xfrm>
+          <a:prstGeom xmlns:a="http://schemas.openxmlformats.org/drawingml/2006/main" prst="rect">
+            <a:avLst/>
+          </a:prstGeom>
+          <a:noFill xmlns:a="http://schemas.openxmlformats.org/drawingml/2006/main"/>
+          <a:ln xmlns:a="http://schemas.openxmlformats.org/drawingml/2006/main" w="0">
+            <a:noFill/>
+            <a:prstDash val="solid"/>
+          </a:ln>
+        </p:spPr>
+        <p:txBody>
+          <a:bodyPr xmlns:a="http://schemas.openxmlformats.org/drawingml/2006/main" anchor="ctr"/>
+          <a:lstStyle xmlns:a="http://schemas.openxmlformats.org/drawingml/2006/main"/>
+          <a:p xmlns:a="http://schemas.openxmlformats.org/drawingml/2006/main">
+            <a:pPr algn="ctr">
+              <a:buNone/>
+              <a:defRPr sz="1350" b="1">
+                <a:solidFill>
+                  <a:srgbClr val="1F714B"/>
+                </a:solidFill>
+              </a:defRPr>
+            </a:pPr>
+            <a:r>
+              <a:rPr sz="1350" b="1">
+                <a:solidFill>
+                  <a:srgbClr val="1F714B"/>
+                </a:solidFill>
+              </a:rPr>
+              <a:t>3</a:t>
+            </a:r>
+          </a:p>
+        </p:txBody>
+      </p:sp>
+      <p:sp>
+        <p:nvSpPr>
+          <p:cNvPr id="13" name="tradeoff-title-3">
+            <a:extLst xmlns:a="http://schemas.openxmlformats.org/drawingml/2006/main">
+              <a:ext uri="{FF2B5EF4-FFF2-40B4-BE49-F238E27FC236}">
+                <a16:creationId xmlns:a16="http://schemas.microsoft.com/office/drawing/2014/main" id="{B4693120-C9D0-4892-B57D-2AF223AC41C0}"/>
+              </a:ext>
+            </a:extLst>
+          </p:cNvPr>
+          <p:cNvSpPr>
+            <a:spLocks xmlns:a="http://schemas.openxmlformats.org/drawingml/2006/main" noGrp="1"/>
+          </p:cNvSpPr>
+          <p:nvPr/>
+        </p:nvSpPr>
+        <p:spPr>
+          <a:xfrm xmlns:a="http://schemas.openxmlformats.org/drawingml/2006/main">
+            <a:off x="8229600" y="2647950"/>
+            <a:ext cx="3238500" cy="609600"/>
+          </a:xfrm>
+          <a:prstGeom xmlns:a="http://schemas.openxmlformats.org/drawingml/2006/main" prst="rect">
+            <a:avLst/>
+          </a:prstGeom>
+          <a:noFill xmlns:a="http://schemas.openxmlformats.org/drawingml/2006/main"/>
+          <a:ln xmlns:a="http://schemas.openxmlformats.org/drawingml/2006/main" w="0">
+            <a:noFill/>
+            <a:prstDash val="solid"/>
+          </a:ln>
+        </p:spPr>
+        <p:txBody>
+          <a:bodyPr xmlns:a="http://schemas.openxmlformats.org/drawingml/2006/main" anchor="t"/>
+          <a:lstStyle xmlns:a="http://schemas.openxmlformats.org/drawingml/2006/main"/>
+          <a:p xmlns:a="http://schemas.openxmlformats.org/drawingml/2006/main">
+            <a:pPr algn="l">
+              <a:buNone/>
+              <a:defRPr sz="1875" b="1">
                 <a:solidFill>
                   <a:srgbClr val="000000"/>
                 </a:solidFill>
               </a:defRPr>
             </a:pPr>
             <a:r>
-              <a:rPr sz="2025" b="1">
+              <a:rPr sz="1875" b="1">
                 <a:solidFill>
                   <a:srgbClr val="000000"/>
                 </a:solidFill>
               </a:rPr>
-              <a:t>Model + retrieval</a:t>
-            </a:r>
-          </a:p>
-        </p:txBody>
-      </p:sp>
-      <p:sp>
-        <p:nvSpPr>
-          <p:cNvPr id="6" name="tradeoff-body-1">
-            <a:extLst xmlns:a="http://schemas.openxmlformats.org/drawingml/2006/main">
-              <a:ext uri="{FF2B5EF4-FFF2-40B4-BE49-F238E27FC236}">
-                <a16:creationId xmlns:a16="http://schemas.microsoft.com/office/drawing/2014/main" id="{B2320F6C-41D0-4B28-B197-8408F708A742}"/>
-              </a:ext>
-            </a:extLst>
-          </p:cNvPr>
-          <p:cNvSpPr>
-            <a:spLocks xmlns:a="http://schemas.openxmlformats.org/drawingml/2006/main" noGrp="1"/>
-          </p:cNvSpPr>
-          <p:nvPr/>
-        </p:nvSpPr>
-        <p:spPr>
-          <a:xfrm xmlns:a="http://schemas.openxmlformats.org/drawingml/2006/main">
-            <a:off x="390525" y="4457700"/>
-            <a:ext cx="3333750" cy="1381125"/>
+              <a:t>Handoff instead of guessing</a:t>
+            </a:r>
+          </a:p>
+        </p:txBody>
+      </p:sp>
+      <p:sp>
+        <p:nvSpPr>
+          <p:cNvPr id="14" name="tradeoff-body-3">
+            <a:extLst xmlns:a="http://schemas.openxmlformats.org/drawingml/2006/main">
+              <a:ext uri="{FF2B5EF4-FFF2-40B4-BE49-F238E27FC236}">
+                <a16:creationId xmlns:a16="http://schemas.microsoft.com/office/drawing/2014/main" id="{53BF6D68-65B3-40E7-8C56-B0A9EB849519}"/>
+              </a:ext>
+            </a:extLst>
+          </p:cNvPr>
+          <p:cNvSpPr>
+            <a:spLocks xmlns:a="http://schemas.openxmlformats.org/drawingml/2006/main" noGrp="1"/>
+          </p:cNvSpPr>
+          <p:nvPr/>
+        </p:nvSpPr>
+        <p:spPr>
+          <a:xfrm xmlns:a="http://schemas.openxmlformats.org/drawingml/2006/main">
+            <a:off x="8229600" y="3352800"/>
+            <a:ext cx="3333750" cy="2667000"/>
           </a:xfrm>
           <a:prstGeom xmlns:a="http://schemas.openxmlformats.org/drawingml/2006/main" prst="rect">
             <a:avLst/>
@@ -5111,7 +4855,7 @@
                   <a:srgbClr val="555B57"/>
                 </a:solidFill>
               </a:rPr>
-              <a:t>Provider unavailable → retry or handoff.</a:t>
+              <a:t>Unsupported FAQ or label/refund issue</a:t>
             </a:r>
           </a:p>
           <a:p xmlns:a="http://schemas.openxmlformats.org/drawingml/2006/main">
@@ -5129,7 +4873,7 @@
                   <a:srgbClr val="555B57"/>
                 </a:solidFill>
               </a:rPr>
-              <a:t>No passage or invalid citation → block the answer.</a:t>
+              <a:t>→ specialist handoff.</a:t>
             </a:r>
           </a:p>
           <a:p xmlns:a="http://schemas.openxmlformats.org/drawingml/2006/main">
@@ -5165,177 +4909,9 @@
                   <a:srgbClr val="555B57"/>
                 </a:solidFill>
               </a:rPr>
-              <a:t>Measure: grounded-answer rate + safe-handoff rate.</a:t>
-            </a:r>
-          </a:p>
-        </p:txBody>
-      </p:sp>
-      <p:sp>
-        <p:nvSpPr>
-          <p:cNvPr id="7" name="tradeoff-2-circle">
-            <a:extLst xmlns:a="http://schemas.openxmlformats.org/drawingml/2006/main">
-              <a:ext uri="{FF2B5EF4-FFF2-40B4-BE49-F238E27FC236}">
-                <a16:creationId xmlns:a16="http://schemas.microsoft.com/office/drawing/2014/main" id="{7F796CC8-1F65-4028-9ABD-9F255E867E50}"/>
-              </a:ext>
-            </a:extLst>
-          </p:cNvPr>
-          <p:cNvSpPr>
-            <a:spLocks xmlns:a="http://schemas.openxmlformats.org/drawingml/2006/main" noGrp="1"/>
-          </p:cNvSpPr>
-          <p:nvPr/>
-        </p:nvSpPr>
-        <p:spPr>
-          <a:xfrm xmlns:a="http://schemas.openxmlformats.org/drawingml/2006/main">
-            <a:off x="4314825" y="3143250"/>
-            <a:ext cx="400050" cy="400050"/>
-          </a:xfrm>
-          <a:prstGeom xmlns:a="http://schemas.openxmlformats.org/drawingml/2006/main" prst="ellipse">
-            <a:avLst/>
-          </a:prstGeom>
-          <a:solidFill xmlns:a="http://schemas.openxmlformats.org/drawingml/2006/main">
-            <a:srgbClr val="D7FA82"/>
-          </a:solidFill>
-          <a:ln xmlns:a="http://schemas.openxmlformats.org/drawingml/2006/main" w="9525">
-            <a:solidFill>
-              <a:srgbClr val="000000"/>
-            </a:solidFill>
-            <a:prstDash val="solid"/>
-          </a:ln>
-        </p:spPr>
-      </p:sp>
-      <p:sp>
-        <p:nvSpPr>
-          <p:cNvPr id="8" name="tradeoff-2-number">
-            <a:extLst xmlns:a="http://schemas.openxmlformats.org/drawingml/2006/main">
-              <a:ext uri="{FF2B5EF4-FFF2-40B4-BE49-F238E27FC236}">
-                <a16:creationId xmlns:a16="http://schemas.microsoft.com/office/drawing/2014/main" id="{5000B126-6D2E-45E5-8492-9F4A0D9E475E}"/>
-              </a:ext>
-            </a:extLst>
-          </p:cNvPr>
-          <p:cNvSpPr>
-            <a:spLocks xmlns:a="http://schemas.openxmlformats.org/drawingml/2006/main" noGrp="1"/>
-          </p:cNvSpPr>
-          <p:nvPr/>
-        </p:nvSpPr>
-        <p:spPr>
-          <a:xfrm xmlns:a="http://schemas.openxmlformats.org/drawingml/2006/main">
-            <a:off x="4314825" y="3190875"/>
-            <a:ext cx="400050" cy="285750"/>
-          </a:xfrm>
-          <a:prstGeom xmlns:a="http://schemas.openxmlformats.org/drawingml/2006/main" prst="rect">
-            <a:avLst/>
-          </a:prstGeom>
-          <a:noFill xmlns:a="http://schemas.openxmlformats.org/drawingml/2006/main"/>
-          <a:ln xmlns:a="http://schemas.openxmlformats.org/drawingml/2006/main" w="0">
-            <a:noFill/>
-            <a:prstDash val="solid"/>
-          </a:ln>
-        </p:spPr>
-        <p:txBody>
-          <a:bodyPr xmlns:a="http://schemas.openxmlformats.org/drawingml/2006/main" anchor="ctr"/>
-          <a:lstStyle xmlns:a="http://schemas.openxmlformats.org/drawingml/2006/main"/>
-          <a:p xmlns:a="http://schemas.openxmlformats.org/drawingml/2006/main">
-            <a:pPr algn="ctr">
-              <a:buNone/>
-              <a:defRPr sz="1350" b="1">
-                <a:solidFill>
-                  <a:srgbClr val="000000"/>
-                </a:solidFill>
-              </a:defRPr>
-            </a:pPr>
-            <a:r>
-              <a:rPr sz="1350" b="1">
-                <a:solidFill>
-                  <a:srgbClr val="000000"/>
-                </a:solidFill>
-              </a:rPr>
-              <a:t>02</a:t>
-            </a:r>
-          </a:p>
-        </p:txBody>
-      </p:sp>
-      <p:sp>
-        <p:nvSpPr>
-          <p:cNvPr id="9" name="tradeoff-title-2">
-            <a:extLst xmlns:a="http://schemas.openxmlformats.org/drawingml/2006/main">
-              <a:ext uri="{FF2B5EF4-FFF2-40B4-BE49-F238E27FC236}">
-                <a16:creationId xmlns:a16="http://schemas.microsoft.com/office/drawing/2014/main" id="{B3601179-B18C-4E88-A052-8F107FA01204}"/>
-              </a:ext>
-            </a:extLst>
-          </p:cNvPr>
-          <p:cNvSpPr>
-            <a:spLocks xmlns:a="http://schemas.openxmlformats.org/drawingml/2006/main" noGrp="1"/>
-          </p:cNvSpPr>
-          <p:nvPr/>
-        </p:nvSpPr>
-        <p:spPr>
-          <a:xfrm xmlns:a="http://schemas.openxmlformats.org/drawingml/2006/main">
-            <a:off x="4314825" y="3914775"/>
-            <a:ext cx="3333750" cy="400050"/>
-          </a:xfrm>
-          <a:prstGeom xmlns:a="http://schemas.openxmlformats.org/drawingml/2006/main" prst="rect">
-            <a:avLst/>
-          </a:prstGeom>
-          <a:noFill xmlns:a="http://schemas.openxmlformats.org/drawingml/2006/main"/>
-          <a:ln xmlns:a="http://schemas.openxmlformats.org/drawingml/2006/main" w="0">
-            <a:noFill/>
-            <a:prstDash val="solid"/>
-          </a:ln>
-        </p:spPr>
-        <p:txBody>
-          <a:bodyPr xmlns:a="http://schemas.openxmlformats.org/drawingml/2006/main" anchor="t"/>
-          <a:lstStyle xmlns:a="http://schemas.openxmlformats.org/drawingml/2006/main"/>
-          <a:p xmlns:a="http://schemas.openxmlformats.org/drawingml/2006/main">
-            <a:pPr algn="l">
-              <a:buNone/>
-              <a:defRPr sz="2025" b="1">
-                <a:solidFill>
-                  <a:srgbClr val="000000"/>
-                </a:solidFill>
-              </a:defRPr>
-            </a:pPr>
-            <a:r>
-              <a:rPr sz="2025" b="1">
-                <a:solidFill>
-                  <a:srgbClr val="000000"/>
-                </a:solidFill>
-              </a:rPr>
-              <a:t>Identity + tools</a:t>
-            </a:r>
-          </a:p>
-        </p:txBody>
-      </p:sp>
-      <p:sp>
-        <p:nvSpPr>
-          <p:cNvPr id="10" name="tradeoff-body-2">
-            <a:extLst xmlns:a="http://schemas.openxmlformats.org/drawingml/2006/main">
-              <a:ext uri="{FF2B5EF4-FFF2-40B4-BE49-F238E27FC236}">
-                <a16:creationId xmlns:a16="http://schemas.microsoft.com/office/drawing/2014/main" id="{41CFC16B-3190-4FD3-8BC6-E5F20B4E6656}"/>
-              </a:ext>
-            </a:extLst>
-          </p:cNvPr>
-          <p:cNvSpPr>
-            <a:spLocks xmlns:a="http://schemas.openxmlformats.org/drawingml/2006/main" noGrp="1"/>
-          </p:cNvSpPr>
-          <p:nvPr/>
-        </p:nvSpPr>
-        <p:spPr>
-          <a:xfrm xmlns:a="http://schemas.openxmlformats.org/drawingml/2006/main">
-            <a:off x="4314825" y="4457700"/>
-            <a:ext cx="3333750" cy="1381125"/>
-          </a:xfrm>
-          <a:prstGeom xmlns:a="http://schemas.openxmlformats.org/drawingml/2006/main" prst="rect">
-            <a:avLst/>
-          </a:prstGeom>
-          <a:noFill xmlns:a="http://schemas.openxmlformats.org/drawingml/2006/main"/>
-          <a:ln xmlns:a="http://schemas.openxmlformats.org/drawingml/2006/main" w="0">
-            <a:noFill/>
-            <a:prstDash val="solid"/>
-          </a:ln>
-        </p:spPr>
-        <p:txBody>
-          <a:bodyPr xmlns:a="http://schemas.openxmlformats.org/drawingml/2006/main" anchor="t"/>
-          <a:lstStyle xmlns:a="http://schemas.openxmlformats.org/drawingml/2006/main"/>
+              <a:t>Provider or tool failure</a:t>
+            </a:r>
+          </a:p>
           <a:p xmlns:a="http://schemas.openxmlformats.org/drawingml/2006/main">
             <a:pPr algn="l">
               <a:buNone/>
@@ -5351,7 +4927,7 @@
                   <a:srgbClr val="555B57"/>
                 </a:solidFill>
               </a:rPr>
-              <a:t>Unknown order and wrong email share one response.</a:t>
+              <a:t>→ safe customer message.</a:t>
             </a:r>
           </a:p>
           <a:p xmlns:a="http://schemas.openxmlformats.org/drawingml/2006/main">
@@ -5369,24 +4945,6 @@
                   <a:srgbClr val="555B57"/>
                 </a:solidFill>
               </a:rPr>
-              <a:t>Tool failure makes no promise.</a:t>
-            </a:r>
-          </a:p>
-          <a:p xmlns:a="http://schemas.openxmlformats.org/drawingml/2006/main">
-            <a:pPr algn="l">
-              <a:buNone/>
-              <a:defRPr sz="1575" b="0">
-                <a:solidFill>
-                  <a:srgbClr val="555B57"/>
-                </a:solidFill>
-              </a:defRPr>
-            </a:pPr>
-            <a:r>
-              <a:rPr sz="1575" b="0">
-                <a:solidFill>
-                  <a:srgbClr val="555B57"/>
-                </a:solidFill>
-              </a:rPr>
               <a:t/>
             </a:r>
           </a:p>
@@ -5405,177 +4963,9 @@
                   <a:srgbClr val="555B57"/>
                 </a:solidFill>
               </a:rPr>
-              <a:t>Measure: tool success + categorized failure + retry rate.</a:t>
-            </a:r>
-          </a:p>
-        </p:txBody>
-      </p:sp>
-      <p:sp>
-        <p:nvSpPr>
-          <p:cNvPr id="11" name="tradeoff-3-circle">
-            <a:extLst xmlns:a="http://schemas.openxmlformats.org/drawingml/2006/main">
-              <a:ext uri="{FF2B5EF4-FFF2-40B4-BE49-F238E27FC236}">
-                <a16:creationId xmlns:a16="http://schemas.microsoft.com/office/drawing/2014/main" id="{727511EB-507D-4C6A-8729-738F41C7A40C}"/>
-              </a:ext>
-            </a:extLst>
-          </p:cNvPr>
-          <p:cNvSpPr>
-            <a:spLocks xmlns:a="http://schemas.openxmlformats.org/drawingml/2006/main" noGrp="1"/>
-          </p:cNvSpPr>
-          <p:nvPr/>
-        </p:nvSpPr>
-        <p:spPr>
-          <a:xfrm xmlns:a="http://schemas.openxmlformats.org/drawingml/2006/main">
-            <a:off x="8229600" y="3143250"/>
-            <a:ext cx="400050" cy="400050"/>
-          </a:xfrm>
-          <a:prstGeom xmlns:a="http://schemas.openxmlformats.org/drawingml/2006/main" prst="ellipse">
-            <a:avLst/>
-          </a:prstGeom>
-          <a:solidFill xmlns:a="http://schemas.openxmlformats.org/drawingml/2006/main">
-            <a:srgbClr val="D7FA82"/>
-          </a:solidFill>
-          <a:ln xmlns:a="http://schemas.openxmlformats.org/drawingml/2006/main" w="9525">
-            <a:solidFill>
-              <a:srgbClr val="000000"/>
-            </a:solidFill>
-            <a:prstDash val="solid"/>
-          </a:ln>
-        </p:spPr>
-      </p:sp>
-      <p:sp>
-        <p:nvSpPr>
-          <p:cNvPr id="12" name="tradeoff-3-number">
-            <a:extLst xmlns:a="http://schemas.openxmlformats.org/drawingml/2006/main">
-              <a:ext uri="{FF2B5EF4-FFF2-40B4-BE49-F238E27FC236}">
-                <a16:creationId xmlns:a16="http://schemas.microsoft.com/office/drawing/2014/main" id="{BEE1D8DF-41DF-4569-A0EA-6A38AB2F5620}"/>
-              </a:ext>
-            </a:extLst>
-          </p:cNvPr>
-          <p:cNvSpPr>
-            <a:spLocks xmlns:a="http://schemas.openxmlformats.org/drawingml/2006/main" noGrp="1"/>
-          </p:cNvSpPr>
-          <p:nvPr/>
-        </p:nvSpPr>
-        <p:spPr>
-          <a:xfrm xmlns:a="http://schemas.openxmlformats.org/drawingml/2006/main">
-            <a:off x="8229600" y="3190875"/>
-            <a:ext cx="400050" cy="285750"/>
-          </a:xfrm>
-          <a:prstGeom xmlns:a="http://schemas.openxmlformats.org/drawingml/2006/main" prst="rect">
-            <a:avLst/>
-          </a:prstGeom>
-          <a:noFill xmlns:a="http://schemas.openxmlformats.org/drawingml/2006/main"/>
-          <a:ln xmlns:a="http://schemas.openxmlformats.org/drawingml/2006/main" w="0">
-            <a:noFill/>
-            <a:prstDash val="solid"/>
-          </a:ln>
-        </p:spPr>
-        <p:txBody>
-          <a:bodyPr xmlns:a="http://schemas.openxmlformats.org/drawingml/2006/main" anchor="ctr"/>
-          <a:lstStyle xmlns:a="http://schemas.openxmlformats.org/drawingml/2006/main"/>
-          <a:p xmlns:a="http://schemas.openxmlformats.org/drawingml/2006/main">
-            <a:pPr algn="ctr">
-              <a:buNone/>
-              <a:defRPr sz="1350" b="1">
-                <a:solidFill>
-                  <a:srgbClr val="000000"/>
-                </a:solidFill>
-              </a:defRPr>
-            </a:pPr>
-            <a:r>
-              <a:rPr sz="1350" b="1">
-                <a:solidFill>
-                  <a:srgbClr val="000000"/>
-                </a:solidFill>
-              </a:rPr>
-              <a:t>03</a:t>
-            </a:r>
-          </a:p>
-        </p:txBody>
-      </p:sp>
-      <p:sp>
-        <p:nvSpPr>
-          <p:cNvPr id="13" name="tradeoff-title-3">
-            <a:extLst xmlns:a="http://schemas.openxmlformats.org/drawingml/2006/main">
-              <a:ext uri="{FF2B5EF4-FFF2-40B4-BE49-F238E27FC236}">
-                <a16:creationId xmlns:a16="http://schemas.microsoft.com/office/drawing/2014/main" id="{B4693120-C9D0-4892-B57D-2AF223AC41C0}"/>
-              </a:ext>
-            </a:extLst>
-          </p:cNvPr>
-          <p:cNvSpPr>
-            <a:spLocks xmlns:a="http://schemas.openxmlformats.org/drawingml/2006/main" noGrp="1"/>
-          </p:cNvSpPr>
-          <p:nvPr/>
-        </p:nvSpPr>
-        <p:spPr>
-          <a:xfrm xmlns:a="http://schemas.openxmlformats.org/drawingml/2006/main">
-            <a:off x="8229600" y="3914775"/>
-            <a:ext cx="3333750" cy="400050"/>
-          </a:xfrm>
-          <a:prstGeom xmlns:a="http://schemas.openxmlformats.org/drawingml/2006/main" prst="rect">
-            <a:avLst/>
-          </a:prstGeom>
-          <a:noFill xmlns:a="http://schemas.openxmlformats.org/drawingml/2006/main"/>
-          <a:ln xmlns:a="http://schemas.openxmlformats.org/drawingml/2006/main" w="0">
-            <a:noFill/>
-            <a:prstDash val="solid"/>
-          </a:ln>
-        </p:spPr>
-        <p:txBody>
-          <a:bodyPr xmlns:a="http://schemas.openxmlformats.org/drawingml/2006/main" anchor="t"/>
-          <a:lstStyle xmlns:a="http://schemas.openxmlformats.org/drawingml/2006/main"/>
-          <a:p xmlns:a="http://schemas.openxmlformats.org/drawingml/2006/main">
-            <a:pPr algn="l">
-              <a:buNone/>
-              <a:defRPr sz="2025" b="1">
-                <a:solidFill>
-                  <a:srgbClr val="000000"/>
-                </a:solidFill>
-              </a:defRPr>
-            </a:pPr>
-            <a:r>
-              <a:rPr sz="2025" b="1">
-                <a:solidFill>
-                  <a:srgbClr val="000000"/>
-                </a:solidFill>
-              </a:rPr>
-              <a:t>Writes + stale state</a:t>
-            </a:r>
-          </a:p>
-        </p:txBody>
-      </p:sp>
-      <p:sp>
-        <p:nvSpPr>
-          <p:cNvPr id="14" name="tradeoff-body-3">
-            <a:extLst xmlns:a="http://schemas.openxmlformats.org/drawingml/2006/main">
-              <a:ext uri="{FF2B5EF4-FFF2-40B4-BE49-F238E27FC236}">
-                <a16:creationId xmlns:a16="http://schemas.microsoft.com/office/drawing/2014/main" id="{53BF6D68-65B3-40E7-8C56-B0A9EB849519}"/>
-              </a:ext>
-            </a:extLst>
-          </p:cNvPr>
-          <p:cNvSpPr>
-            <a:spLocks xmlns:a="http://schemas.openxmlformats.org/drawingml/2006/main" noGrp="1"/>
-          </p:cNvSpPr>
-          <p:nvPr/>
-        </p:nvSpPr>
-        <p:spPr>
-          <a:xfrm xmlns:a="http://schemas.openxmlformats.org/drawingml/2006/main">
-            <a:off x="8229600" y="4457700"/>
-            <a:ext cx="3333750" cy="1381125"/>
-          </a:xfrm>
-          <a:prstGeom xmlns:a="http://schemas.openxmlformats.org/drawingml/2006/main" prst="rect">
-            <a:avLst/>
-          </a:prstGeom>
-          <a:noFill xmlns:a="http://schemas.openxmlformats.org/drawingml/2006/main"/>
-          <a:ln xmlns:a="http://schemas.openxmlformats.org/drawingml/2006/main" w="0">
-            <a:noFill/>
-            <a:prstDash val="solid"/>
-          </a:ln>
-        </p:spPr>
-        <p:txBody>
-          <a:bodyPr xmlns:a="http://schemas.openxmlformats.org/drawingml/2006/main" anchor="t"/>
-          <a:lstStyle xmlns:a="http://schemas.openxmlformats.org/drawingml/2006/main"/>
+              <a:t>Trace</a:t>
+            </a:r>
+          </a:p>
           <a:p xmlns:a="http://schemas.openxmlformats.org/drawingml/2006/main">
             <a:pPr algn="l">
               <a:buNone/>
@@ -5591,61 +4981,7 @@
                   <a:srgbClr val="555B57"/>
                 </a:solidFill>
               </a:rPr>
-              <a:t>Changed details invalidate confirmation.</a:t>
-            </a:r>
-          </a:p>
-          <a:p xmlns:a="http://schemas.openxmlformats.org/drawingml/2006/main">
-            <a:pPr algn="l">
-              <a:buNone/>
-              <a:defRPr sz="1350" b="0">
-                <a:solidFill>
-                  <a:srgbClr val="555B57"/>
-                </a:solidFill>
-              </a:defRPr>
-            </a:pPr>
-            <a:r>
-              <a:rPr sz="1350" b="0">
-                <a:solidFill>
-                  <a:srgbClr val="555B57"/>
-                </a:solidFill>
-              </a:rPr>
-              <a:t>Duplicates hit the idempotency guard.</a:t>
-            </a:r>
-          </a:p>
-          <a:p xmlns:a="http://schemas.openxmlformats.org/drawingml/2006/main">
-            <a:pPr algn="l">
-              <a:buNone/>
-              <a:defRPr sz="1575" b="0">
-                <a:solidFill>
-                  <a:srgbClr val="555B57"/>
-                </a:solidFill>
-              </a:defRPr>
-            </a:pPr>
-            <a:r>
-              <a:rPr sz="1575" b="0">
-                <a:solidFill>
-                  <a:srgbClr val="555B57"/>
-                </a:solidFill>
-              </a:rPr>
-              <a:t/>
-            </a:r>
-          </a:p>
-          <a:p xmlns:a="http://schemas.openxmlformats.org/drawingml/2006/main">
-            <a:pPr algn="l">
-              <a:buNone/>
-              <a:defRPr sz="1350" b="0">
-                <a:solidFill>
-                  <a:srgbClr val="555B57"/>
-                </a:solidFill>
-              </a:defRPr>
-            </a:pPr>
-            <a:r>
-              <a:rPr sz="1350" b="0">
-                <a:solidFill>
-                  <a:srgbClr val="555B57"/>
-                </a:solidFill>
-              </a:rPr>
-              <a:t>Measure: unsafe-action rate + task success + p95 latency.</a:t>
+              <a:t>→ routing, memory, tools, and guardrails; never private reasoning.</a:t>
             </a:r>
           </a:p>
         </p:txBody>
@@ -5684,16 +5020,16 @@
           <a:p xmlns:a="http://schemas.openxmlformats.org/drawingml/2006/main">
             <a:pPr algn="r">
               <a:buNone/>
-              <a:defRPr sz="975" b="0">
-                <a:solidFill>
-                  <a:srgbClr val="000000"/>
-                </a:solidFill>
-              </a:defRPr>
-            </a:pPr>
-            <a:r>
-              <a:rPr sz="975" b="0">
-                <a:solidFill>
-                  <a:srgbClr val="000000"/>
+              <a:defRPr sz="1350" b="0">
+                <a:solidFill>
+                  <a:srgbClr val="555B57"/>
+                </a:solidFill>
+              </a:defRPr>
+            </a:pPr>
+            <a:r>
+              <a:rPr sz="1350" b="0">
+                <a:solidFill>
+                  <a:srgbClr val="555B57"/>
                 </a:solidFill>
               </a:rPr>
               <a:t>4</a:t>
@@ -5776,7 +5112,7 @@
                   <a:srgbClr val="000000"/>
                 </a:solidFill>
               </a:rPr>
-              <a:t>Proof now. Harden the command boundary next.</a:t>
+              <a:t>What I would change first for production</a:t>
             </a:r>
           </a:p>
         </p:txBody>
@@ -5827,7 +5163,7 @@
                   <a:srgbClr val="1F714B"/>
                 </a:solidFill>
               </a:rPr>
-              <a:t>FIRST PRODUCTION MOVE</a:t>
+              <a:t>FIRST PRIORITY</a:t>
             </a:r>
           </a:p>
         </p:txBody>
@@ -5848,8 +5184,8 @@
         </p:nvSpPr>
         <p:spPr>
           <a:xfrm xmlns:a="http://schemas.openxmlformats.org/drawingml/2006/main">
-            <a:off x="390525" y="1609725"/>
-            <a:ext cx="10287000" cy="790575"/>
+            <a:off x="390525" y="1571625"/>
+            <a:ext cx="11401425" cy="895350"/>
           </a:xfrm>
           <a:prstGeom xmlns:a="http://schemas.openxmlformats.org/drawingml/2006/main" prst="rect">
             <a:avLst/>
@@ -5866,19 +5202,19 @@
           <a:p xmlns:a="http://schemas.openxmlformats.org/drawingml/2006/main">
             <a:pPr algn="l">
               <a:buNone/>
-              <a:defRPr sz="1950" b="0">
+              <a:defRPr sz="1725" b="0">
                 <a:solidFill>
                   <a:srgbClr val="000000"/>
                 </a:solidFill>
               </a:defRPr>
             </a:pPr>
             <a:r>
-              <a:rPr sz="1950" b="0">
+              <a:rPr sz="1725" b="0">
                 <a:solidFill>
                   <a:srgbClr val="000000"/>
                 </a:solidFill>
               </a:rPr>
-              <a:t>Authenticated identity + durable workflow state + audited, idempotent writes—before adding actions.</a:t>
+              <a:t>Replace typed email matching and in-memory state with authenticated identity, durable workflow state, and audited idempotent writes. Only then connect real systems or add actions.</a:t>
             </a:r>
           </a:p>
         </p:txBody>
@@ -5939,7 +5275,7 @@
             <a:avLst/>
           </a:prstGeom>
           <a:solidFill xmlns:a="http://schemas.openxmlformats.org/drawingml/2006/main">
-            <a:srgbClr val="D7FA82"/>
+            <a:srgbClr val="1F714B"/>
           </a:solidFill>
           <a:ln xmlns:a="http://schemas.openxmlformats.org/drawingml/2006/main" w="0">
             <a:noFill/>
@@ -5963,8 +5299,8 @@
         </p:nvSpPr>
         <p:spPr>
           <a:xfrm xmlns:a="http://schemas.openxmlformats.org/drawingml/2006/main">
-            <a:off x="676275" y="3390900"/>
-            <a:ext cx="3000375" cy="952500"/>
+            <a:off x="676275" y="3429000"/>
+            <a:ext cx="952500" cy="666750"/>
           </a:xfrm>
           <a:prstGeom xmlns:a="http://schemas.openxmlformats.org/drawingml/2006/main" prst="rect">
             <a:avLst/>
@@ -5981,19 +5317,19 @@
           <a:p xmlns:a="http://schemas.openxmlformats.org/drawingml/2006/main">
             <a:pPr algn="l">
               <a:buNone/>
-              <a:defRPr sz="4350" b="1">
+              <a:defRPr sz="4050" b="1">
                 <a:solidFill>
                   <a:srgbClr val="000000"/>
                 </a:solidFill>
               </a:defRPr>
             </a:pPr>
             <a:r>
-              <a:rPr sz="4350" b="1">
+              <a:rPr sz="4050" b="1">
                 <a:solidFill>
                   <a:srgbClr val="000000"/>
                 </a:solidFill>
               </a:rPr>
-              <a:t>181 / 181</a:t>
+              <a:t>1</a:t>
             </a:r>
           </a:p>
         </p:txBody>
@@ -6014,8 +5350,8 @@
         </p:nvSpPr>
         <p:spPr>
           <a:xfrm xmlns:a="http://schemas.openxmlformats.org/drawingml/2006/main">
-            <a:off x="676275" y="4600575"/>
-            <a:ext cx="3000375" cy="361950"/>
+            <a:off x="676275" y="4238625"/>
+            <a:ext cx="3000375" cy="628650"/>
           </a:xfrm>
           <a:prstGeom xmlns:a="http://schemas.openxmlformats.org/drawingml/2006/main" prst="rect">
             <a:avLst/>
@@ -6044,7 +5380,7 @@
                   <a:srgbClr val="000000"/>
                 </a:solidFill>
               </a:rPr>
-              <a:t>Automated tests</a:t>
+              <a:t>Authenticate the customer</a:t>
             </a:r>
           </a:p>
         </p:txBody>
@@ -6065,8 +5401,8 @@
         </p:nvSpPr>
         <p:spPr>
           <a:xfrm xmlns:a="http://schemas.openxmlformats.org/drawingml/2006/main">
-            <a:off x="676275" y="5095875"/>
-            <a:ext cx="3000375" cy="723900"/>
+            <a:off x="676275" y="5000625"/>
+            <a:ext cx="3000375" cy="838200"/>
           </a:xfrm>
           <a:prstGeom xmlns:a="http://schemas.openxmlformats.org/drawingml/2006/main" prst="rect">
             <a:avLst/>
@@ -6095,7 +5431,7 @@
                   <a:srgbClr val="555B57"/>
                 </a:solidFill>
               </a:rPr>
-              <a:t>Routers, grounding, memory, tools, HTTP, failures, and reset replay.</a:t>
+              <a:t>Use account or session identity plus server-side authorization. Never trust an email address typed into chat as proof of access.</a:t>
             </a:r>
           </a:p>
         </p:txBody>
@@ -6156,7 +5492,7 @@
             <a:avLst/>
           </a:prstGeom>
           <a:solidFill xmlns:a="http://schemas.openxmlformats.org/drawingml/2006/main">
-            <a:srgbClr val="1F714B"/>
+            <a:srgbClr val="D7FA82"/>
           </a:solidFill>
           <a:ln xmlns:a="http://schemas.openxmlformats.org/drawingml/2006/main" w="0">
             <a:noFill/>
@@ -6180,8 +5516,8 @@
         </p:nvSpPr>
         <p:spPr>
           <a:xfrm xmlns:a="http://schemas.openxmlformats.org/drawingml/2006/main">
-            <a:off x="4600575" y="3390900"/>
-            <a:ext cx="3000375" cy="952500"/>
+            <a:off x="4600575" y="3429000"/>
+            <a:ext cx="952500" cy="666750"/>
           </a:xfrm>
           <a:prstGeom xmlns:a="http://schemas.openxmlformats.org/drawingml/2006/main" prst="rect">
             <a:avLst/>
@@ -6198,19 +5534,19 @@
           <a:p xmlns:a="http://schemas.openxmlformats.org/drawingml/2006/main">
             <a:pPr algn="l">
               <a:buNone/>
-              <a:defRPr sz="4350" b="1">
+              <a:defRPr sz="4050" b="1">
                 <a:solidFill>
                   <a:srgbClr val="000000"/>
                 </a:solidFill>
               </a:defRPr>
             </a:pPr>
             <a:r>
-              <a:rPr sz="4350" b="1">
+              <a:rPr sz="4050" b="1">
                 <a:solidFill>
                   <a:srgbClr val="000000"/>
                 </a:solidFill>
               </a:rPr>
-              <a:t>1</a:t>
+              <a:t>2</a:t>
             </a:r>
           </a:p>
         </p:txBody>
@@ -6231,8 +5567,8 @@
         </p:nvSpPr>
         <p:spPr>
           <a:xfrm xmlns:a="http://schemas.openxmlformats.org/drawingml/2006/main">
-            <a:off x="4600575" y="4600575"/>
-            <a:ext cx="3000375" cy="361950"/>
+            <a:off x="4600575" y="4238625"/>
+            <a:ext cx="3000375" cy="628650"/>
           </a:xfrm>
           <a:prstGeom xmlns:a="http://schemas.openxmlformats.org/drawingml/2006/main" prst="rect">
             <a:avLst/>
@@ -6261,7 +5597,7 @@
                   <a:srgbClr val="000000"/>
                 </a:solidFill>
               </a:rPr>
-              <a:t>Guarded write path</a:t>
+              <a:t>Persist the workflow</a:t>
             </a:r>
           </a:p>
         </p:txBody>
@@ -6282,8 +5618,8 @@
         </p:nvSpPr>
         <p:spPr>
           <a:xfrm xmlns:a="http://schemas.openxmlformats.org/drawingml/2006/main">
-            <a:off x="4600575" y="5095875"/>
-            <a:ext cx="3000375" cy="723900"/>
+            <a:off x="4600575" y="5000625"/>
+            <a:ext cx="3000375" cy="838200"/>
           </a:xfrm>
           <a:prstGeom xmlns:a="http://schemas.openxmlformats.org/drawingml/2006/main" prst="rect">
             <a:avLst/>
@@ -6312,7 +5648,7 @@
                   <a:srgbClr val="555B57"/>
                 </a:solidFill>
               </a:rPr>
-              <a:t>The workflow and createReturn both require explicit confirmation.</a:t>
+              <a:t>Store pending actions, policy version, idempotency keys, and audit history so retries are resumable and attributable.</a:t>
             </a:r>
           </a:p>
         </p:txBody>
@@ -6373,7 +5709,7 @@
             <a:avLst/>
           </a:prstGeom>
           <a:solidFill xmlns:a="http://schemas.openxmlformats.org/drawingml/2006/main">
-            <a:srgbClr val="D7FA82"/>
+            <a:srgbClr val="1F714B"/>
           </a:solidFill>
           <a:ln xmlns:a="http://schemas.openxmlformats.org/drawingml/2006/main" w="0">
             <a:noFill/>
@@ -6397,8 +5733,8 @@
         </p:nvSpPr>
         <p:spPr>
           <a:xfrm xmlns:a="http://schemas.openxmlformats.org/drawingml/2006/main">
-            <a:off x="8515350" y="3390900"/>
-            <a:ext cx="3000375" cy="952500"/>
+            <a:off x="8515350" y="3429000"/>
+            <a:ext cx="952500" cy="666750"/>
           </a:xfrm>
           <a:prstGeom xmlns:a="http://schemas.openxmlformats.org/drawingml/2006/main" prst="rect">
             <a:avLst/>
@@ -6415,14 +5751,14 @@
           <a:p xmlns:a="http://schemas.openxmlformats.org/drawingml/2006/main">
             <a:pPr algn="l">
               <a:buNone/>
-              <a:defRPr sz="4350" b="1">
+              <a:defRPr sz="4050" b="1">
                 <a:solidFill>
                   <a:srgbClr val="000000"/>
                 </a:solidFill>
               </a:defRPr>
             </a:pPr>
             <a:r>
-              <a:rPr sz="4350" b="1">
+              <a:rPr sz="4050" b="1">
                 <a:solidFill>
                   <a:srgbClr val="000000"/>
                 </a:solidFill>
@@ -6448,8 +5784,8 @@
         </p:nvSpPr>
         <p:spPr>
           <a:xfrm xmlns:a="http://schemas.openxmlformats.org/drawingml/2006/main">
-            <a:off x="8515350" y="4600575"/>
-            <a:ext cx="3000375" cy="361950"/>
+            <a:off x="8515350" y="4238625"/>
+            <a:ext cx="3000375" cy="628650"/>
           </a:xfrm>
           <a:prstGeom xmlns:a="http://schemas.openxmlformats.org/drawingml/2006/main" prst="rect">
             <a:avLst/>
@@ -6478,7 +5814,7 @@
                   <a:srgbClr val="000000"/>
                 </a:solidFill>
               </a:rPr>
-              <a:t>Grounded FAQ topics</a:t>
+              <a:t>Then expand capability</a:t>
             </a:r>
           </a:p>
         </p:txBody>
@@ -6499,8 +5835,8 @@
         </p:nvSpPr>
         <p:spPr>
           <a:xfrm xmlns:a="http://schemas.openxmlformats.org/drawingml/2006/main">
-            <a:off x="8515350" y="5095875"/>
-            <a:ext cx="3000375" cy="723900"/>
+            <a:off x="8515350" y="5000625"/>
+            <a:ext cx="3000375" cy="838200"/>
           </a:xfrm>
           <a:prstGeom xmlns:a="http://schemas.openxmlformats.org/drawingml/2006/main" prst="rect">
             <a:avLst/>
@@ -6529,7 +5865,7 @@
                   <a:srgbClr val="555B57"/>
                 </a:solidFill>
               </a:rPr>
-              <a:t>Shipping times, return policy, and password reset; unsupported questions hand off.</a:t>
+              <a:t>Connect real order and help-desk systems. Add production evals and monitoring before expanding the action set.</a:t>
             </a:r>
           </a:p>
         </p:txBody>
@@ -6568,16 +5904,16 @@
           <a:p xmlns:a="http://schemas.openxmlformats.org/drawingml/2006/main">
             <a:pPr algn="r">
               <a:buNone/>
-              <a:defRPr sz="975" b="0">
-                <a:solidFill>
-                  <a:srgbClr val="000000"/>
-                </a:solidFill>
-              </a:defRPr>
-            </a:pPr>
-            <a:r>
-              <a:rPr sz="975" b="0">
-                <a:solidFill>
-                  <a:srgbClr val="000000"/>
+              <a:defRPr sz="1350" b="0">
+                <a:solidFill>
+                  <a:srgbClr val="555B57"/>
+                </a:solidFill>
+              </a:defRPr>
+            </a:pPr>
+            <a:r>
+              <a:rPr sz="1350" b="0">
+                <a:solidFill>
+                  <a:srgbClr val="555B57"/>
                 </a:solidFill>
               </a:rPr>
               <a:t>5</a:t>
